--- a/Presentation/Progress_Report_AMIRIS_2026-08-27_UPDATED.pptx
+++ b/Presentation/Progress_Report_AMIRIS_2026-08-27_UPDATED.pptx
@@ -46,6 +46,11 @@
     <p:sldId id="298" r:id="rId48"/>
     <p:sldId id="299" r:id="rId49"/>
     <p:sldId id="300" r:id="rId50"/>
+    <p:sldId id="301" r:id="rId51"/>
+    <p:sldId id="302" r:id="rId52"/>
+    <p:sldId id="303" r:id="rId53"/>
+    <p:sldId id="304" r:id="rId54"/>
+    <p:sldId id="305" r:id="rId55"/>
     <p:sldId id="274" r:id="rId20"/>
     <p:sldId id="275" r:id="rId21"/>
     <p:sldId id="276" r:id="rId22"/>
@@ -9461,6 +9466,1902 @@
 </file>
 
 <file path=ppt/slides/slide33.xml><?xml version="1.0" encoding="utf-8"?>
+<p:sld xmlns:a="http://schemas.openxmlformats.org/drawingml/2006/main" xmlns:p="http://schemas.openxmlformats.org/presentationml/2006/main" xmlns:r="http://schemas.openxmlformats.org/officeDocument/2006/relationships">
+  <p:cSld>
+    <p:spTree>
+      <p:nvGrpSpPr>
+        <p:cNvPr id="1" name=""/>
+        <p:cNvGrpSpPr/>
+        <p:nvPr/>
+      </p:nvGrpSpPr>
+      <p:grpSpPr/>
+      <p:sp>
+        <p:nvSpPr>
+          <p:cNvPr id="2" name="Rectangle 1"/>
+          <p:cNvSpPr/>
+          <p:nvPr/>
+        </p:nvSpPr>
+        <p:spPr>
+          <a:xfrm>
+            <a:off x="0" y="0"/>
+            <a:ext cx="12192000" cy="960120"/>
+          </a:xfrm>
+          <a:prstGeom prst="rect">
+            <a:avLst/>
+          </a:prstGeom>
+          <a:solidFill>
+            <a:srgbClr val="1F3A4D"/>
+          </a:solidFill>
+          <a:ln>
+            <a:noFill/>
+          </a:ln>
+        </p:spPr>
+        <p:style>
+          <a:lnRef idx="1">
+            <a:schemeClr val="accent1"/>
+          </a:lnRef>
+          <a:fillRef idx="3">
+            <a:schemeClr val="accent1"/>
+          </a:fillRef>
+          <a:effectRef idx="2">
+            <a:schemeClr val="accent1"/>
+          </a:effectRef>
+          <a:fontRef idx="minor">
+            <a:schemeClr val="lt1"/>
+          </a:fontRef>
+        </p:style>
+        <p:txBody>
+          <a:bodyPr rtlCol="0" anchor="ctr" lIns="365760" tIns="73152" wrap="square"/>
+          <a:lstStyle/>
+          <a:p>
+            <a:pPr algn="ctr">
+              <a:defRPr sz="2600" b="1">
+                <a:solidFill>
+                  <a:srgbClr val="FFFFFF"/>
+                </a:solidFill>
+              </a:defRPr>
+            </a:pPr>
+            <a:r>
+              <a:t>The Big Idea: A Real Two-Way Trading Partner for Germany</a:t>
+            </a:r>
+          </a:p>
+          <a:p>
+            <a:pPr>
+              <a:defRPr sz="1400">
+                <a:solidFill>
+                  <a:srgbClr val="C8D2DA"/>
+                </a:solidFill>
+              </a:defRPr>
+            </a:pPr>
+            <a:r>
+              <a:t>Moving from the small experiments to the one big remaining idea</a:t>
+            </a:r>
+          </a:p>
+        </p:txBody>
+      </p:sp>
+      <p:sp>
+        <p:nvSpPr>
+          <p:cNvPr id="3" name="TextBox 2"/>
+          <p:cNvSpPr txBox="1"/>
+          <p:nvPr/>
+        </p:nvSpPr>
+        <p:spPr>
+          <a:xfrm>
+            <a:off x="11551920" y="6446520"/>
+            <a:ext cx="457200" cy="320040"/>
+          </a:xfrm>
+          <a:prstGeom prst="rect">
+            <a:avLst/>
+          </a:prstGeom>
+          <a:noFill/>
+        </p:spPr>
+        <p:txBody>
+          <a:bodyPr wrap="none">
+            <a:spAutoFit/>
+          </a:bodyPr>
+          <a:lstStyle/>
+          <a:p>
+            <a:pPr>
+              <a:defRPr sz="1100">
+                <a:solidFill>
+                  <a:srgbClr val="5A605C"/>
+                </a:solidFill>
+              </a:defRPr>
+            </a:pPr>
+            <a:r>
+              <a:t>33</a:t>
+            </a:r>
+          </a:p>
+        </p:txBody>
+      </p:sp>
+      <p:sp>
+        <p:nvSpPr>
+          <p:cNvPr id="4" name="TextBox 3"/>
+          <p:cNvSpPr txBox="1"/>
+          <p:nvPr/>
+        </p:nvSpPr>
+        <p:spPr>
+          <a:xfrm>
+            <a:off x="502920" y="1234440"/>
+            <a:ext cx="11155680" cy="5303520"/>
+          </a:xfrm>
+          <a:prstGeom prst="rect">
+            <a:avLst/>
+          </a:prstGeom>
+          <a:noFill/>
+        </p:spPr>
+        <p:txBody>
+          <a:bodyPr wrap="square">
+            <a:spAutoFit/>
+          </a:bodyPr>
+          <a:lstStyle/>
+          <a:p>
+            <a:pPr>
+              <a:spcAft>
+                <a:spcPts val="1000"/>
+              </a:spcAft>
+              <a:defRPr sz="1800" b="1">
+                <a:solidFill>
+                  <a:srgbClr val="1E2220"/>
+                </a:solidFill>
+              </a:defRPr>
+            </a:pPr>
+            <a:r>
+              <a:t>•  Every smaller idea we tested (price cap, start-up cost, bidding floor) came up empty or too limited</a:t>
+            </a:r>
+          </a:p>
+          <a:p>
+            <a:pPr>
+              <a:spcAft>
+                <a:spcPts val="1000"/>
+              </a:spcAft>
+              <a:defRPr sz="1800" b="1">
+                <a:solidFill>
+                  <a:srgbClr val="1E2220"/>
+                </a:solidFill>
+              </a:defRPr>
+            </a:pPr>
+            <a:r>
+              <a:t>•  The one big lever left untested: let the model properly BUY AND SELL power across the border, not just buy</a:t>
+            </a:r>
+          </a:p>
+          <a:p>
+            <a:pPr>
+              <a:spcAft>
+                <a:spcPts val="1000"/>
+              </a:spcAft>
+              <a:defRPr sz="1800" b="1">
+                <a:solidFill>
+                  <a:srgbClr val="1E2220"/>
+                </a:solidFill>
+              </a:defRPr>
+            </a:pPr>
+            <a:r>
+              <a:t>•  AMIRIS has a real, working template for exactly this - a second market 'zone' connected to Germany's own, trading both ways</a:t>
+            </a:r>
+          </a:p>
+          <a:p>
+            <a:pPr>
+              <a:spcAft>
+                <a:spcPts val="1000"/>
+              </a:spcAft>
+              <a:defRPr sz="1800" b="1">
+                <a:solidFill>
+                  <a:srgbClr val="1E2220"/>
+                </a:solidFill>
+              </a:defRPr>
+            </a:pPr>
+            <a:r>
+              <a:t>•  Plan: source real data first, build a first working version, then refine it step by step</a:t>
+            </a:r>
+          </a:p>
+        </p:txBody>
+      </p:sp>
+    </p:spTree>
+  </p:cSld>
+  <p:clrMapOvr>
+    <a:masterClrMapping/>
+  </p:clrMapOvr>
+</p:sld>
+</file>
+
+<file path=ppt/slides/slide34.xml><?xml version="1.0" encoding="utf-8"?>
+<p:sld xmlns:a="http://schemas.openxmlformats.org/drawingml/2006/main" xmlns:p="http://schemas.openxmlformats.org/presentationml/2006/main" xmlns:r="http://schemas.openxmlformats.org/officeDocument/2006/relationships">
+  <p:cSld>
+    <p:spTree>
+      <p:nvGrpSpPr>
+        <p:cNvPr id="1" name=""/>
+        <p:cNvGrpSpPr/>
+        <p:nvPr/>
+      </p:nvGrpSpPr>
+      <p:grpSpPr/>
+      <p:sp>
+        <p:nvSpPr>
+          <p:cNvPr id="2" name="Rectangle 1"/>
+          <p:cNvSpPr/>
+          <p:nvPr/>
+        </p:nvSpPr>
+        <p:spPr>
+          <a:xfrm>
+            <a:off x="0" y="0"/>
+            <a:ext cx="12192000" cy="960120"/>
+          </a:xfrm>
+          <a:prstGeom prst="rect">
+            <a:avLst/>
+          </a:prstGeom>
+          <a:solidFill>
+            <a:srgbClr val="1F3A4D"/>
+          </a:solidFill>
+          <a:ln>
+            <a:noFill/>
+          </a:ln>
+        </p:spPr>
+        <p:style>
+          <a:lnRef idx="1">
+            <a:schemeClr val="accent1"/>
+          </a:lnRef>
+          <a:fillRef idx="3">
+            <a:schemeClr val="accent1"/>
+          </a:fillRef>
+          <a:effectRef idx="2">
+            <a:schemeClr val="accent1"/>
+          </a:effectRef>
+          <a:fontRef idx="minor">
+            <a:schemeClr val="lt1"/>
+          </a:fontRef>
+        </p:style>
+        <p:txBody>
+          <a:bodyPr rtlCol="0" anchor="ctr" lIns="365760" tIns="73152" wrap="square"/>
+          <a:lstStyle/>
+          <a:p>
+            <a:pPr algn="ctr">
+              <a:defRPr sz="2600" b="1">
+                <a:solidFill>
+                  <a:srgbClr val="FFFFFF"/>
+                </a:solidFill>
+              </a:defRPr>
+            </a:pPr>
+            <a:r>
+              <a:t>Sourcing Real Data From Scratch for a 'Rest of Europe' Zone</a:t>
+            </a:r>
+          </a:p>
+          <a:p>
+            <a:pPr>
+              <a:defRPr sz="1400">
+                <a:solidFill>
+                  <a:srgbClr val="C8D2DA"/>
+                </a:solidFill>
+              </a:defRPr>
+            </a:pPr>
+            <a:r>
+              <a:t>Nothing invented - every number traced to a real source</a:t>
+            </a:r>
+          </a:p>
+        </p:txBody>
+      </p:sp>
+      <p:sp>
+        <p:nvSpPr>
+          <p:cNvPr id="3" name="TextBox 2"/>
+          <p:cNvSpPr txBox="1"/>
+          <p:nvPr/>
+        </p:nvSpPr>
+        <p:spPr>
+          <a:xfrm>
+            <a:off x="11551920" y="6446520"/>
+            <a:ext cx="457200" cy="320040"/>
+          </a:xfrm>
+          <a:prstGeom prst="rect">
+            <a:avLst/>
+          </a:prstGeom>
+          <a:noFill/>
+        </p:spPr>
+        <p:txBody>
+          <a:bodyPr wrap="none">
+            <a:spAutoFit/>
+          </a:bodyPr>
+          <a:lstStyle/>
+          <a:p>
+            <a:pPr>
+              <a:defRPr sz="1100">
+                <a:solidFill>
+                  <a:srgbClr val="5A605C"/>
+                </a:solidFill>
+              </a:defRPr>
+            </a:pPr>
+            <a:r>
+              <a:t>34</a:t>
+            </a:r>
+          </a:p>
+        </p:txBody>
+      </p:sp>
+      <p:sp>
+        <p:nvSpPr>
+          <p:cNvPr id="4" name="TextBox 3"/>
+          <p:cNvSpPr txBox="1"/>
+          <p:nvPr/>
+        </p:nvSpPr>
+        <p:spPr>
+          <a:xfrm>
+            <a:off x="502920" y="1234440"/>
+            <a:ext cx="11155680" cy="5303520"/>
+          </a:xfrm>
+          <a:prstGeom prst="rect">
+            <a:avLst/>
+          </a:prstGeom>
+          <a:noFill/>
+        </p:spPr>
+        <p:txBody>
+          <a:bodyPr wrap="square">
+            <a:spAutoFit/>
+          </a:bodyPr>
+          <a:lstStyle/>
+          <a:p>
+            <a:pPr>
+              <a:spcAft>
+                <a:spcPts val="1000"/>
+              </a:spcAft>
+              <a:defRPr sz="1800" b="1">
+                <a:solidFill>
+                  <a:srgbClr val="1E2220"/>
+                </a:solidFill>
+              </a:defRPr>
+            </a:pPr>
+            <a:r>
+              <a:t>•  Needed: how much power the rest of Europe uses, what it's generated from, and how much can physically flow across the border</a:t>
+            </a:r>
+          </a:p>
+          <a:p>
+            <a:pPr>
+              <a:spcAft>
+                <a:spcPts val="1000"/>
+              </a:spcAft>
+              <a:defRPr sz="1800" b="1">
+                <a:solidFill>
+                  <a:srgbClr val="1E2220"/>
+                </a:solidFill>
+              </a:defRPr>
+            </a:pPr>
+            <a:r>
+              <a:t>•  Pulled real 2023 figures (demand, power plant types) for Germany's 10 real neighbouring countries from Eurostat</a:t>
+            </a:r>
+          </a:p>
+          <a:p>
+            <a:pPr>
+              <a:spcAft>
+                <a:spcPts val="1000"/>
+              </a:spcAft>
+              <a:defRPr sz="1800" b="1">
+                <a:solidFill>
+                  <a:srgbClr val="1E2220"/>
+                </a:solidFill>
+              </a:defRPr>
+            </a:pPr>
+            <a:r>
+              <a:t>•  Pulled real weather-driven wind/solar output the same way we did for Germany's own model</a:t>
+            </a:r>
+          </a:p>
+          <a:p>
+            <a:pPr>
+              <a:spcAft>
+                <a:spcPts val="1000"/>
+              </a:spcAft>
+              <a:defRPr sz="1800" b="1">
+                <a:solidFill>
+                  <a:srgbClr val="1E2220"/>
+                </a:solidFill>
+              </a:defRPr>
+            </a:pPr>
+            <a:r>
+              <a:t>•  Hit a real multi-day outage on Europe's official cross-border data platform partway through - worked around it with an alternative real source, then went back and finished the job once it recovered</a:t>
+            </a:r>
+          </a:p>
+        </p:txBody>
+      </p:sp>
+    </p:spTree>
+  </p:cSld>
+  <p:clrMapOvr>
+    <a:masterClrMapping/>
+  </p:clrMapOvr>
+</p:sld>
+</file>
+
+<file path=ppt/slides/slide35.xml><?xml version="1.0" encoding="utf-8"?>
+<p:sld xmlns:a="http://schemas.openxmlformats.org/drawingml/2006/main" xmlns:p="http://schemas.openxmlformats.org/presentationml/2006/main" xmlns:r="http://schemas.openxmlformats.org/officeDocument/2006/relationships">
+  <p:cSld>
+    <p:spTree>
+      <p:nvGrpSpPr>
+        <p:cNvPr id="1" name=""/>
+        <p:cNvGrpSpPr/>
+        <p:nvPr/>
+      </p:nvGrpSpPr>
+      <p:grpSpPr/>
+      <p:sp>
+        <p:nvSpPr>
+          <p:cNvPr id="2" name="Rectangle 1"/>
+          <p:cNvSpPr/>
+          <p:nvPr/>
+        </p:nvSpPr>
+        <p:spPr>
+          <a:xfrm>
+            <a:off x="0" y="0"/>
+            <a:ext cx="12192000" cy="960120"/>
+          </a:xfrm>
+          <a:prstGeom prst="rect">
+            <a:avLst/>
+          </a:prstGeom>
+          <a:solidFill>
+            <a:srgbClr val="1F3A4D"/>
+          </a:solidFill>
+          <a:ln>
+            <a:noFill/>
+          </a:ln>
+        </p:spPr>
+        <p:style>
+          <a:lnRef idx="1">
+            <a:schemeClr val="accent1"/>
+          </a:lnRef>
+          <a:fillRef idx="3">
+            <a:schemeClr val="accent1"/>
+          </a:fillRef>
+          <a:effectRef idx="2">
+            <a:schemeClr val="accent1"/>
+          </a:effectRef>
+          <a:fontRef idx="minor">
+            <a:schemeClr val="lt1"/>
+          </a:fontRef>
+        </p:style>
+        <p:txBody>
+          <a:bodyPr rtlCol="0" anchor="ctr" lIns="365760" tIns="73152" wrap="square"/>
+          <a:lstStyle/>
+          <a:p>
+            <a:pPr algn="ctr">
+              <a:defRPr sz="2600" b="1">
+                <a:solidFill>
+                  <a:srgbClr val="FFFFFF"/>
+                </a:solidFill>
+              </a:defRPr>
+            </a:pPr>
+            <a:r>
+              <a:t>The First Working Two-Way Market</a:t>
+            </a:r>
+          </a:p>
+          <a:p>
+            <a:pPr>
+              <a:defRPr sz="1400">
+                <a:solidFill>
+                  <a:srgbClr val="C8D2DA"/>
+                </a:solidFill>
+              </a:defRPr>
+            </a:pPr>
+            <a:r>
+              <a:t>A real improvement in one measure, a real cost in another - both honestly reported</a:t>
+            </a:r>
+          </a:p>
+        </p:txBody>
+      </p:sp>
+      <p:sp>
+        <p:nvSpPr>
+          <p:cNvPr id="3" name="TextBox 2"/>
+          <p:cNvSpPr txBox="1"/>
+          <p:nvPr/>
+        </p:nvSpPr>
+        <p:spPr>
+          <a:xfrm>
+            <a:off x="11551920" y="6446520"/>
+            <a:ext cx="457200" cy="320040"/>
+          </a:xfrm>
+          <a:prstGeom prst="rect">
+            <a:avLst/>
+          </a:prstGeom>
+          <a:noFill/>
+        </p:spPr>
+        <p:txBody>
+          <a:bodyPr wrap="none">
+            <a:spAutoFit/>
+          </a:bodyPr>
+          <a:lstStyle/>
+          <a:p>
+            <a:pPr>
+              <a:defRPr sz="1100">
+                <a:solidFill>
+                  <a:srgbClr val="5A605C"/>
+                </a:solidFill>
+              </a:defRPr>
+            </a:pPr>
+            <a:r>
+              <a:t>35</a:t>
+            </a:r>
+          </a:p>
+        </p:txBody>
+      </p:sp>
+      <p:graphicFrame>
+        <p:nvGraphicFramePr>
+          <p:cNvPr id="4" name="Table 3"/>
+          <p:cNvGraphicFramePr>
+            <a:graphicFrameLocks noGrp="1"/>
+          </p:cNvGraphicFramePr>
+          <p:nvPr/>
+        </p:nvGraphicFramePr>
+        <p:xfrm>
+          <a:off x="640080" y="1371600"/>
+          <a:ext cx="11338560" cy="1508760"/>
+        </p:xfrm>
+        <a:graphic>
+          <a:graphicData uri="http://schemas.openxmlformats.org/drawingml/2006/table">
+            <a:tbl>
+              <a:tblPr firstRow="1" bandRow="1">
+                <a:tableStyleId>{5C22544A-7EE6-4342-B048-85BDC9FD1C3A}</a:tableStyleId>
+              </a:tblPr>
+              <a:tblGrid>
+                <a:gridCol w="4572000"/>
+                <a:gridCol w="3383280"/>
+                <a:gridCol w="3383280"/>
+              </a:tblGrid>
+              <a:tr h="502920">
+                <a:tc>
+                  <a:txBody>
+                    <a:bodyPr/>
+                    <a:lstStyle/>
+                    <a:p>
+                      <a:pPr algn="ctr">
+                        <a:defRPr b="1" sz="1300">
+                          <a:solidFill>
+                            <a:srgbClr val="FFFFFF"/>
+                          </a:solidFill>
+                        </a:defRPr>
+                      </a:pPr>
+                    </a:p>
+                  </a:txBody>
+                  <a:tcPr>
+                    <a:solidFill>
+                      <a:srgbClr val="1F3A4D"/>
+                    </a:solidFill>
+                  </a:tcPr>
+                </a:tc>
+                <a:tc>
+                  <a:txBody>
+                    <a:bodyPr/>
+                    <a:lstStyle/>
+                    <a:p>
+                      <a:pPr algn="ctr">
+                        <a:defRPr b="1" sz="1300">
+                          <a:solidFill>
+                            <a:srgbClr val="FFFFFF"/>
+                          </a:solidFill>
+                        </a:defRPr>
+                      </a:pPr>
+                      <a:r>
+                        <a:t>Before (import-only)</a:t>
+                      </a:r>
+                    </a:p>
+                  </a:txBody>
+                  <a:tcPr>
+                    <a:solidFill>
+                      <a:srgbClr val="1F3A4D"/>
+                    </a:solidFill>
+                  </a:tcPr>
+                </a:tc>
+                <a:tc>
+                  <a:txBody>
+                    <a:bodyPr/>
+                    <a:lstStyle/>
+                    <a:p>
+                      <a:pPr algn="ctr">
+                        <a:defRPr b="1" sz="1300">
+                          <a:solidFill>
+                            <a:srgbClr val="FFFFFF"/>
+                          </a:solidFill>
+                        </a:defRPr>
+                      </a:pPr>
+                      <a:r>
+                        <a:t>First working version</a:t>
+                      </a:r>
+                    </a:p>
+                  </a:txBody>
+                  <a:tcPr>
+                    <a:solidFill>
+                      <a:srgbClr val="1F3A4D"/>
+                    </a:solidFill>
+                  </a:tcPr>
+                </a:tc>
+              </a:tr>
+              <a:tr h="502920">
+                <a:tc>
+                  <a:txBody>
+                    <a:bodyPr/>
+                    <a:lstStyle/>
+                    <a:p>
+                      <a:pPr algn="ctr">
+                        <a:defRPr sz="1200" b="1">
+                          <a:solidFill>
+                            <a:srgbClr val="1E2220"/>
+                          </a:solidFill>
+                        </a:defRPr>
+                      </a:pPr>
+                      <a:r>
+                        <a:t>Match quality (trustworthy score)</a:t>
+                      </a:r>
+                    </a:p>
+                  </a:txBody>
+                  <a:tcPr>
+                    <a:solidFill>
+                      <a:srgbClr val="FFFFFF"/>
+                    </a:solidFill>
+                  </a:tcPr>
+                </a:tc>
+                <a:tc>
+                  <a:txBody>
+                    <a:bodyPr/>
+                    <a:lstStyle/>
+                    <a:p>
+                      <a:pPr algn="ctr">
+                        <a:defRPr sz="1200" b="0">
+                          <a:solidFill>
+                            <a:srgbClr val="1E2220"/>
+                          </a:solidFill>
+                        </a:defRPr>
+                      </a:pPr>
+                      <a:r>
+                        <a:t>0.675</a:t>
+                      </a:r>
+                    </a:p>
+                  </a:txBody>
+                  <a:tcPr>
+                    <a:solidFill>
+                      <a:srgbClr val="FFFFFF"/>
+                    </a:solidFill>
+                  </a:tcPr>
+                </a:tc>
+                <a:tc>
+                  <a:txBody>
+                    <a:bodyPr/>
+                    <a:lstStyle/>
+                    <a:p>
+                      <a:pPr algn="ctr">
+                        <a:defRPr sz="1200" b="0">
+                          <a:solidFill>
+                            <a:srgbClr val="1E2220"/>
+                          </a:solidFill>
+                        </a:defRPr>
+                      </a:pPr>
+                      <a:r>
+                        <a:t>0.739</a:t>
+                      </a:r>
+                    </a:p>
+                  </a:txBody>
+                  <a:tcPr>
+                    <a:solidFill>
+                      <a:srgbClr val="FFFFFF"/>
+                    </a:solidFill>
+                  </a:tcPr>
+                </a:tc>
+              </a:tr>
+              <a:tr h="502920">
+                <a:tc>
+                  <a:txBody>
+                    <a:bodyPr/>
+                    <a:lstStyle/>
+                    <a:p>
+                      <a:pPr algn="ctr">
+                        <a:defRPr sz="1200" b="1">
+                          <a:solidFill>
+                            <a:srgbClr val="1E2220"/>
+                          </a:solidFill>
+                        </a:defRPr>
+                      </a:pPr>
+                      <a:r>
+                        <a:t>Average price gap</a:t>
+                      </a:r>
+                    </a:p>
+                  </a:txBody>
+                  <a:tcPr>
+                    <a:solidFill>
+                      <a:srgbClr val="EEF0E9"/>
+                    </a:solidFill>
+                  </a:tcPr>
+                </a:tc>
+                <a:tc>
+                  <a:txBody>
+                    <a:bodyPr/>
+                    <a:lstStyle/>
+                    <a:p>
+                      <a:pPr algn="ctr">
+                        <a:defRPr sz="1200" b="0">
+                          <a:solidFill>
+                            <a:srgbClr val="1E2220"/>
+                          </a:solidFill>
+                        </a:defRPr>
+                      </a:pPr>
+                      <a:r>
+                        <a:t>-11.86</a:t>
+                      </a:r>
+                    </a:p>
+                  </a:txBody>
+                  <a:tcPr>
+                    <a:solidFill>
+                      <a:srgbClr val="EEF0E9"/>
+                    </a:solidFill>
+                  </a:tcPr>
+                </a:tc>
+                <a:tc>
+                  <a:txBody>
+                    <a:bodyPr/>
+                    <a:lstStyle/>
+                    <a:p>
+                      <a:pPr algn="ctr">
+                        <a:defRPr sz="1200" b="0">
+                          <a:solidFill>
+                            <a:srgbClr val="1E2220"/>
+                          </a:solidFill>
+                        </a:defRPr>
+                      </a:pPr>
+                      <a:r>
+                        <a:t>-30.39</a:t>
+                      </a:r>
+                    </a:p>
+                  </a:txBody>
+                  <a:tcPr>
+                    <a:solidFill>
+                      <a:srgbClr val="EEF0E9"/>
+                    </a:solidFill>
+                  </a:tcPr>
+                </a:tc>
+              </a:tr>
+            </a:tbl>
+          </a:graphicData>
+        </a:graphic>
+      </p:graphicFrame>
+      <p:sp>
+        <p:nvSpPr>
+          <p:cNvPr id="5" name="TextBox 4"/>
+          <p:cNvSpPr txBox="1"/>
+          <p:nvPr/>
+        </p:nvSpPr>
+        <p:spPr>
+          <a:xfrm>
+            <a:off x="640080" y="3063240"/>
+            <a:ext cx="10881360" cy="1097280"/>
+          </a:xfrm>
+          <a:prstGeom prst="rect">
+            <a:avLst/>
+          </a:prstGeom>
+          <a:noFill/>
+        </p:spPr>
+        <p:txBody>
+          <a:bodyPr wrap="none">
+            <a:spAutoFit/>
+          </a:bodyPr>
+          <a:lstStyle/>
+          <a:p>
+            <a:pPr>
+              <a:defRPr sz="1300" i="1">
+                <a:solidFill>
+                  <a:srgbClr val="5A605C"/>
+                </a:solidFill>
+              </a:defRPr>
+            </a:pPr>
+            <a:r>
+              <a:t>Match quality genuinely improved. But the average price moved further from real - explained by a placeholder guess for how much power can flow across the border, and the other side having no storage/flexibility of its own yet.</a:t>
+            </a:r>
+          </a:p>
+        </p:txBody>
+      </p:sp>
+    </p:spTree>
+  </p:cSld>
+  <p:clrMapOvr>
+    <a:masterClrMapping/>
+  </p:clrMapOvr>
+</p:sld>
+</file>
+
+<file path=ppt/slides/slide36.xml><?xml version="1.0" encoding="utf-8"?>
+<p:sld xmlns:a="http://schemas.openxmlformats.org/drawingml/2006/main" xmlns:p="http://schemas.openxmlformats.org/presentationml/2006/main" xmlns:r="http://schemas.openxmlformats.org/officeDocument/2006/relationships">
+  <p:cSld>
+    <p:spTree>
+      <p:nvGrpSpPr>
+        <p:cNvPr id="1" name=""/>
+        <p:cNvGrpSpPr/>
+        <p:nvPr/>
+      </p:nvGrpSpPr>
+      <p:grpSpPr/>
+      <p:sp>
+        <p:nvSpPr>
+          <p:cNvPr id="2" name="Rectangle 1"/>
+          <p:cNvSpPr/>
+          <p:nvPr/>
+        </p:nvSpPr>
+        <p:spPr>
+          <a:xfrm>
+            <a:off x="0" y="0"/>
+            <a:ext cx="12192000" cy="960120"/>
+          </a:xfrm>
+          <a:prstGeom prst="rect">
+            <a:avLst/>
+          </a:prstGeom>
+          <a:solidFill>
+            <a:srgbClr val="1F3A4D"/>
+          </a:solidFill>
+          <a:ln>
+            <a:noFill/>
+          </a:ln>
+        </p:spPr>
+        <p:style>
+          <a:lnRef idx="1">
+            <a:schemeClr val="accent1"/>
+          </a:lnRef>
+          <a:fillRef idx="3">
+            <a:schemeClr val="accent1"/>
+          </a:fillRef>
+          <a:effectRef idx="2">
+            <a:schemeClr val="accent1"/>
+          </a:effectRef>
+          <a:fontRef idx="minor">
+            <a:schemeClr val="lt1"/>
+          </a:fontRef>
+        </p:style>
+        <p:txBody>
+          <a:bodyPr rtlCol="0" anchor="ctr" lIns="365760" tIns="73152" wrap="square"/>
+          <a:lstStyle/>
+          <a:p>
+            <a:pPr algn="ctr">
+              <a:defRPr sz="2600" b="1">
+                <a:solidFill>
+                  <a:srgbClr val="FFFFFF"/>
+                </a:solidFill>
+              </a:defRPr>
+            </a:pPr>
+            <a:r>
+              <a:t>Real Border Data Replaces the Guess</a:t>
+            </a:r>
+          </a:p>
+          <a:p>
+            <a:pPr>
+              <a:defRPr sz="1400">
+                <a:solidFill>
+                  <a:srgbClr val="C8D2DA"/>
+                </a:solidFill>
+              </a:defRPr>
+            </a:pPr>
+            <a:r>
+              <a:t>Turning a placeholder into a real, sourced number</a:t>
+            </a:r>
+          </a:p>
+        </p:txBody>
+      </p:sp>
+      <p:sp>
+        <p:nvSpPr>
+          <p:cNvPr id="3" name="TextBox 2"/>
+          <p:cNvSpPr txBox="1"/>
+          <p:nvPr/>
+        </p:nvSpPr>
+        <p:spPr>
+          <a:xfrm>
+            <a:off x="11551920" y="6446520"/>
+            <a:ext cx="457200" cy="320040"/>
+          </a:xfrm>
+          <a:prstGeom prst="rect">
+            <a:avLst/>
+          </a:prstGeom>
+          <a:noFill/>
+        </p:spPr>
+        <p:txBody>
+          <a:bodyPr wrap="none">
+            <a:spAutoFit/>
+          </a:bodyPr>
+          <a:lstStyle/>
+          <a:p>
+            <a:pPr>
+              <a:defRPr sz="1100">
+                <a:solidFill>
+                  <a:srgbClr val="5A605C"/>
+                </a:solidFill>
+              </a:defRPr>
+            </a:pPr>
+            <a:r>
+              <a:t>36</a:t>
+            </a:r>
+          </a:p>
+        </p:txBody>
+      </p:sp>
+      <p:sp>
+        <p:nvSpPr>
+          <p:cNvPr id="4" name="TextBox 3"/>
+          <p:cNvSpPr txBox="1"/>
+          <p:nvPr/>
+        </p:nvSpPr>
+        <p:spPr>
+          <a:xfrm>
+            <a:off x="502920" y="1234440"/>
+            <a:ext cx="11155680" cy="5303520"/>
+          </a:xfrm>
+          <a:prstGeom prst="rect">
+            <a:avLst/>
+          </a:prstGeom>
+          <a:noFill/>
+        </p:spPr>
+        <p:txBody>
+          <a:bodyPr wrap="square">
+            <a:spAutoFit/>
+          </a:bodyPr>
+          <a:lstStyle/>
+          <a:p>
+            <a:pPr>
+              <a:spcAft>
+                <a:spcPts val="1000"/>
+              </a:spcAft>
+              <a:defRPr sz="1800" b="1">
+                <a:solidFill>
+                  <a:srgbClr val="1E2220"/>
+                </a:solidFill>
+              </a:defRPr>
+            </a:pPr>
+            <a:r>
+              <a:t>•  The European data platform came back online - immediately used it to replace the placeholder guess</a:t>
+            </a:r>
+          </a:p>
+          <a:p>
+            <a:pPr>
+              <a:spcAft>
+                <a:spcPts val="1000"/>
+              </a:spcAft>
+              <a:defRPr sz="1800" b="1">
+                <a:solidFill>
+                  <a:srgbClr val="1E2220"/>
+                </a:solidFill>
+              </a:defRPr>
+            </a:pPr>
+            <a:r>
+              <a:t>•  Pulled real, hour-by-hour cross-border flow data for all of Germany's real neighbouring borders</a:t>
+            </a:r>
+          </a:p>
+          <a:p>
+            <a:pPr>
+              <a:spcAft>
+                <a:spcPts val="1000"/>
+              </a:spcAft>
+              <a:defRPr sz="1800" b="1">
+                <a:solidFill>
+                  <a:srgbClr val="1E2220"/>
+                </a:solidFill>
+              </a:defRPr>
+            </a:pPr>
+            <a:r>
+              <a:t>•  Used that real data to set a genuine, grounded limit on how much power can flow - not a guess</a:t>
+            </a:r>
+          </a:p>
+          <a:p>
+            <a:pPr>
+              <a:spcAft>
+                <a:spcPts val="1000"/>
+              </a:spcAft>
+              <a:defRPr sz="1800" b="1">
+                <a:solidFill>
+                  <a:srgbClr val="1E2220"/>
+                </a:solidFill>
+              </a:defRPr>
+            </a:pPr>
+            <a:r>
+              <a:t>•  Result: confirmed the match-quality improvement was real, not just luck from an oversized placeholder guess</a:t>
+            </a:r>
+          </a:p>
+        </p:txBody>
+      </p:sp>
+    </p:spTree>
+  </p:cSld>
+  <p:clrMapOvr>
+    <a:masterClrMapping/>
+  </p:clrMapOvr>
+</p:sld>
+</file>
+
+<file path=ppt/slides/slide37.xml><?xml version="1.0" encoding="utf-8"?>
+<p:sld xmlns:a="http://schemas.openxmlformats.org/drawingml/2006/main" xmlns:p="http://schemas.openxmlformats.org/presentationml/2006/main" xmlns:r="http://schemas.openxmlformats.org/officeDocument/2006/relationships">
+  <p:cSld>
+    <p:spTree>
+      <p:nvGrpSpPr>
+        <p:cNvPr id="1" name=""/>
+        <p:cNvGrpSpPr/>
+        <p:nvPr/>
+      </p:nvGrpSpPr>
+      <p:grpSpPr/>
+      <p:sp>
+        <p:nvSpPr>
+          <p:cNvPr id="2" name="Rectangle 1"/>
+          <p:cNvSpPr/>
+          <p:nvPr/>
+        </p:nvSpPr>
+        <p:spPr>
+          <a:xfrm>
+            <a:off x="0" y="0"/>
+            <a:ext cx="12192000" cy="960120"/>
+          </a:xfrm>
+          <a:prstGeom prst="rect">
+            <a:avLst/>
+          </a:prstGeom>
+          <a:solidFill>
+            <a:srgbClr val="1F3A4D"/>
+          </a:solidFill>
+          <a:ln>
+            <a:noFill/>
+          </a:ln>
+        </p:spPr>
+        <p:style>
+          <a:lnRef idx="1">
+            <a:schemeClr val="accent1"/>
+          </a:lnRef>
+          <a:fillRef idx="3">
+            <a:schemeClr val="accent1"/>
+          </a:fillRef>
+          <a:effectRef idx="2">
+            <a:schemeClr val="accent1"/>
+          </a:effectRef>
+          <a:fontRef idx="minor">
+            <a:schemeClr val="lt1"/>
+          </a:fontRef>
+        </p:style>
+        <p:txBody>
+          <a:bodyPr rtlCol="0" anchor="ctr" lIns="365760" tIns="73152" wrap="square"/>
+          <a:lstStyle/>
+          <a:p>
+            <a:pPr algn="ctr">
+              <a:defRPr sz="2600" b="1">
+                <a:solidFill>
+                  <a:srgbClr val="FFFFFF"/>
+                </a:solidFill>
+              </a:defRPr>
+            </a:pPr>
+            <a:r>
+              <a:t>Adding Real Storage: Our Best Result Yet</a:t>
+            </a:r>
+          </a:p>
+          <a:p>
+            <a:pPr>
+              <a:defRPr sz="1400">
+                <a:solidFill>
+                  <a:srgbClr val="C8D2DA"/>
+                </a:solidFill>
+              </a:defRPr>
+            </a:pPr>
+            <a:r>
+              <a:t>Real storage and real subsidies on both sides of the border</a:t>
+            </a:r>
+          </a:p>
+        </p:txBody>
+      </p:sp>
+      <p:sp>
+        <p:nvSpPr>
+          <p:cNvPr id="3" name="TextBox 2"/>
+          <p:cNvSpPr txBox="1"/>
+          <p:nvPr/>
+        </p:nvSpPr>
+        <p:spPr>
+          <a:xfrm>
+            <a:off x="11551920" y="6446520"/>
+            <a:ext cx="457200" cy="320040"/>
+          </a:xfrm>
+          <a:prstGeom prst="rect">
+            <a:avLst/>
+          </a:prstGeom>
+          <a:noFill/>
+        </p:spPr>
+        <p:txBody>
+          <a:bodyPr wrap="none">
+            <a:spAutoFit/>
+          </a:bodyPr>
+          <a:lstStyle/>
+          <a:p>
+            <a:pPr>
+              <a:defRPr sz="1100">
+                <a:solidFill>
+                  <a:srgbClr val="5A605C"/>
+                </a:solidFill>
+              </a:defRPr>
+            </a:pPr>
+            <a:r>
+              <a:t>37</a:t>
+            </a:r>
+          </a:p>
+        </p:txBody>
+      </p:sp>
+      <p:sp>
+        <p:nvSpPr>
+          <p:cNvPr id="4" name="TextBox 3"/>
+          <p:cNvSpPr txBox="1"/>
+          <p:nvPr/>
+        </p:nvSpPr>
+        <p:spPr>
+          <a:xfrm>
+            <a:off x="502920" y="1371600"/>
+            <a:ext cx="11155680" cy="1463040"/>
+          </a:xfrm>
+          <a:prstGeom prst="rect">
+            <a:avLst/>
+          </a:prstGeom>
+          <a:noFill/>
+        </p:spPr>
+        <p:txBody>
+          <a:bodyPr wrap="none">
+            <a:spAutoFit/>
+          </a:bodyPr>
+          <a:lstStyle/>
+          <a:p>
+            <a:pPr algn="ctr">
+              <a:defRPr sz="4800" b="1">
+                <a:solidFill>
+                  <a:srgbClr val="3A6B47"/>
+                </a:solidFill>
+              </a:defRPr>
+            </a:pPr>
+            <a:r>
+              <a:t>Average price within 60 cents</a:t>
+            </a:r>
+          </a:p>
+          <a:p>
+            <a:pPr algn="ctr">
+              <a:defRPr sz="1600" i="1">
+                <a:solidFill>
+                  <a:srgbClr val="5A605C"/>
+                </a:solidFill>
+              </a:defRPr>
+            </a:pPr>
+            <a:r>
+              <a:t>of the real figure - the closest match this entire project has produced</a:t>
+            </a:r>
+          </a:p>
+        </p:txBody>
+      </p:sp>
+      <p:sp>
+        <p:nvSpPr>
+          <p:cNvPr id="5" name="TextBox 4"/>
+          <p:cNvSpPr txBox="1"/>
+          <p:nvPr/>
+        </p:nvSpPr>
+        <p:spPr>
+          <a:xfrm>
+            <a:off x="502920" y="3017520"/>
+            <a:ext cx="11155680" cy="3840480"/>
+          </a:xfrm>
+          <a:prstGeom prst="rect">
+            <a:avLst/>
+          </a:prstGeom>
+          <a:noFill/>
+        </p:spPr>
+        <p:txBody>
+          <a:bodyPr wrap="square">
+            <a:spAutoFit/>
+          </a:bodyPr>
+          <a:lstStyle/>
+          <a:p>
+            <a:pPr>
+              <a:spcAft>
+                <a:spcPts val="1000"/>
+              </a:spcAft>
+              <a:defRPr sz="1800" b="1">
+                <a:solidFill>
+                  <a:srgbClr val="1E2220"/>
+                </a:solidFill>
+              </a:defRPr>
+            </a:pPr>
+            <a:r>
+              <a:t>•  Gave the 'Rest of Europe' side its own real storage (battery-style + reservoir hydro), the same way Germany already has</a:t>
+            </a:r>
+          </a:p>
+          <a:p>
+            <a:pPr>
+              <a:spcAft>
+                <a:spcPts val="1000"/>
+              </a:spcAft>
+              <a:defRPr sz="1800" b="1">
+                <a:solidFill>
+                  <a:srgbClr val="1E2220"/>
+                </a:solidFill>
+              </a:defRPr>
+            </a:pPr>
+            <a:r>
+              <a:t>•  Gave it real subsidy treatment too, instead of a placeholder zero</a:t>
+            </a:r>
+          </a:p>
+          <a:p>
+            <a:pPr>
+              <a:spcAft>
+                <a:spcPts val="1000"/>
+              </a:spcAft>
+              <a:defRPr sz="1800" b="1">
+                <a:solidFill>
+                  <a:srgbClr val="1E2220"/>
+                </a:solidFill>
+              </a:defRPr>
+            </a:pPr>
+            <a:r>
+              <a:t>•  Checked directly that the new storage is actually doing real work, not just sitting there unused - confirmed it is</a:t>
+            </a:r>
+          </a:p>
+          <a:p>
+            <a:pPr>
+              <a:spcAft>
+                <a:spcPts val="1000"/>
+              </a:spcAft>
+              <a:defRPr sz="1800" b="1">
+                <a:solidFill>
+                  <a:srgbClr val="1E2220"/>
+                </a:solidFill>
+              </a:defRPr>
+            </a:pPr>
+            <a:r>
+              <a:t>•  Match quality also stayed strong - a genuine, all-round best result</a:t>
+            </a:r>
+          </a:p>
+        </p:txBody>
+      </p:sp>
+    </p:spTree>
+  </p:cSld>
+  <p:clrMapOvr>
+    <a:masterClrMapping/>
+  </p:clrMapOvr>
+</p:sld>
+</file>
+
+<file path=ppt/slides/slide38.xml><?xml version="1.0" encoding="utf-8"?>
+<p:sld xmlns:a="http://schemas.openxmlformats.org/drawingml/2006/main" xmlns:p="http://schemas.openxmlformats.org/presentationml/2006/main" xmlns:r="http://schemas.openxmlformats.org/officeDocument/2006/relationships">
+  <p:cSld>
+    <p:spTree>
+      <p:nvGrpSpPr>
+        <p:cNvPr id="1" name=""/>
+        <p:cNvGrpSpPr/>
+        <p:nvPr/>
+      </p:nvGrpSpPr>
+      <p:grpSpPr/>
+      <p:sp>
+        <p:nvSpPr>
+          <p:cNvPr id="2" name="Rectangle 1"/>
+          <p:cNvSpPr/>
+          <p:nvPr/>
+        </p:nvSpPr>
+        <p:spPr>
+          <a:xfrm>
+            <a:off x="0" y="0"/>
+            <a:ext cx="12192000" cy="960120"/>
+          </a:xfrm>
+          <a:prstGeom prst="rect">
+            <a:avLst/>
+          </a:prstGeom>
+          <a:solidFill>
+            <a:srgbClr val="1F3A4D"/>
+          </a:solidFill>
+          <a:ln>
+            <a:noFill/>
+          </a:ln>
+        </p:spPr>
+        <p:style>
+          <a:lnRef idx="1">
+            <a:schemeClr val="accent1"/>
+          </a:lnRef>
+          <a:fillRef idx="3">
+            <a:schemeClr val="accent1"/>
+          </a:fillRef>
+          <a:effectRef idx="2">
+            <a:schemeClr val="accent1"/>
+          </a:effectRef>
+          <a:fontRef idx="minor">
+            <a:schemeClr val="lt1"/>
+          </a:fontRef>
+        </p:style>
+        <p:txBody>
+          <a:bodyPr rtlCol="0" anchor="ctr" lIns="365760" tIns="73152" wrap="square"/>
+          <a:lstStyle/>
+          <a:p>
+            <a:pPr algn="ctr">
+              <a:defRPr sz="2600" b="1">
+                <a:solidFill>
+                  <a:srgbClr val="FFFFFF"/>
+                </a:solidFill>
+              </a:defRPr>
+            </a:pPr>
+            <a:r>
+              <a:t>Does It Hold Up in Other Years? Testing 2028 and 2029</a:t>
+            </a:r>
+          </a:p>
+          <a:p>
+            <a:pPr>
+              <a:defRPr sz="1400">
+                <a:solidFill>
+                  <a:srgbClr val="C8D2DA"/>
+                </a:solidFill>
+              </a:defRPr>
+            </a:pPr>
+            <a:r>
+              <a:t>The same build, tested on years we never tuned it for</a:t>
+            </a:r>
+          </a:p>
+        </p:txBody>
+      </p:sp>
+      <p:sp>
+        <p:nvSpPr>
+          <p:cNvPr id="3" name="TextBox 2"/>
+          <p:cNvSpPr txBox="1"/>
+          <p:nvPr/>
+        </p:nvSpPr>
+        <p:spPr>
+          <a:xfrm>
+            <a:off x="11551920" y="6446520"/>
+            <a:ext cx="457200" cy="320040"/>
+          </a:xfrm>
+          <a:prstGeom prst="rect">
+            <a:avLst/>
+          </a:prstGeom>
+          <a:noFill/>
+        </p:spPr>
+        <p:txBody>
+          <a:bodyPr wrap="none">
+            <a:spAutoFit/>
+          </a:bodyPr>
+          <a:lstStyle/>
+          <a:p>
+            <a:pPr>
+              <a:defRPr sz="1100">
+                <a:solidFill>
+                  <a:srgbClr val="5A605C"/>
+                </a:solidFill>
+              </a:defRPr>
+            </a:pPr>
+            <a:r>
+              <a:t>38</a:t>
+            </a:r>
+          </a:p>
+        </p:txBody>
+      </p:sp>
+      <p:graphicFrame>
+        <p:nvGraphicFramePr>
+          <p:cNvPr id="4" name="Table 3"/>
+          <p:cNvGraphicFramePr>
+            <a:graphicFrameLocks noGrp="1"/>
+          </p:cNvGraphicFramePr>
+          <p:nvPr/>
+        </p:nvGraphicFramePr>
+        <p:xfrm>
+          <a:off x="640080" y="1371600"/>
+          <a:ext cx="11338560" cy="2011680"/>
+        </p:xfrm>
+        <a:graphic>
+          <a:graphicData uri="http://schemas.openxmlformats.org/drawingml/2006/table">
+            <a:tbl>
+              <a:tblPr firstRow="1" bandRow="1">
+                <a:tableStyleId>{5C22544A-7EE6-4342-B048-85BDC9FD1C3A}</a:tableStyleId>
+              </a:tblPr>
+              <a:tblGrid>
+                <a:gridCol w="4937760"/>
+                <a:gridCol w="3200400"/>
+                <a:gridCol w="3200400"/>
+              </a:tblGrid>
+              <a:tr h="502920">
+                <a:tc>
+                  <a:txBody>
+                    <a:bodyPr/>
+                    <a:lstStyle/>
+                    <a:p>
+                      <a:pPr algn="ctr">
+                        <a:defRPr b="1" sz="1300">
+                          <a:solidFill>
+                            <a:srgbClr val="FFFFFF"/>
+                          </a:solidFill>
+                        </a:defRPr>
+                      </a:pPr>
+                    </a:p>
+                  </a:txBody>
+                  <a:tcPr>
+                    <a:solidFill>
+                      <a:srgbClr val="1F3A4D"/>
+                    </a:solidFill>
+                  </a:tcPr>
+                </a:tc>
+                <a:tc>
+                  <a:txBody>
+                    <a:bodyPr/>
+                    <a:lstStyle/>
+                    <a:p>
+                      <a:pPr algn="ctr">
+                        <a:defRPr b="1" sz="1300">
+                          <a:solidFill>
+                            <a:srgbClr val="FFFFFF"/>
+                          </a:solidFill>
+                        </a:defRPr>
+                      </a:pPr>
+                      <a:r>
+                        <a:t>2028</a:t>
+                      </a:r>
+                    </a:p>
+                  </a:txBody>
+                  <a:tcPr>
+                    <a:solidFill>
+                      <a:srgbClr val="1F3A4D"/>
+                    </a:solidFill>
+                  </a:tcPr>
+                </a:tc>
+                <a:tc>
+                  <a:txBody>
+                    <a:bodyPr/>
+                    <a:lstStyle/>
+                    <a:p>
+                      <a:pPr algn="ctr">
+                        <a:defRPr b="1" sz="1300">
+                          <a:solidFill>
+                            <a:srgbClr val="FFFFFF"/>
+                          </a:solidFill>
+                        </a:defRPr>
+                      </a:pPr>
+                      <a:r>
+                        <a:t>2029</a:t>
+                      </a:r>
+                    </a:p>
+                  </a:txBody>
+                  <a:tcPr>
+                    <a:solidFill>
+                      <a:srgbClr val="1F3A4D"/>
+                    </a:solidFill>
+                  </a:tcPr>
+                </a:tc>
+              </a:tr>
+              <a:tr h="502920">
+                <a:tc>
+                  <a:txBody>
+                    <a:bodyPr/>
+                    <a:lstStyle/>
+                    <a:p>
+                      <a:pPr algn="ctr">
+                        <a:defRPr sz="1200" b="1">
+                          <a:solidFill>
+                            <a:srgbClr val="1E2220"/>
+                          </a:solidFill>
+                        </a:defRPr>
+                      </a:pPr>
+                      <a:r>
+                        <a:t>Match quality: before</a:t>
+                      </a:r>
+                    </a:p>
+                  </a:txBody>
+                  <a:tcPr>
+                    <a:solidFill>
+                      <a:srgbClr val="FFFFFF"/>
+                    </a:solidFill>
+                  </a:tcPr>
+                </a:tc>
+                <a:tc>
+                  <a:txBody>
+                    <a:bodyPr/>
+                    <a:lstStyle/>
+                    <a:p>
+                      <a:pPr algn="ctr">
+                        <a:defRPr sz="1200" b="0">
+                          <a:solidFill>
+                            <a:srgbClr val="1E2220"/>
+                          </a:solidFill>
+                        </a:defRPr>
+                      </a:pPr>
+                      <a:r>
+                        <a:t>0.446</a:t>
+                      </a:r>
+                    </a:p>
+                  </a:txBody>
+                  <a:tcPr>
+                    <a:solidFill>
+                      <a:srgbClr val="FFFFFF"/>
+                    </a:solidFill>
+                  </a:tcPr>
+                </a:tc>
+                <a:tc>
+                  <a:txBody>
+                    <a:bodyPr/>
+                    <a:lstStyle/>
+                    <a:p>
+                      <a:pPr algn="ctr">
+                        <a:defRPr sz="1200" b="0">
+                          <a:solidFill>
+                            <a:srgbClr val="1E2220"/>
+                          </a:solidFill>
+                        </a:defRPr>
+                      </a:pPr>
+                      <a:r>
+                        <a:t>0.446</a:t>
+                      </a:r>
+                    </a:p>
+                  </a:txBody>
+                  <a:tcPr>
+                    <a:solidFill>
+                      <a:srgbClr val="FFFFFF"/>
+                    </a:solidFill>
+                  </a:tcPr>
+                </a:tc>
+              </a:tr>
+              <a:tr h="502920">
+                <a:tc>
+                  <a:txBody>
+                    <a:bodyPr/>
+                    <a:lstStyle/>
+                    <a:p>
+                      <a:pPr algn="ctr">
+                        <a:defRPr sz="1200" b="1">
+                          <a:solidFill>
+                            <a:srgbClr val="1E2220"/>
+                          </a:solidFill>
+                        </a:defRPr>
+                      </a:pPr>
+                      <a:r>
+                        <a:t>Match quality: with two-way trading</a:t>
+                      </a:r>
+                    </a:p>
+                  </a:txBody>
+                  <a:tcPr>
+                    <a:solidFill>
+                      <a:srgbClr val="EEF0E9"/>
+                    </a:solidFill>
+                  </a:tcPr>
+                </a:tc>
+                <a:tc>
+                  <a:txBody>
+                    <a:bodyPr/>
+                    <a:lstStyle/>
+                    <a:p>
+                      <a:pPr algn="ctr">
+                        <a:defRPr sz="1200" b="0">
+                          <a:solidFill>
+                            <a:srgbClr val="1E2220"/>
+                          </a:solidFill>
+                        </a:defRPr>
+                      </a:pPr>
+                      <a:r>
+                        <a:t>0.718</a:t>
+                      </a:r>
+                    </a:p>
+                  </a:txBody>
+                  <a:tcPr>
+                    <a:solidFill>
+                      <a:srgbClr val="EEF0E9"/>
+                    </a:solidFill>
+                  </a:tcPr>
+                </a:tc>
+                <a:tc>
+                  <a:txBody>
+                    <a:bodyPr/>
+                    <a:lstStyle/>
+                    <a:p>
+                      <a:pPr algn="ctr">
+                        <a:defRPr sz="1200" b="0">
+                          <a:solidFill>
+                            <a:srgbClr val="1E2220"/>
+                          </a:solidFill>
+                        </a:defRPr>
+                      </a:pPr>
+                      <a:r>
+                        <a:t>0.752</a:t>
+                      </a:r>
+                    </a:p>
+                  </a:txBody>
+                  <a:tcPr>
+                    <a:solidFill>
+                      <a:srgbClr val="EEF0E9"/>
+                    </a:solidFill>
+                  </a:tcPr>
+                </a:tc>
+              </a:tr>
+              <a:tr h="502920">
+                <a:tc>
+                  <a:txBody>
+                    <a:bodyPr/>
+                    <a:lstStyle/>
+                    <a:p>
+                      <a:pPr algn="ctr">
+                        <a:defRPr sz="1200" b="1">
+                          <a:solidFill>
+                            <a:srgbClr val="1E2220"/>
+                          </a:solidFill>
+                        </a:defRPr>
+                      </a:pPr>
+                      <a:r>
+                        <a:t>Average price gap: with two-way trading</a:t>
+                      </a:r>
+                    </a:p>
+                  </a:txBody>
+                  <a:tcPr>
+                    <a:solidFill>
+                      <a:srgbClr val="FFFFFF"/>
+                    </a:solidFill>
+                  </a:tcPr>
+                </a:tc>
+                <a:tc>
+                  <a:txBody>
+                    <a:bodyPr/>
+                    <a:lstStyle/>
+                    <a:p>
+                      <a:pPr algn="ctr">
+                        <a:defRPr sz="1200" b="0">
+                          <a:solidFill>
+                            <a:srgbClr val="1E2220"/>
+                          </a:solidFill>
+                        </a:defRPr>
+                      </a:pPr>
+                      <a:r>
+                        <a:t>+6.19</a:t>
+                      </a:r>
+                    </a:p>
+                  </a:txBody>
+                  <a:tcPr>
+                    <a:solidFill>
+                      <a:srgbClr val="FFFFFF"/>
+                    </a:solidFill>
+                  </a:tcPr>
+                </a:tc>
+                <a:tc>
+                  <a:txBody>
+                    <a:bodyPr/>
+                    <a:lstStyle/>
+                    <a:p>
+                      <a:pPr algn="ctr">
+                        <a:defRPr sz="1200" b="0">
+                          <a:solidFill>
+                            <a:srgbClr val="1E2220"/>
+                          </a:solidFill>
+                        </a:defRPr>
+                      </a:pPr>
+                      <a:r>
+                        <a:t>+26.85</a:t>
+                      </a:r>
+                    </a:p>
+                  </a:txBody>
+                  <a:tcPr>
+                    <a:solidFill>
+                      <a:srgbClr val="FFFFFF"/>
+                    </a:solidFill>
+                  </a:tcPr>
+                </a:tc>
+              </a:tr>
+            </a:tbl>
+          </a:graphicData>
+        </a:graphic>
+      </p:graphicFrame>
+      <p:sp>
+        <p:nvSpPr>
+          <p:cNvPr id="5" name="TextBox 4"/>
+          <p:cNvSpPr txBox="1"/>
+          <p:nvPr/>
+        </p:nvSpPr>
+        <p:spPr>
+          <a:xfrm>
+            <a:off x="640080" y="3566160"/>
+            <a:ext cx="10881360" cy="1097280"/>
+          </a:xfrm>
+          <a:prstGeom prst="rect">
+            <a:avLst/>
+          </a:prstGeom>
+          <a:noFill/>
+        </p:spPr>
+        <p:txBody>
+          <a:bodyPr wrap="none">
+            <a:spAutoFit/>
+          </a:bodyPr>
+          <a:lstStyle/>
+          <a:p>
+            <a:pPr>
+              <a:defRPr sz="1300" i="1">
+                <a:solidFill>
+                  <a:srgbClr val="5A605C"/>
+                </a:solidFill>
+              </a:defRPr>
+            </a:pPr>
+            <a:r>
+              <a:t>Match quality improved strongly in both years, confirming it isn't a one-year fluke. But the average price gap looked concerning for 2029 - investigated further on the next slide.</a:t>
+            </a:r>
+          </a:p>
+        </p:txBody>
+      </p:sp>
+    </p:spTree>
+  </p:cSld>
+  <p:clrMapOvr>
+    <a:masterClrMapping/>
+  </p:clrMapOvr>
+</p:sld>
+</file>
+
+<file path=ppt/slides/slide39.xml><?xml version="1.0" encoding="utf-8"?>
+<p:sld xmlns:a="http://schemas.openxmlformats.org/drawingml/2006/main" xmlns:p="http://schemas.openxmlformats.org/presentationml/2006/main" xmlns:r="http://schemas.openxmlformats.org/officeDocument/2006/relationships">
+  <p:cSld>
+    <p:spTree>
+      <p:nvGrpSpPr>
+        <p:cNvPr id="1" name=""/>
+        <p:cNvGrpSpPr/>
+        <p:nvPr/>
+      </p:nvGrpSpPr>
+      <p:grpSpPr/>
+      <p:sp>
+        <p:nvSpPr>
+          <p:cNvPr id="2" name="Rectangle 1"/>
+          <p:cNvSpPr/>
+          <p:nvPr/>
+        </p:nvSpPr>
+        <p:spPr>
+          <a:xfrm>
+            <a:off x="0" y="0"/>
+            <a:ext cx="12192000" cy="960120"/>
+          </a:xfrm>
+          <a:prstGeom prst="rect">
+            <a:avLst/>
+          </a:prstGeom>
+          <a:solidFill>
+            <a:srgbClr val="1F3A4D"/>
+          </a:solidFill>
+          <a:ln>
+            <a:noFill/>
+          </a:ln>
+        </p:spPr>
+        <p:style>
+          <a:lnRef idx="1">
+            <a:schemeClr val="accent1"/>
+          </a:lnRef>
+          <a:fillRef idx="3">
+            <a:schemeClr val="accent1"/>
+          </a:fillRef>
+          <a:effectRef idx="2">
+            <a:schemeClr val="accent1"/>
+          </a:effectRef>
+          <a:fontRef idx="minor">
+            <a:schemeClr val="lt1"/>
+          </a:fontRef>
+        </p:style>
+        <p:txBody>
+          <a:bodyPr rtlCol="0" anchor="ctr" lIns="365760" tIns="73152" wrap="square"/>
+          <a:lstStyle/>
+          <a:p>
+            <a:pPr algn="ctr">
+              <a:defRPr sz="2600" b="1">
+                <a:solidFill>
+                  <a:srgbClr val="FFFFFF"/>
+                </a:solidFill>
+              </a:defRPr>
+            </a:pPr>
+            <a:r>
+              <a:t>The Real Story: Excellent on Ordinary Days</a:t>
+            </a:r>
+          </a:p>
+          <a:p>
+            <a:pPr>
+              <a:defRPr sz="1400">
+                <a:solidFill>
+                  <a:srgbClr val="C8D2DA"/>
+                </a:solidFill>
+              </a:defRPr>
+            </a:pPr>
+            <a:r>
+              <a:t>A follow-up question corrected a misleading headline number</a:t>
+            </a:r>
+          </a:p>
+        </p:txBody>
+      </p:sp>
+      <p:sp>
+        <p:nvSpPr>
+          <p:cNvPr id="3" name="TextBox 2"/>
+          <p:cNvSpPr txBox="1"/>
+          <p:nvPr/>
+        </p:nvSpPr>
+        <p:spPr>
+          <a:xfrm>
+            <a:off x="11551920" y="6446520"/>
+            <a:ext cx="457200" cy="320040"/>
+          </a:xfrm>
+          <a:prstGeom prst="rect">
+            <a:avLst/>
+          </a:prstGeom>
+          <a:noFill/>
+        </p:spPr>
+        <p:txBody>
+          <a:bodyPr wrap="none">
+            <a:spAutoFit/>
+          </a:bodyPr>
+          <a:lstStyle/>
+          <a:p>
+            <a:pPr>
+              <a:defRPr sz="1100">
+                <a:solidFill>
+                  <a:srgbClr val="5A605C"/>
+                </a:solidFill>
+              </a:defRPr>
+            </a:pPr>
+            <a:r>
+              <a:t>39</a:t>
+            </a:r>
+          </a:p>
+        </p:txBody>
+      </p:sp>
+      <p:sp>
+        <p:nvSpPr>
+          <p:cNvPr id="4" name="TextBox 3"/>
+          <p:cNvSpPr txBox="1"/>
+          <p:nvPr/>
+        </p:nvSpPr>
+        <p:spPr>
+          <a:xfrm>
+            <a:off x="502920" y="1234440"/>
+            <a:ext cx="11155680" cy="5303520"/>
+          </a:xfrm>
+          <a:prstGeom prst="rect">
+            <a:avLst/>
+          </a:prstGeom>
+          <a:noFill/>
+        </p:spPr>
+        <p:txBody>
+          <a:bodyPr wrap="square">
+            <a:spAutoFit/>
+          </a:bodyPr>
+          <a:lstStyle/>
+          <a:p>
+            <a:pPr>
+              <a:spcAft>
+                <a:spcPts val="1000"/>
+              </a:spcAft>
+              <a:defRPr sz="1800" b="1">
+                <a:solidFill>
+                  <a:srgbClr val="1E2220"/>
+                </a:solidFill>
+              </a:defRPr>
+            </a:pPr>
+            <a:r>
+              <a:t>•  That '+26.85' number looked like a real step backwards - checked it properly rather than taking it at face value</a:t>
+            </a:r>
+          </a:p>
+          <a:p>
+            <a:pPr>
+              <a:spcAft>
+                <a:spcPts val="1000"/>
+              </a:spcAft>
+              <a:defRPr sz="1800" b="1">
+                <a:solidFill>
+                  <a:srgbClr val="1E2220"/>
+                </a:solidFill>
+              </a:defRPr>
+            </a:pPr>
+            <a:r>
+              <a:t>•  Found: 88% of that gap comes from just a handful of extreme 'ran out of power' hours</a:t>
+            </a:r>
+          </a:p>
+          <a:p>
+            <a:pPr>
+              <a:spcAft>
+                <a:spcPts val="1000"/>
+              </a:spcAft>
+              <a:defRPr sz="1800" b="1">
+                <a:solidFill>
+                  <a:srgbClr val="1E2220"/>
+                </a:solidFill>
+              </a:defRPr>
+            </a:pPr>
+            <a:r>
+              <a:t>•  On ordinary days (99%+ of the year), all three years - 2027, 2028, 2029 - are excellent and remarkably consistent</a:t>
+            </a:r>
+          </a:p>
+          <a:p>
+            <a:pPr>
+              <a:spcAft>
+                <a:spcPts val="1000"/>
+              </a:spcAft>
+              <a:defRPr sz="1800" b="1">
+                <a:solidFill>
+                  <a:srgbClr val="1E2220"/>
+                </a:solidFill>
+              </a:defRPr>
+            </a:pPr>
+            <a:r>
+              <a:t>•  The real, narrower issue: those extreme hours are becoming more frequent the further we get from our home year (2027)</a:t>
+            </a:r>
+          </a:p>
+        </p:txBody>
+      </p:sp>
+    </p:spTree>
+  </p:cSld>
+  <p:clrMapOvr>
+    <a:masterClrMapping/>
+  </p:clrMapOvr>
+</p:sld>
+</file>
+
+<file path=ppt/slides/slide4.xml><?xml version="1.0" encoding="utf-8"?>
 <p:sld xmlns:a="http://schemas.openxmlformats.org/drawingml/2006/main" xmlns:r="http://schemas.openxmlformats.org/officeDocument/2006/relationships" xmlns:p="http://schemas.openxmlformats.org/presentationml/2006/main">
   <p:cSld>
     <p:spTree>
@@ -9524,7 +11425,7 @@
               </a:defRPr>
             </a:pPr>
             <a:r>
-              <a:t>Where We Stand Now</a:t>
+              <a:t>Three Tasks From Last Time</a:t>
             </a:r>
           </a:p>
         </p:txBody>
@@ -9559,7 +11460,951 @@
               </a:defRPr>
             </a:pPr>
             <a:r>
-              <a:t>42</a:t>
+              <a:t>4</a:t>
+            </a:r>
+          </a:p>
+        </p:txBody>
+      </p:sp>
+      <p:sp>
+        <p:nvSpPr>
+          <p:cNvPr id="4" name="TextBox 3"/>
+          <p:cNvSpPr txBox="1"/>
+          <p:nvPr/>
+        </p:nvSpPr>
+        <p:spPr>
+          <a:xfrm>
+            <a:off x="502920" y="1234440"/>
+            <a:ext cx="11155680" cy="1179810"/>
+          </a:xfrm>
+          <a:prstGeom prst="rect">
+            <a:avLst/>
+          </a:prstGeom>
+          <a:noFill/>
+        </p:spPr>
+        <p:txBody>
+          <a:bodyPr wrap="square">
+            <a:spAutoFit/>
+          </a:bodyPr>
+          <a:lstStyle/>
+          <a:p>
+            <a:pPr>
+              <a:spcAft>
+                <a:spcPts val="1000"/>
+              </a:spcAft>
+              <a:defRPr sz="1800" b="1">
+                <a:solidFill>
+                  <a:srgbClr val="1E2220"/>
+                </a:solidFill>
+              </a:defRPr>
+            </a:pPr>
+            <a:r>
+              <a:rPr dirty="0"/>
+              <a:t>•  1.  Submit the filled thesis form for endorsement</a:t>
+            </a:r>
+          </a:p>
+          <a:p>
+            <a:pPr>
+              <a:spcAft>
+                <a:spcPts val="1000"/>
+              </a:spcAft>
+              <a:defRPr sz="1800" b="1">
+                <a:solidFill>
+                  <a:srgbClr val="1E2220"/>
+                </a:solidFill>
+              </a:defRPr>
+            </a:pPr>
+            <a:r>
+              <a:rPr dirty="0"/>
+              <a:t>•  2.  Load profile comparisons - AMIRIS vs. our different model versions, with charts</a:t>
+            </a:r>
+          </a:p>
+          <a:p>
+            <a:pPr>
+              <a:spcAft>
+                <a:spcPts val="1000"/>
+              </a:spcAft>
+              <a:defRPr sz="1800" b="1">
+                <a:solidFill>
+                  <a:srgbClr val="1E2220"/>
+                </a:solidFill>
+              </a:defRPr>
+            </a:pPr>
+            <a:r>
+              <a:rPr dirty="0"/>
+              <a:t>•  3.  </a:t>
+            </a:r>
+            <a:r>
+              <a:rPr lang="en-US" dirty="0"/>
+              <a:t>Use </a:t>
+            </a:r>
+            <a:r>
+              <a:rPr dirty="0"/>
+              <a:t>the 2009 renewable weather profiles</a:t>
+            </a:r>
+          </a:p>
+        </p:txBody>
+      </p:sp>
+    </p:spTree>
+  </p:cSld>
+  <p:clrMapOvr>
+    <a:masterClrMapping/>
+  </p:clrMapOvr>
+</p:sld>
+</file>
+
+<file path=ppt/slides/slide40.xml><?xml version="1.0" encoding="utf-8"?>
+<p:sld xmlns:a="http://schemas.openxmlformats.org/drawingml/2006/main" xmlns:p="http://schemas.openxmlformats.org/presentationml/2006/main" xmlns:r="http://schemas.openxmlformats.org/officeDocument/2006/relationships">
+  <p:cSld>
+    <p:spTree>
+      <p:nvGrpSpPr>
+        <p:cNvPr id="1" name=""/>
+        <p:cNvGrpSpPr/>
+        <p:nvPr/>
+      </p:nvGrpSpPr>
+      <p:grpSpPr/>
+      <p:sp>
+        <p:nvSpPr>
+          <p:cNvPr id="2" name="Rectangle 1"/>
+          <p:cNvSpPr/>
+          <p:nvPr/>
+        </p:nvSpPr>
+        <p:spPr>
+          <a:xfrm>
+            <a:off x="0" y="0"/>
+            <a:ext cx="12192000" cy="960120"/>
+          </a:xfrm>
+          <a:prstGeom prst="rect">
+            <a:avLst/>
+          </a:prstGeom>
+          <a:solidFill>
+            <a:srgbClr val="1F3A4D"/>
+          </a:solidFill>
+          <a:ln>
+            <a:noFill/>
+          </a:ln>
+        </p:spPr>
+        <p:style>
+          <a:lnRef idx="1">
+            <a:schemeClr val="accent1"/>
+          </a:lnRef>
+          <a:fillRef idx="3">
+            <a:schemeClr val="accent1"/>
+          </a:fillRef>
+          <a:effectRef idx="2">
+            <a:schemeClr val="accent1"/>
+          </a:effectRef>
+          <a:fontRef idx="minor">
+            <a:schemeClr val="lt1"/>
+          </a:fontRef>
+        </p:style>
+        <p:txBody>
+          <a:bodyPr rtlCol="0" anchor="ctr" lIns="365760" tIns="73152" wrap="square"/>
+          <a:lstStyle/>
+          <a:p>
+            <a:pPr algn="ctr">
+              <a:defRPr sz="2600" b="1">
+                <a:solidFill>
+                  <a:srgbClr val="FFFFFF"/>
+                </a:solidFill>
+              </a:defRPr>
+            </a:pPr>
+            <a:r>
+              <a:t>Chasing That Gap: Two Honest Dead Ends</a:t>
+            </a:r>
+          </a:p>
+          <a:p>
+            <a:pPr>
+              <a:defRPr sz="1400">
+                <a:solidFill>
+                  <a:srgbClr val="C8D2DA"/>
+                </a:solidFill>
+              </a:defRPr>
+            </a:pPr>
+            <a:r>
+              <a:t>Two well-reasoned ideas, tested properly, both honestly ruled out</a:t>
+            </a:r>
+          </a:p>
+        </p:txBody>
+      </p:sp>
+      <p:sp>
+        <p:nvSpPr>
+          <p:cNvPr id="3" name="TextBox 2"/>
+          <p:cNvSpPr txBox="1"/>
+          <p:nvPr/>
+        </p:nvSpPr>
+        <p:spPr>
+          <a:xfrm>
+            <a:off x="11551920" y="6446520"/>
+            <a:ext cx="457200" cy="320040"/>
+          </a:xfrm>
+          <a:prstGeom prst="rect">
+            <a:avLst/>
+          </a:prstGeom>
+          <a:noFill/>
+        </p:spPr>
+        <p:txBody>
+          <a:bodyPr wrap="none">
+            <a:spAutoFit/>
+          </a:bodyPr>
+          <a:lstStyle/>
+          <a:p>
+            <a:pPr>
+              <a:defRPr sz="1100">
+                <a:solidFill>
+                  <a:srgbClr val="5A605C"/>
+                </a:solidFill>
+              </a:defRPr>
+            </a:pPr>
+            <a:r>
+              <a:t>40</a:t>
+            </a:r>
+          </a:p>
+        </p:txBody>
+      </p:sp>
+      <p:sp>
+        <p:nvSpPr>
+          <p:cNvPr id="4" name="TextBox 3"/>
+          <p:cNvSpPr txBox="1"/>
+          <p:nvPr/>
+        </p:nvSpPr>
+        <p:spPr>
+          <a:xfrm>
+            <a:off x="502920" y="1234440"/>
+            <a:ext cx="11155680" cy="5303520"/>
+          </a:xfrm>
+          <a:prstGeom prst="rect">
+            <a:avLst/>
+          </a:prstGeom>
+          <a:noFill/>
+        </p:spPr>
+        <p:txBody>
+          <a:bodyPr wrap="square">
+            <a:spAutoFit/>
+          </a:bodyPr>
+          <a:lstStyle/>
+          <a:p>
+            <a:pPr>
+              <a:spcAft>
+                <a:spcPts val="1000"/>
+              </a:spcAft>
+              <a:defRPr sz="1800" b="1">
+                <a:solidFill>
+                  <a:srgbClr val="1E2220"/>
+                </a:solidFill>
+              </a:defRPr>
+            </a:pPr>
+            <a:r>
+              <a:t>•  Idea 1: scale up the border capacity to keep pace with Germany's own growth - tested directly, did not fix it, made one year worse</a:t>
+            </a:r>
+          </a:p>
+          <a:p>
+            <a:pPr>
+              <a:spcAft>
+                <a:spcPts val="1000"/>
+              </a:spcAft>
+              <a:defRPr sz="1800" b="1">
+                <a:solidFill>
+                  <a:srgbClr val="1E2220"/>
+                </a:solidFill>
+              </a:defRPr>
+            </a:pPr>
+            <a:r>
+              <a:t>•  Idea 2: check a specific setting inside AMIRIS's own coupling engine - opened up the real program code and found that setting was already unlimited, not the cause</a:t>
+            </a:r>
+          </a:p>
+          <a:p>
+            <a:pPr>
+              <a:spcAft>
+                <a:spcPts val="1000"/>
+              </a:spcAft>
+              <a:defRPr sz="1800" b="1">
+                <a:solidFill>
+                  <a:srgbClr val="1E2220"/>
+                </a:solidFill>
+              </a:defRPr>
+            </a:pPr>
+            <a:r>
+              <a:t>•  Found one real, unexplained clue instead: Germany's import during these rare hours stays suspiciously flat no matter how much extra capacity is available</a:t>
+            </a:r>
+          </a:p>
+          <a:p>
+            <a:pPr>
+              <a:spcAft>
+                <a:spcPts val="1000"/>
+              </a:spcAft>
+              <a:defRPr sz="1800" b="1">
+                <a:solidFill>
+                  <a:srgbClr val="1E2220"/>
+                </a:solidFill>
+              </a:defRPr>
+            </a:pPr>
+            <a:r>
+              <a:t>•  Getting to the exact cause would need to edit and rebuild AMIRIS's own program - a bigger step, not yet taken</a:t>
+            </a:r>
+          </a:p>
+        </p:txBody>
+      </p:sp>
+    </p:spTree>
+  </p:cSld>
+  <p:clrMapOvr>
+    <a:masterClrMapping/>
+  </p:clrMapOvr>
+</p:sld>
+</file>
+
+<file path=ppt/slides/slide41.xml><?xml version="1.0" encoding="utf-8"?>
+<p:sld xmlns:a="http://schemas.openxmlformats.org/drawingml/2006/main" xmlns:p="http://schemas.openxmlformats.org/presentationml/2006/main" xmlns:r="http://schemas.openxmlformats.org/officeDocument/2006/relationships">
+  <p:cSld>
+    <p:spTree>
+      <p:nvGrpSpPr>
+        <p:cNvPr id="1" name=""/>
+        <p:cNvGrpSpPr/>
+        <p:nvPr/>
+      </p:nvGrpSpPr>
+      <p:grpSpPr/>
+      <p:sp>
+        <p:nvSpPr>
+          <p:cNvPr id="2" name="Rectangle 1"/>
+          <p:cNvSpPr/>
+          <p:nvPr/>
+        </p:nvSpPr>
+        <p:spPr>
+          <a:xfrm>
+            <a:off x="0" y="0"/>
+            <a:ext cx="12192000" cy="960120"/>
+          </a:xfrm>
+          <a:prstGeom prst="rect">
+            <a:avLst/>
+          </a:prstGeom>
+          <a:solidFill>
+            <a:srgbClr val="1F3A4D"/>
+          </a:solidFill>
+          <a:ln>
+            <a:noFill/>
+          </a:ln>
+        </p:spPr>
+        <p:style>
+          <a:lnRef idx="1">
+            <a:schemeClr val="accent1"/>
+          </a:lnRef>
+          <a:fillRef idx="3">
+            <a:schemeClr val="accent1"/>
+          </a:fillRef>
+          <a:effectRef idx="2">
+            <a:schemeClr val="accent1"/>
+          </a:effectRef>
+          <a:fontRef idx="minor">
+            <a:schemeClr val="lt1"/>
+          </a:fontRef>
+        </p:style>
+        <p:txBody>
+          <a:bodyPr rtlCol="0" anchor="ctr" lIns="365760" tIns="73152" wrap="square"/>
+          <a:lstStyle/>
+          <a:p>
+            <a:pPr algn="ctr">
+              <a:defRPr sz="2600" b="1">
+                <a:solidFill>
+                  <a:srgbClr val="FFFFFF"/>
+                </a:solidFill>
+              </a:defRPr>
+            </a:pPr>
+            <a:r>
+              <a:t>Where This Leaves Us</a:t>
+            </a:r>
+          </a:p>
+          <a:p>
+            <a:pPr>
+              <a:defRPr sz="1400">
+                <a:solidFill>
+                  <a:srgbClr val="C8D2DA"/>
+                </a:solidFill>
+              </a:defRPr>
+            </a:pPr>
+            <a:r>
+              <a:t>The real, current state of the two-way trading model across all three years</a:t>
+            </a:r>
+          </a:p>
+        </p:txBody>
+      </p:sp>
+      <p:sp>
+        <p:nvSpPr>
+          <p:cNvPr id="3" name="TextBox 2"/>
+          <p:cNvSpPr txBox="1"/>
+          <p:nvPr/>
+        </p:nvSpPr>
+        <p:spPr>
+          <a:xfrm>
+            <a:off x="11551920" y="6446520"/>
+            <a:ext cx="457200" cy="320040"/>
+          </a:xfrm>
+          <a:prstGeom prst="rect">
+            <a:avLst/>
+          </a:prstGeom>
+          <a:noFill/>
+        </p:spPr>
+        <p:txBody>
+          <a:bodyPr wrap="none">
+            <a:spAutoFit/>
+          </a:bodyPr>
+          <a:lstStyle/>
+          <a:p>
+            <a:pPr>
+              <a:defRPr sz="1100">
+                <a:solidFill>
+                  <a:srgbClr val="5A605C"/>
+                </a:solidFill>
+              </a:defRPr>
+            </a:pPr>
+            <a:r>
+              <a:t>41</a:t>
+            </a:r>
+          </a:p>
+        </p:txBody>
+      </p:sp>
+      <p:graphicFrame>
+        <p:nvGraphicFramePr>
+          <p:cNvPr id="4" name="Table 3"/>
+          <p:cNvGraphicFramePr>
+            <a:graphicFrameLocks noGrp="1"/>
+          </p:cNvGraphicFramePr>
+          <p:nvPr/>
+        </p:nvGraphicFramePr>
+        <p:xfrm>
+          <a:off x="640080" y="1371600"/>
+          <a:ext cx="13167360" cy="2011680"/>
+        </p:xfrm>
+        <a:graphic>
+          <a:graphicData uri="http://schemas.openxmlformats.org/drawingml/2006/table">
+            <a:tbl>
+              <a:tblPr firstRow="1" bandRow="1">
+                <a:tableStyleId>{5C22544A-7EE6-4342-B048-85BDC9FD1C3A}</a:tableStyleId>
+              </a:tblPr>
+              <a:tblGrid>
+                <a:gridCol w="4937760"/>
+                <a:gridCol w="2743200"/>
+                <a:gridCol w="2743200"/>
+                <a:gridCol w="2743200"/>
+              </a:tblGrid>
+              <a:tr h="502920">
+                <a:tc>
+                  <a:txBody>
+                    <a:bodyPr/>
+                    <a:lstStyle/>
+                    <a:p>
+                      <a:pPr algn="ctr">
+                        <a:defRPr b="1" sz="1300">
+                          <a:solidFill>
+                            <a:srgbClr val="FFFFFF"/>
+                          </a:solidFill>
+                        </a:defRPr>
+                      </a:pPr>
+                    </a:p>
+                  </a:txBody>
+                  <a:tcPr>
+                    <a:solidFill>
+                      <a:srgbClr val="1F3A4D"/>
+                    </a:solidFill>
+                  </a:tcPr>
+                </a:tc>
+                <a:tc>
+                  <a:txBody>
+                    <a:bodyPr/>
+                    <a:lstStyle/>
+                    <a:p>
+                      <a:pPr algn="ctr">
+                        <a:defRPr b="1" sz="1300">
+                          <a:solidFill>
+                            <a:srgbClr val="FFFFFF"/>
+                          </a:solidFill>
+                        </a:defRPr>
+                      </a:pPr>
+                      <a:r>
+                        <a:t>2027</a:t>
+                      </a:r>
+                    </a:p>
+                  </a:txBody>
+                  <a:tcPr>
+                    <a:solidFill>
+                      <a:srgbClr val="1F3A4D"/>
+                    </a:solidFill>
+                  </a:tcPr>
+                </a:tc>
+                <a:tc>
+                  <a:txBody>
+                    <a:bodyPr/>
+                    <a:lstStyle/>
+                    <a:p>
+                      <a:pPr algn="ctr">
+                        <a:defRPr b="1" sz="1300">
+                          <a:solidFill>
+                            <a:srgbClr val="FFFFFF"/>
+                          </a:solidFill>
+                        </a:defRPr>
+                      </a:pPr>
+                      <a:r>
+                        <a:t>2028</a:t>
+                      </a:r>
+                    </a:p>
+                  </a:txBody>
+                  <a:tcPr>
+                    <a:solidFill>
+                      <a:srgbClr val="1F3A4D"/>
+                    </a:solidFill>
+                  </a:tcPr>
+                </a:tc>
+                <a:tc>
+                  <a:txBody>
+                    <a:bodyPr/>
+                    <a:lstStyle/>
+                    <a:p>
+                      <a:pPr algn="ctr">
+                        <a:defRPr b="1" sz="1300">
+                          <a:solidFill>
+                            <a:srgbClr val="FFFFFF"/>
+                          </a:solidFill>
+                        </a:defRPr>
+                      </a:pPr>
+                      <a:r>
+                        <a:t>2029</a:t>
+                      </a:r>
+                    </a:p>
+                  </a:txBody>
+                  <a:tcPr>
+                    <a:solidFill>
+                      <a:srgbClr val="1F3A4D"/>
+                    </a:solidFill>
+                  </a:tcPr>
+                </a:tc>
+              </a:tr>
+              <a:tr h="502920">
+                <a:tc>
+                  <a:txBody>
+                    <a:bodyPr/>
+                    <a:lstStyle/>
+                    <a:p>
+                      <a:pPr algn="ctr">
+                        <a:defRPr sz="1200" b="1">
+                          <a:solidFill>
+                            <a:srgbClr val="1E2220"/>
+                          </a:solidFill>
+                        </a:defRPr>
+                      </a:pPr>
+                      <a:r>
+                        <a:t>Match quality (with two-way trading)</a:t>
+                      </a:r>
+                    </a:p>
+                  </a:txBody>
+                  <a:tcPr>
+                    <a:solidFill>
+                      <a:srgbClr val="FFFFFF"/>
+                    </a:solidFill>
+                  </a:tcPr>
+                </a:tc>
+                <a:tc>
+                  <a:txBody>
+                    <a:bodyPr/>
+                    <a:lstStyle/>
+                    <a:p>
+                      <a:pPr algn="ctr">
+                        <a:defRPr sz="1200" b="0">
+                          <a:solidFill>
+                            <a:srgbClr val="1E2220"/>
+                          </a:solidFill>
+                        </a:defRPr>
+                      </a:pPr>
+                      <a:r>
+                        <a:t>0.717</a:t>
+                      </a:r>
+                    </a:p>
+                  </a:txBody>
+                  <a:tcPr>
+                    <a:solidFill>
+                      <a:srgbClr val="FFFFFF"/>
+                    </a:solidFill>
+                  </a:tcPr>
+                </a:tc>
+                <a:tc>
+                  <a:txBody>
+                    <a:bodyPr/>
+                    <a:lstStyle/>
+                    <a:p>
+                      <a:pPr algn="ctr">
+                        <a:defRPr sz="1200" b="0">
+                          <a:solidFill>
+                            <a:srgbClr val="1E2220"/>
+                          </a:solidFill>
+                        </a:defRPr>
+                      </a:pPr>
+                      <a:r>
+                        <a:t>0.718</a:t>
+                      </a:r>
+                    </a:p>
+                  </a:txBody>
+                  <a:tcPr>
+                    <a:solidFill>
+                      <a:srgbClr val="FFFFFF"/>
+                    </a:solidFill>
+                  </a:tcPr>
+                </a:tc>
+                <a:tc>
+                  <a:txBody>
+                    <a:bodyPr/>
+                    <a:lstStyle/>
+                    <a:p>
+                      <a:pPr algn="ctr">
+                        <a:defRPr sz="1200" b="0">
+                          <a:solidFill>
+                            <a:srgbClr val="1E2220"/>
+                          </a:solidFill>
+                        </a:defRPr>
+                      </a:pPr>
+                      <a:r>
+                        <a:t>0.752</a:t>
+                      </a:r>
+                    </a:p>
+                  </a:txBody>
+                  <a:tcPr>
+                    <a:solidFill>
+                      <a:srgbClr val="FFFFFF"/>
+                    </a:solidFill>
+                  </a:tcPr>
+                </a:tc>
+              </a:tr>
+              <a:tr h="502920">
+                <a:tc>
+                  <a:txBody>
+                    <a:bodyPr/>
+                    <a:lstStyle/>
+                    <a:p>
+                      <a:pPr algn="ctr">
+                        <a:defRPr sz="1200" b="1">
+                          <a:solidFill>
+                            <a:srgbClr val="1E2220"/>
+                          </a:solidFill>
+                        </a:defRPr>
+                      </a:pPr>
+                      <a:r>
+                        <a:t>Average price gap, ordinary days only</a:t>
+                      </a:r>
+                    </a:p>
+                  </a:txBody>
+                  <a:tcPr>
+                    <a:solidFill>
+                      <a:srgbClr val="EEF0E9"/>
+                    </a:solidFill>
+                  </a:tcPr>
+                </a:tc>
+                <a:tc>
+                  <a:txBody>
+                    <a:bodyPr/>
+                    <a:lstStyle/>
+                    <a:p>
+                      <a:pPr algn="ctr">
+                        <a:defRPr sz="1200" b="0">
+                          <a:solidFill>
+                            <a:srgbClr val="1E2220"/>
+                          </a:solidFill>
+                        </a:defRPr>
+                      </a:pPr>
+                      <a:r>
+                        <a:t>-0.59</a:t>
+                      </a:r>
+                    </a:p>
+                  </a:txBody>
+                  <a:tcPr>
+                    <a:solidFill>
+                      <a:srgbClr val="EEF0E9"/>
+                    </a:solidFill>
+                  </a:tcPr>
+                </a:tc>
+                <a:tc>
+                  <a:txBody>
+                    <a:bodyPr/>
+                    <a:lstStyle/>
+                    <a:p>
+                      <a:pPr algn="ctr">
+                        <a:defRPr sz="1200" b="0">
+                          <a:solidFill>
+                            <a:srgbClr val="1E2220"/>
+                          </a:solidFill>
+                        </a:defRPr>
+                      </a:pPr>
+                      <a:r>
+                        <a:t>+1.08</a:t>
+                      </a:r>
+                    </a:p>
+                  </a:txBody>
+                  <a:tcPr>
+                    <a:solidFill>
+                      <a:srgbClr val="EEF0E9"/>
+                    </a:solidFill>
+                  </a:tcPr>
+                </a:tc>
+                <a:tc>
+                  <a:txBody>
+                    <a:bodyPr/>
+                    <a:lstStyle/>
+                    <a:p>
+                      <a:pPr algn="ctr">
+                        <a:defRPr sz="1200" b="0">
+                          <a:solidFill>
+                            <a:srgbClr val="1E2220"/>
+                          </a:solidFill>
+                        </a:defRPr>
+                      </a:pPr>
+                      <a:r>
+                        <a:t>+3.21</a:t>
+                      </a:r>
+                    </a:p>
+                  </a:txBody>
+                  <a:tcPr>
+                    <a:solidFill>
+                      <a:srgbClr val="EEF0E9"/>
+                    </a:solidFill>
+                  </a:tcPr>
+                </a:tc>
+              </a:tr>
+              <a:tr h="502920">
+                <a:tc>
+                  <a:txBody>
+                    <a:bodyPr/>
+                    <a:lstStyle/>
+                    <a:p>
+                      <a:pPr algn="ctr">
+                        <a:defRPr sz="1200" b="1">
+                          <a:solidFill>
+                            <a:srgbClr val="1E2220"/>
+                          </a:solidFill>
+                        </a:defRPr>
+                      </a:pPr>
+                      <a:r>
+                        <a:t>Rare extreme hours (target: near zero)</a:t>
+                      </a:r>
+                    </a:p>
+                  </a:txBody>
+                  <a:tcPr>
+                    <a:solidFill>
+                      <a:srgbClr val="FFFFFF"/>
+                    </a:solidFill>
+                  </a:tcPr>
+                </a:tc>
+                <a:tc>
+                  <a:txBody>
+                    <a:bodyPr/>
+                    <a:lstStyle/>
+                    <a:p>
+                      <a:pPr algn="ctr">
+                        <a:defRPr sz="1200" b="0">
+                          <a:solidFill>
+                            <a:srgbClr val="1E2220"/>
+                          </a:solidFill>
+                        </a:defRPr>
+                      </a:pPr>
+                      <a:r>
+                        <a:t>7</a:t>
+                      </a:r>
+                    </a:p>
+                  </a:txBody>
+                  <a:tcPr>
+                    <a:solidFill>
+                      <a:srgbClr val="FFFFFF"/>
+                    </a:solidFill>
+                  </a:tcPr>
+                </a:tc>
+                <a:tc>
+                  <a:txBody>
+                    <a:bodyPr/>
+                    <a:lstStyle/>
+                    <a:p>
+                      <a:pPr algn="ctr">
+                        <a:defRPr sz="1200" b="0">
+                          <a:solidFill>
+                            <a:srgbClr val="1E2220"/>
+                          </a:solidFill>
+                        </a:defRPr>
+                      </a:pPr>
+                      <a:r>
+                        <a:t>17</a:t>
+                      </a:r>
+                    </a:p>
+                  </a:txBody>
+                  <a:tcPr>
+                    <a:solidFill>
+                      <a:srgbClr val="FFFFFF"/>
+                    </a:solidFill>
+                  </a:tcPr>
+                </a:tc>
+                <a:tc>
+                  <a:txBody>
+                    <a:bodyPr/>
+                    <a:lstStyle/>
+                    <a:p>
+                      <a:pPr algn="ctr">
+                        <a:defRPr sz="1200" b="0">
+                          <a:solidFill>
+                            <a:srgbClr val="1E2220"/>
+                          </a:solidFill>
+                        </a:defRPr>
+                      </a:pPr>
+                      <a:r>
+                        <a:t>76</a:t>
+                      </a:r>
+                    </a:p>
+                  </a:txBody>
+                  <a:tcPr>
+                    <a:solidFill>
+                      <a:srgbClr val="FFFFFF"/>
+                    </a:solidFill>
+                  </a:tcPr>
+                </a:tc>
+              </a:tr>
+            </a:tbl>
+          </a:graphicData>
+        </a:graphic>
+      </p:graphicFrame>
+      <p:sp>
+        <p:nvSpPr>
+          <p:cNvPr id="5" name="TextBox 4"/>
+          <p:cNvSpPr txBox="1"/>
+          <p:nvPr/>
+        </p:nvSpPr>
+        <p:spPr>
+          <a:xfrm>
+            <a:off x="640080" y="3566160"/>
+            <a:ext cx="10881360" cy="1097280"/>
+          </a:xfrm>
+          <a:prstGeom prst="rect">
+            <a:avLst/>
+          </a:prstGeom>
+          <a:noFill/>
+        </p:spPr>
+        <p:txBody>
+          <a:bodyPr wrap="none">
+            <a:spAutoFit/>
+          </a:bodyPr>
+          <a:lstStyle/>
+          <a:p>
+            <a:pPr>
+              <a:defRPr sz="1300" i="1">
+                <a:solidFill>
+                  <a:srgbClr val="5A605C"/>
+                </a:solidFill>
+              </a:defRPr>
+            </a:pPr>
+            <a:r>
+              <a:t>Strong, consistent match quality and excellent ordinary-day accuracy across all three years - the core result stands. The one real, still-open gap is the rising frequency of extreme hours the further a year is from 2027.</a:t>
+            </a:r>
+          </a:p>
+        </p:txBody>
+      </p:sp>
+    </p:spTree>
+  </p:cSld>
+  <p:clrMapOvr>
+    <a:masterClrMapping/>
+  </p:clrMapOvr>
+</p:sld>
+</file>
+
+<file path=ppt/slides/slide42.xml><?xml version="1.0" encoding="utf-8"?>
+<p:sld xmlns:a="http://schemas.openxmlformats.org/drawingml/2006/main" xmlns:r="http://schemas.openxmlformats.org/officeDocument/2006/relationships" xmlns:p="http://schemas.openxmlformats.org/presentationml/2006/main">
+  <p:cSld>
+    <p:spTree>
+      <p:nvGrpSpPr>
+        <p:cNvPr id="1" name=""/>
+        <p:cNvGrpSpPr/>
+        <p:nvPr/>
+      </p:nvGrpSpPr>
+      <p:grpSpPr>
+        <a:xfrm>
+          <a:off x="0" y="0"/>
+          <a:ext cx="0" cy="0"/>
+          <a:chOff x="0" y="0"/>
+          <a:chExt cx="0" cy="0"/>
+        </a:xfrm>
+      </p:grpSpPr>
+      <p:sp>
+        <p:nvSpPr>
+          <p:cNvPr id="2" name="Rectangle 1"/>
+          <p:cNvSpPr/>
+          <p:nvPr/>
+        </p:nvSpPr>
+        <p:spPr>
+          <a:xfrm>
+            <a:off x="0" y="0"/>
+            <a:ext cx="12191695" cy="960120"/>
+          </a:xfrm>
+          <a:prstGeom prst="rect">
+            <a:avLst/>
+          </a:prstGeom>
+          <a:solidFill>
+            <a:srgbClr val="1F3A4D"/>
+          </a:solidFill>
+          <a:ln>
+            <a:noFill/>
+          </a:ln>
+        </p:spPr>
+        <p:style>
+          <a:lnRef idx="1">
+            <a:schemeClr val="accent1"/>
+          </a:lnRef>
+          <a:fillRef idx="3">
+            <a:schemeClr val="accent1"/>
+          </a:fillRef>
+          <a:effectRef idx="2">
+            <a:schemeClr val="accent1"/>
+          </a:effectRef>
+          <a:fontRef idx="minor">
+            <a:schemeClr val="lt1"/>
+          </a:fontRef>
+        </p:style>
+        <p:txBody>
+          <a:bodyPr wrap="square" lIns="365760" tIns="73152" rtlCol="0" anchor="ctr"/>
+          <a:lstStyle/>
+          <a:p>
+            <a:pPr algn="ctr">
+              <a:defRPr sz="2800" b="1">
+                <a:solidFill>
+                  <a:srgbClr val="FFFFFF"/>
+                </a:solidFill>
+              </a:defRPr>
+            </a:pPr>
+            <a:r>
+              <a:t>Where We Stand Now</a:t>
+            </a:r>
+          </a:p>
+        </p:txBody>
+      </p:sp>
+      <p:sp>
+        <p:nvSpPr>
+          <p:cNvPr id="3" name="TextBox 2"/>
+          <p:cNvSpPr txBox="1"/>
+          <p:nvPr/>
+        </p:nvSpPr>
+        <p:spPr>
+          <a:xfrm>
+            <a:off x="11551615" y="6446520"/>
+            <a:ext cx="457200" cy="320040"/>
+          </a:xfrm>
+          <a:prstGeom prst="rect">
+            <a:avLst/>
+          </a:prstGeom>
+          <a:noFill/>
+        </p:spPr>
+        <p:txBody>
+          <a:bodyPr wrap="none">
+            <a:spAutoFit/>
+          </a:bodyPr>
+          <a:lstStyle/>
+          <a:p>
+            <a:pPr>
+              <a:defRPr sz="1100">
+                <a:solidFill>
+                  <a:srgbClr val="5A605C"/>
+                </a:solidFill>
+              </a:defRPr>
+            </a:pPr>
+            <a:r>
+              <a:t>47</a:t>
             </a:r>
           </a:p>
         </p:txBody>
@@ -10119,7 +12964,7 @@
 </p:sld>
 </file>
 
-<file path=ppt/slides/slide34.xml><?xml version="1.0" encoding="utf-8"?>
+<file path=ppt/slides/slide43.xml><?xml version="1.0" encoding="utf-8"?>
 <p:sld xmlns:a="http://schemas.openxmlformats.org/drawingml/2006/main" xmlns:r="http://schemas.openxmlformats.org/officeDocument/2006/relationships" xmlns:p="http://schemas.openxmlformats.org/presentationml/2006/main">
   <p:cSld>
     <p:spTree>
@@ -10218,7 +13063,7 @@
               </a:defRPr>
             </a:pPr>
             <a:r>
-              <a:t>43</a:t>
+              <a:t>48</a:t>
             </a:r>
           </a:p>
         </p:txBody>
@@ -10290,7 +13135,7 @@
 </p:sld>
 </file>
 
-<file path=ppt/slides/slide35.xml><?xml version="1.0" encoding="utf-8"?>
+<file path=ppt/slides/slide44.xml><?xml version="1.0" encoding="utf-8"?>
 <p:sld xmlns:a="http://schemas.openxmlformats.org/drawingml/2006/main" xmlns:r="http://schemas.openxmlformats.org/officeDocument/2006/relationships" xmlns:p="http://schemas.openxmlformats.org/presentationml/2006/main">
   <p:cSld>
     <p:spTree>
@@ -10389,7 +13234,7 @@
               </a:defRPr>
             </a:pPr>
             <a:r>
-              <a:t>44</a:t>
+              <a:t>49</a:t>
             </a:r>
           </a:p>
         </p:txBody>
@@ -10485,7 +13330,7 @@
 </p:sld>
 </file>
 
-<file path=ppt/slides/slide36.xml><?xml version="1.0" encoding="utf-8"?>
+<file path=ppt/slides/slide45.xml><?xml version="1.0" encoding="utf-8"?>
 <p:sld xmlns:a="http://schemas.openxmlformats.org/drawingml/2006/main" xmlns:r="http://schemas.openxmlformats.org/officeDocument/2006/relationships" xmlns:p="http://schemas.openxmlformats.org/presentationml/2006/main">
   <p:cSld>
     <p:spTree>
@@ -10584,7 +13429,7 @@
               </a:defRPr>
             </a:pPr>
             <a:r>
-              <a:t>45</a:t>
+              <a:t>50</a:t>
             </a:r>
           </a:p>
         </p:txBody>
@@ -10623,7 +13468,7 @@
 </p:sld>
 </file>
 
-<file path=ppt/slides/slide37.xml><?xml version="1.0" encoding="utf-8"?>
+<file path=ppt/slides/slide46.xml><?xml version="1.0" encoding="utf-8"?>
 <p:sld xmlns:a="http://schemas.openxmlformats.org/drawingml/2006/main" xmlns:p="http://schemas.openxmlformats.org/presentationml/2006/main" xmlns:r="http://schemas.openxmlformats.org/officeDocument/2006/relationships">
   <p:cSld>
     <p:spTree>
@@ -10680,7 +13525,7 @@
               </a:defRPr>
             </a:pPr>
             <a:r>
-              <a:t>The Big Idea: A Real Two-Way Trading Partner for Germany</a:t>
+              <a:t>One More Lead: Could the Other Side's Own Storage Explain the Gap?</a:t>
             </a:r>
           </a:p>
           <a:p>
@@ -10692,7 +13537,7 @@
               </a:defRPr>
             </a:pPr>
             <a:r>
-              <a:t>Moving from the small experiments to the one big remaining idea</a:t>
+              <a:t>A real, testable idea - checked and ruled out</a:t>
             </a:r>
           </a:p>
         </p:txBody>
@@ -10727,7 +13572,7 @@
               </a:defRPr>
             </a:pPr>
             <a:r>
-              <a:t>33</a:t>
+              <a:t>42</a:t>
             </a:r>
           </a:p>
         </p:txBody>
@@ -10765,7 +13610,7 @@
               </a:defRPr>
             </a:pPr>
             <a:r>
-              <a:t>•  Every smaller idea we tested (price cap, start-up cost, bidding floor) came up empty or too limited</a:t>
+              <a:t>•  The one open thread from before: a small number of extreme hours where Germany imports less than it could, even with spare capacity available</a:t>
             </a:r>
           </a:p>
           <a:p>
@@ -10780,7 +13625,7 @@
               </a:defRPr>
             </a:pPr>
             <a:r>
-              <a:t>•  The one big lever left untested: let the model properly BUY AND SELL power across the border, not just buy</a:t>
+              <a:t>•  Tested directly using data already on hand: is the rest of Europe's own storage running physically empty during those hours?</a:t>
             </a:r>
           </a:p>
           <a:p>
@@ -10795,7 +13640,7 @@
               </a:defRPr>
             </a:pPr>
             <a:r>
-              <a:t>•  AMIRIS has a real, working template for exactly this - a second market 'zone' connected to Germany's own, trading both ways</a:t>
+              <a:t>•  Checked both battery-style storage and reservoir hydro on the other side of the border - neither ever comes close to its own physical limit, in either year tested</a:t>
             </a:r>
           </a:p>
           <a:p>
@@ -10810,7 +13655,7 @@
               </a:defRPr>
             </a:pPr>
             <a:r>
-              <a:t>•  Plan: source real data first, build a first working version, then refine it step by step</a:t>
+              <a:t>•  Rules out 'the other side simply has nothing left to give' - strengthens the case that the real limiter is inside the model's own internal trading logic, not a real-world capacity constraint anywhere</a:t>
             </a:r>
           </a:p>
         </p:txBody>
@@ -10823,7 +13668,7 @@
 </p:sld>
 </file>
 
-<file path=ppt/slides/slide38.xml><?xml version="1.0" encoding="utf-8"?>
+<file path=ppt/slides/slide47.xml><?xml version="1.0" encoding="utf-8"?>
 <p:sld xmlns:a="http://schemas.openxmlformats.org/drawingml/2006/main" xmlns:p="http://schemas.openxmlformats.org/presentationml/2006/main" xmlns:r="http://schemas.openxmlformats.org/officeDocument/2006/relationships">
   <p:cSld>
     <p:spTree>
@@ -10880,7 +13725,7 @@
               </a:defRPr>
             </a:pPr>
             <a:r>
-              <a:t>Sourcing Real Data From Scratch for a 'Rest of Europe' Zone</a:t>
+              <a:t>Pushing Further: Replacing the Combined Zone With a Real Named Country</a:t>
             </a:r>
           </a:p>
           <a:p>
@@ -10892,7 +13737,7 @@
               </a:defRPr>
             </a:pPr>
             <a:r>
-              <a:t>Nothing invented - every number traced to a real source</a:t>
+              <a:t>Testing whether more realism helps, or whether the combined approach was already the right call</a:t>
             </a:r>
           </a:p>
         </p:txBody>
@@ -10927,7 +13772,7 @@
               </a:defRPr>
             </a:pPr>
             <a:r>
-              <a:t>34</a:t>
+              <a:t>43</a:t>
             </a:r>
           </a:p>
         </p:txBody>
@@ -10965,7 +13810,7 @@
               </a:defRPr>
             </a:pPr>
             <a:r>
-              <a:t>•  Needed: how much power the rest of Europe uses, what it's generated from, and how much can physically flow across the border</a:t>
+              <a:t>•  Everything so far treated 'the rest of Europe' as one combined stand-in - the next real question: does splitting out a real neighbour by name do any better?</a:t>
             </a:r>
           </a:p>
           <a:p>
@@ -10980,7 +13825,7 @@
               </a:defRPr>
             </a:pPr>
             <a:r>
-              <a:t>•  Pulled real 2023 figures (demand, power plant types) for Germany's 10 real neighbouring countries from Eurostat</a:t>
+              <a:t>•  Chose France as the test case: the largest single economy involved, and the one country with enough real, already-sourced data to build immediately</a:t>
             </a:r>
           </a:p>
           <a:p>
@@ -10995,22 +13840,7 @@
               </a:defRPr>
             </a:pPr>
             <a:r>
-              <a:t>•  Pulled real weather-driven wind/solar output the same way we did for Germany's own model</a:t>
-            </a:r>
-          </a:p>
-          <a:p>
-            <a:pPr>
-              <a:spcAft>
-                <a:spcPts val="1000"/>
-              </a:spcAft>
-              <a:defRPr sz="1800" b="1">
-                <a:solidFill>
-                  <a:srgbClr val="1E2220"/>
-                </a:solidFill>
-              </a:defRPr>
-            </a:pPr>
-            <a:r>
-              <a:t>•  Hit a real multi-day outage on Europe's official cross-border data platform partway through - worked around it with an alternative real source, then went back and finished the job once it recovered</a:t>
+              <a:t>•  Built it properly: France's own real power plants, real demand, real weather-driven renewables, and a real border link to Germany - not a shortcut</a:t>
             </a:r>
           </a:p>
         </p:txBody>
@@ -11023,7 +13853,7 @@
 </p:sld>
 </file>
 
-<file path=ppt/slides/slide39.xml><?xml version="1.0" encoding="utf-8"?>
+<file path=ppt/slides/slide48.xml><?xml version="1.0" encoding="utf-8"?>
 <p:sld xmlns:a="http://schemas.openxmlformats.org/drawingml/2006/main" xmlns:p="http://schemas.openxmlformats.org/presentationml/2006/main" xmlns:r="http://schemas.openxmlformats.org/officeDocument/2006/relationships">
   <p:cSld>
     <p:spTree>
@@ -11080,7 +13910,7 @@
               </a:defRPr>
             </a:pPr>
             <a:r>
-              <a:t>The First Working Two-Way Market</a:t>
+              <a:t>Result: A Real Step Backward - With a Clear, Understood Reason</a:t>
             </a:r>
           </a:p>
           <a:p>
@@ -11092,7 +13922,7 @@
               </a:defRPr>
             </a:pPr>
             <a:r>
-              <a:t>A real improvement in one measure, a real cost in another - both honestly reported</a:t>
+              <a:t>Splitting France out on its own made things worse, not better</a:t>
             </a:r>
           </a:p>
         </p:txBody>
@@ -11127,7 +13957,7 @@
               </a:defRPr>
             </a:pPr>
             <a:r>
-              <a:t>35</a:t>
+              <a:t>44</a:t>
             </a:r>
           </a:p>
         </p:txBody>
@@ -11142,7 +13972,7 @@
         </p:nvGraphicFramePr>
         <p:xfrm>
           <a:off x="640080" y="1371600"/>
-          <a:ext cx="11338560" cy="1508760"/>
+          <a:ext cx="12252960" cy="1508760"/>
         </p:xfrm>
         <a:graphic>
           <a:graphicData uri="http://schemas.openxmlformats.org/drawingml/2006/table">
@@ -11151,9 +13981,9 @@
                 <a:tableStyleId>{5C22544A-7EE6-4342-B048-85BDC9FD1C3A}</a:tableStyleId>
               </a:tblPr>
               <a:tblGrid>
-                <a:gridCol w="4572000"/>
-                <a:gridCol w="3383280"/>
-                <a:gridCol w="3383280"/>
+                <a:gridCol w="4937760"/>
+                <a:gridCol w="3657600"/>
+                <a:gridCol w="3657600"/>
               </a:tblGrid>
               <a:tr h="502920">
                 <a:tc>
@@ -11189,7 +14019,7 @@
                         </a:defRPr>
                       </a:pPr>
                       <a:r>
-                        <a:t>Before (import-only)</a:t>
+                        <a:t>Combined zone (best result)</a:t>
                       </a:r>
                     </a:p>
                   </a:txBody>
@@ -11212,7 +14042,7 @@
                         </a:defRPr>
                       </a:pPr>
                       <a:r>
-                        <a:t>First working version</a:t>
+                        <a:t>France split out separately</a:t>
                       </a:r>
                     </a:p>
                   </a:txBody>
@@ -11237,7 +14067,7 @@
                         </a:defRPr>
                       </a:pPr>
                       <a:r>
-                        <a:t>Match quality (trustworthy score)</a:t>
+                        <a:t>'Ran out of power' hours</a:t>
                       </a:r>
                     </a:p>
                   </a:txBody>
@@ -11260,7 +14090,7 @@
                         </a:defRPr>
                       </a:pPr>
                       <a:r>
-                        <a:t>0.675</a:t>
+                        <a:t>7</a:t>
                       </a:r>
                     </a:p>
                   </a:txBody>
@@ -11283,7 +14113,7 @@
                         </a:defRPr>
                       </a:pPr>
                       <a:r>
-                        <a:t>0.739</a:t>
+                        <a:t>167</a:t>
                       </a:r>
                     </a:p>
                   </a:txBody>
@@ -11308,7 +14138,7 @@
                         </a:defRPr>
                       </a:pPr>
                       <a:r>
-                        <a:t>Average price gap</a:t>
+                        <a:t>Average price gap on ordinary days</a:t>
                       </a:r>
                     </a:p>
                   </a:txBody>
@@ -11331,7 +14161,7 @@
                         </a:defRPr>
                       </a:pPr>
                       <a:r>
-                        <a:t>-11.86</a:t>
+                        <a:t>-2.90</a:t>
                       </a:r>
                     </a:p>
                   </a:txBody>
@@ -11354,7 +14184,7 @@
                         </a:defRPr>
                       </a:pPr>
                       <a:r>
-                        <a:t>-30.39</a:t>
+                        <a:t>+9.65</a:t>
                       </a:r>
                     </a:p>
                   </a:txBody>
@@ -11399,7 +14229,7 @@
               </a:defRPr>
             </a:pPr>
             <a:r>
-              <a:t>Match quality genuinely improved. But the average price moved further from real - explained by a placeholder guess for how much power can flow across the border, and the other side having no storage/flexibility of its own yet.</a:t>
+              <a:t>Real, checked reason: France's own huge nuclear fleet used to help keep the WHOLE combined pool well-supplied. Pulled out on its own, the remaining combined zone lost that cushion and became genuinely short more often - while France's own surplus, now only linked directly to Germany by a narrow border, couldn't reach the rest of Europe to help there either.</a:t>
             </a:r>
           </a:p>
         </p:txBody>
@@ -11412,7 +14242,207 @@
 </p:sld>
 </file>
 
-<file path=ppt/slides/slide4.xml><?xml version="1.0" encoding="utf-8"?>
+<file path=ppt/slides/slide49.xml><?xml version="1.0" encoding="utf-8"?>
+<p:sld xmlns:a="http://schemas.openxmlformats.org/drawingml/2006/main" xmlns:p="http://schemas.openxmlformats.org/presentationml/2006/main" xmlns:r="http://schemas.openxmlformats.org/officeDocument/2006/relationships">
+  <p:cSld>
+    <p:spTree>
+      <p:nvGrpSpPr>
+        <p:cNvPr id="1" name=""/>
+        <p:cNvGrpSpPr/>
+        <p:nvPr/>
+      </p:nvGrpSpPr>
+      <p:grpSpPr/>
+      <p:sp>
+        <p:nvSpPr>
+          <p:cNvPr id="2" name="Rectangle 1"/>
+          <p:cNvSpPr/>
+          <p:nvPr/>
+        </p:nvSpPr>
+        <p:spPr>
+          <a:xfrm>
+            <a:off x="0" y="0"/>
+            <a:ext cx="12192000" cy="960120"/>
+          </a:xfrm>
+          <a:prstGeom prst="rect">
+            <a:avLst/>
+          </a:prstGeom>
+          <a:solidFill>
+            <a:srgbClr val="1F3A4D"/>
+          </a:solidFill>
+          <a:ln>
+            <a:noFill/>
+          </a:ln>
+        </p:spPr>
+        <p:style>
+          <a:lnRef idx="1">
+            <a:schemeClr val="accent1"/>
+          </a:lnRef>
+          <a:fillRef idx="3">
+            <a:schemeClr val="accent1"/>
+          </a:fillRef>
+          <a:effectRef idx="2">
+            <a:schemeClr val="accent1"/>
+          </a:effectRef>
+          <a:fontRef idx="minor">
+            <a:schemeClr val="lt1"/>
+          </a:fontRef>
+        </p:style>
+        <p:txBody>
+          <a:bodyPr rtlCol="0" anchor="ctr" lIns="365760" tIns="73152" wrap="square"/>
+          <a:lstStyle/>
+          <a:p>
+            <a:pPr algn="ctr">
+              <a:defRPr sz="2600" b="1">
+                <a:solidFill>
+                  <a:srgbClr val="FFFFFF"/>
+                </a:solidFill>
+              </a:defRPr>
+            </a:pPr>
+            <a:r>
+              <a:t>Going All the Way: All 10 Real Neighbouring Countries at Once</a:t>
+            </a:r>
+          </a:p>
+          <a:p>
+            <a:pPr>
+              <a:defRPr sz="1400">
+                <a:solidFill>
+                  <a:srgbClr val="C8D2DA"/>
+                </a:solidFill>
+              </a:defRPr>
+            </a:pPr>
+            <a:r>
+              <a:t>A genuine engineering problem, found, diagnosed, and fixed along the way</a:t>
+            </a:r>
+          </a:p>
+        </p:txBody>
+      </p:sp>
+      <p:sp>
+        <p:nvSpPr>
+          <p:cNvPr id="3" name="TextBox 2"/>
+          <p:cNvSpPr txBox="1"/>
+          <p:nvPr/>
+        </p:nvSpPr>
+        <p:spPr>
+          <a:xfrm>
+            <a:off x="11551920" y="6446520"/>
+            <a:ext cx="457200" cy="320040"/>
+          </a:xfrm>
+          <a:prstGeom prst="rect">
+            <a:avLst/>
+          </a:prstGeom>
+          <a:noFill/>
+        </p:spPr>
+        <p:txBody>
+          <a:bodyPr wrap="none">
+            <a:spAutoFit/>
+          </a:bodyPr>
+          <a:lstStyle/>
+          <a:p>
+            <a:pPr>
+              <a:defRPr sz="1100">
+                <a:solidFill>
+                  <a:srgbClr val="5A605C"/>
+                </a:solidFill>
+              </a:defRPr>
+            </a:pPr>
+            <a:r>
+              <a:t>45</a:t>
+            </a:r>
+          </a:p>
+        </p:txBody>
+      </p:sp>
+      <p:sp>
+        <p:nvSpPr>
+          <p:cNvPr id="4" name="TextBox 3"/>
+          <p:cNvSpPr txBox="1"/>
+          <p:nvPr/>
+        </p:nvSpPr>
+        <p:spPr>
+          <a:xfrm>
+            <a:off x="502920" y="1234440"/>
+            <a:ext cx="11155680" cy="5303520"/>
+          </a:xfrm>
+          <a:prstGeom prst="rect">
+            <a:avLst/>
+          </a:prstGeom>
+          <a:noFill/>
+        </p:spPr>
+        <p:txBody>
+          <a:bodyPr wrap="square">
+            <a:spAutoFit/>
+          </a:bodyPr>
+          <a:lstStyle/>
+          <a:p>
+            <a:pPr>
+              <a:spcAft>
+                <a:spcPts val="1000"/>
+              </a:spcAft>
+              <a:defRPr sz="1800" b="1">
+                <a:solidFill>
+                  <a:srgbClr val="1E2220"/>
+                </a:solidFill>
+              </a:defRPr>
+            </a:pPr>
+            <a:r>
+              <a:t>•  Since one real country made things worse for a clear, understood reason, the natural next test: does the SAME problem get worse - or does something different happen - once every real neighbour is split out?</a:t>
+            </a:r>
+          </a:p>
+          <a:p>
+            <a:pPr>
+              <a:spcAft>
+                <a:spcPts val="1000"/>
+              </a:spcAft>
+              <a:defRPr sz="1800" b="1">
+                <a:solidFill>
+                  <a:srgbClr val="1E2220"/>
+                </a:solidFill>
+              </a:defRPr>
+            </a:pPr>
+            <a:r>
+              <a:t>•  Built all 10 real countries as their own separate zones - the largest build of the whole project</a:t>
+            </a:r>
+          </a:p>
+          <a:p>
+            <a:pPr>
+              <a:spcAft>
+                <a:spcPts val="1000"/>
+              </a:spcAft>
+              <a:defRPr sz="1800" b="1">
+                <a:solidFill>
+                  <a:srgbClr val="1E2220"/>
+                </a:solidFill>
+              </a:defRPr>
+            </a:pPr>
+            <a:r>
+              <a:t>•  Hit a genuine, hard technical bug along the way: the model's own dispatch engine broke down for one specific country (Denmark) - traced directly to Denmark's real hydro power being far too small in absolute terms for the model to handle reliably</a:t>
+            </a:r>
+          </a:p>
+          <a:p>
+            <a:pPr>
+              <a:spcAft>
+                <a:spcPts val="1000"/>
+              </a:spcAft>
+              <a:defRPr sz="1800" b="1">
+                <a:solidFill>
+                  <a:srgbClr val="1E2220"/>
+                </a:solidFill>
+              </a:defRPr>
+            </a:pPr>
+            <a:r>
+              <a:t>•  Fixed with a clearly labelled, honestly-flagged technical workaround (not real data) - confirmed the fix worked, then completed the full 10-country run</a:t>
+            </a:r>
+          </a:p>
+        </p:txBody>
+      </p:sp>
+    </p:spTree>
+  </p:cSld>
+  <p:clrMapOvr>
+    <a:masterClrMapping/>
+  </p:clrMapOvr>
+</p:sld>
+</file>
+
+<file path=ppt/slides/slide5.xml><?xml version="1.0" encoding="utf-8"?>
 <p:sld xmlns:a="http://schemas.openxmlformats.org/drawingml/2006/main" xmlns:r="http://schemas.openxmlformats.org/officeDocument/2006/relationships" xmlns:p="http://schemas.openxmlformats.org/presentationml/2006/main">
   <p:cSld>
     <p:spTree>
@@ -11476,7 +14506,7 @@
               </a:defRPr>
             </a:pPr>
             <a:r>
-              <a:t>Three Tasks From Last Time</a:t>
+              <a:t>Task 1: Thesis Form</a:t>
             </a:r>
           </a:p>
         </p:txBody>
@@ -11511,7 +14541,7 @@
               </a:defRPr>
             </a:pPr>
             <a:r>
-              <a:t>4</a:t>
+              <a:t>5</a:t>
             </a:r>
           </a:p>
         </p:txBody>
@@ -11525,7 +14555,7 @@
         <p:spPr>
           <a:xfrm>
             <a:off x="502920" y="1234440"/>
-            <a:ext cx="11155680" cy="1179810"/>
+            <a:ext cx="11155680" cy="5303520"/>
           </a:xfrm>
           <a:prstGeom prst="rect">
             <a:avLst/>
@@ -11549,48 +14579,7 @@
               </a:defRPr>
             </a:pPr>
             <a:r>
-              <a:rPr dirty="0"/>
-              <a:t>•  1.  Submit the filled thesis form for endorsement</a:t>
-            </a:r>
-          </a:p>
-          <a:p>
-            <a:pPr>
-              <a:spcAft>
-                <a:spcPts val="1000"/>
-              </a:spcAft>
-              <a:defRPr sz="1800" b="1">
-                <a:solidFill>
-                  <a:srgbClr val="1E2220"/>
-                </a:solidFill>
-              </a:defRPr>
-            </a:pPr>
-            <a:r>
-              <a:rPr dirty="0"/>
-              <a:t>•  2.  Load profile comparisons - AMIRIS vs. our different model versions, with charts</a:t>
-            </a:r>
-          </a:p>
-          <a:p>
-            <a:pPr>
-              <a:spcAft>
-                <a:spcPts val="1000"/>
-              </a:spcAft>
-              <a:defRPr sz="1800" b="1">
-                <a:solidFill>
-                  <a:srgbClr val="1E2220"/>
-                </a:solidFill>
-              </a:defRPr>
-            </a:pPr>
-            <a:r>
-              <a:rPr dirty="0"/>
-              <a:t>•  3.  </a:t>
-            </a:r>
-            <a:r>
-              <a:rPr lang="en-US" dirty="0"/>
-              <a:t>Use </a:t>
-            </a:r>
-            <a:r>
-              <a:rPr dirty="0"/>
-              <a:t>the 2009 renewable weather profiles</a:t>
+              <a:t>•  Administrative item - status to confirm at this meeting</a:t>
             </a:r>
           </a:p>
         </p:txBody>
@@ -11603,7 +14592,7 @@
 </p:sld>
 </file>
 
-<file path=ppt/slides/slide40.xml><?xml version="1.0" encoding="utf-8"?>
+<file path=ppt/slides/slide50.xml><?xml version="1.0" encoding="utf-8"?>
 <p:sld xmlns:a="http://schemas.openxmlformats.org/drawingml/2006/main" xmlns:p="http://schemas.openxmlformats.org/presentationml/2006/main" xmlns:r="http://schemas.openxmlformats.org/officeDocument/2006/relationships">
   <p:cSld>
     <p:spTree>
@@ -11660,7 +14649,7 @@
               </a:defRPr>
             </a:pPr>
             <a:r>
-              <a:t>Real Border Data Replaces the Guess</a:t>
+              <a:t>Result: Better Than Expected - But Still Not the Winning Approach</a:t>
             </a:r>
           </a:p>
           <a:p>
@@ -11672,7 +14661,7 @@
               </a:defRPr>
             </a:pPr>
             <a:r>
-              <a:t>Turning a placeholder into a real, sourced number</a:t>
+              <a:t>Splitting into all 10 real countries beat the single-country attempt on every measure but one</a:t>
             </a:r>
           </a:p>
         </p:txBody>
@@ -11707,454 +14696,7 @@
               </a:defRPr>
             </a:pPr>
             <a:r>
-              <a:t>36</a:t>
-            </a:r>
-          </a:p>
-        </p:txBody>
-      </p:sp>
-      <p:sp>
-        <p:nvSpPr>
-          <p:cNvPr id="4" name="TextBox 3"/>
-          <p:cNvSpPr txBox="1"/>
-          <p:nvPr/>
-        </p:nvSpPr>
-        <p:spPr>
-          <a:xfrm>
-            <a:off x="502920" y="1234440"/>
-            <a:ext cx="11155680" cy="5303520"/>
-          </a:xfrm>
-          <a:prstGeom prst="rect">
-            <a:avLst/>
-          </a:prstGeom>
-          <a:noFill/>
-        </p:spPr>
-        <p:txBody>
-          <a:bodyPr wrap="square">
-            <a:spAutoFit/>
-          </a:bodyPr>
-          <a:lstStyle/>
-          <a:p>
-            <a:pPr>
-              <a:spcAft>
-                <a:spcPts val="1000"/>
-              </a:spcAft>
-              <a:defRPr sz="1800" b="1">
-                <a:solidFill>
-                  <a:srgbClr val="1E2220"/>
-                </a:solidFill>
-              </a:defRPr>
-            </a:pPr>
-            <a:r>
-              <a:t>•  The European data platform came back online - immediately used it to replace the placeholder guess</a:t>
-            </a:r>
-          </a:p>
-          <a:p>
-            <a:pPr>
-              <a:spcAft>
-                <a:spcPts val="1000"/>
-              </a:spcAft>
-              <a:defRPr sz="1800" b="1">
-                <a:solidFill>
-                  <a:srgbClr val="1E2220"/>
-                </a:solidFill>
-              </a:defRPr>
-            </a:pPr>
-            <a:r>
-              <a:t>•  Pulled real, hour-by-hour cross-border flow data for all of Germany's real neighbouring borders</a:t>
-            </a:r>
-          </a:p>
-          <a:p>
-            <a:pPr>
-              <a:spcAft>
-                <a:spcPts val="1000"/>
-              </a:spcAft>
-              <a:defRPr sz="1800" b="1">
-                <a:solidFill>
-                  <a:srgbClr val="1E2220"/>
-                </a:solidFill>
-              </a:defRPr>
-            </a:pPr>
-            <a:r>
-              <a:t>•  Used that real data to set a genuine, grounded limit on how much power can flow - not a guess</a:t>
-            </a:r>
-          </a:p>
-          <a:p>
-            <a:pPr>
-              <a:spcAft>
-                <a:spcPts val="1000"/>
-              </a:spcAft>
-              <a:defRPr sz="1800" b="1">
-                <a:solidFill>
-                  <a:srgbClr val="1E2220"/>
-                </a:solidFill>
-              </a:defRPr>
-            </a:pPr>
-            <a:r>
-              <a:t>•  Result: confirmed the match-quality improvement was real, not just luck from an oversized placeholder guess</a:t>
-            </a:r>
-          </a:p>
-        </p:txBody>
-      </p:sp>
-    </p:spTree>
-  </p:cSld>
-  <p:clrMapOvr>
-    <a:masterClrMapping/>
-  </p:clrMapOvr>
-</p:sld>
-</file>
-
-<file path=ppt/slides/slide41.xml><?xml version="1.0" encoding="utf-8"?>
-<p:sld xmlns:a="http://schemas.openxmlformats.org/drawingml/2006/main" xmlns:p="http://schemas.openxmlformats.org/presentationml/2006/main" xmlns:r="http://schemas.openxmlformats.org/officeDocument/2006/relationships">
-  <p:cSld>
-    <p:spTree>
-      <p:nvGrpSpPr>
-        <p:cNvPr id="1" name=""/>
-        <p:cNvGrpSpPr/>
-        <p:nvPr/>
-      </p:nvGrpSpPr>
-      <p:grpSpPr/>
-      <p:sp>
-        <p:nvSpPr>
-          <p:cNvPr id="2" name="Rectangle 1"/>
-          <p:cNvSpPr/>
-          <p:nvPr/>
-        </p:nvSpPr>
-        <p:spPr>
-          <a:xfrm>
-            <a:off x="0" y="0"/>
-            <a:ext cx="12192000" cy="960120"/>
-          </a:xfrm>
-          <a:prstGeom prst="rect">
-            <a:avLst/>
-          </a:prstGeom>
-          <a:solidFill>
-            <a:srgbClr val="1F3A4D"/>
-          </a:solidFill>
-          <a:ln>
-            <a:noFill/>
-          </a:ln>
-        </p:spPr>
-        <p:style>
-          <a:lnRef idx="1">
-            <a:schemeClr val="accent1"/>
-          </a:lnRef>
-          <a:fillRef idx="3">
-            <a:schemeClr val="accent1"/>
-          </a:fillRef>
-          <a:effectRef idx="2">
-            <a:schemeClr val="accent1"/>
-          </a:effectRef>
-          <a:fontRef idx="minor">
-            <a:schemeClr val="lt1"/>
-          </a:fontRef>
-        </p:style>
-        <p:txBody>
-          <a:bodyPr rtlCol="0" anchor="ctr" lIns="365760" tIns="73152" wrap="square"/>
-          <a:lstStyle/>
-          <a:p>
-            <a:pPr algn="ctr">
-              <a:defRPr sz="2600" b="1">
-                <a:solidFill>
-                  <a:srgbClr val="FFFFFF"/>
-                </a:solidFill>
-              </a:defRPr>
-            </a:pPr>
-            <a:r>
-              <a:t>Adding Real Storage: Our Best Result Yet</a:t>
-            </a:r>
-          </a:p>
-          <a:p>
-            <a:pPr>
-              <a:defRPr sz="1400">
-                <a:solidFill>
-                  <a:srgbClr val="C8D2DA"/>
-                </a:solidFill>
-              </a:defRPr>
-            </a:pPr>
-            <a:r>
-              <a:t>Real storage and real subsidies on both sides of the border</a:t>
-            </a:r>
-          </a:p>
-        </p:txBody>
-      </p:sp>
-      <p:sp>
-        <p:nvSpPr>
-          <p:cNvPr id="3" name="TextBox 2"/>
-          <p:cNvSpPr txBox="1"/>
-          <p:nvPr/>
-        </p:nvSpPr>
-        <p:spPr>
-          <a:xfrm>
-            <a:off x="11551920" y="6446520"/>
-            <a:ext cx="457200" cy="320040"/>
-          </a:xfrm>
-          <a:prstGeom prst="rect">
-            <a:avLst/>
-          </a:prstGeom>
-          <a:noFill/>
-        </p:spPr>
-        <p:txBody>
-          <a:bodyPr wrap="none">
-            <a:spAutoFit/>
-          </a:bodyPr>
-          <a:lstStyle/>
-          <a:p>
-            <a:pPr>
-              <a:defRPr sz="1100">
-                <a:solidFill>
-                  <a:srgbClr val="5A605C"/>
-                </a:solidFill>
-              </a:defRPr>
-            </a:pPr>
-            <a:r>
-              <a:t>37</a:t>
-            </a:r>
-          </a:p>
-        </p:txBody>
-      </p:sp>
-      <p:sp>
-        <p:nvSpPr>
-          <p:cNvPr id="4" name="TextBox 3"/>
-          <p:cNvSpPr txBox="1"/>
-          <p:nvPr/>
-        </p:nvSpPr>
-        <p:spPr>
-          <a:xfrm>
-            <a:off x="502920" y="1371600"/>
-            <a:ext cx="11155680" cy="1463040"/>
-          </a:xfrm>
-          <a:prstGeom prst="rect">
-            <a:avLst/>
-          </a:prstGeom>
-          <a:noFill/>
-        </p:spPr>
-        <p:txBody>
-          <a:bodyPr wrap="none">
-            <a:spAutoFit/>
-          </a:bodyPr>
-          <a:lstStyle/>
-          <a:p>
-            <a:pPr algn="ctr">
-              <a:defRPr sz="4800" b="1">
-                <a:solidFill>
-                  <a:srgbClr val="3A6B47"/>
-                </a:solidFill>
-              </a:defRPr>
-            </a:pPr>
-            <a:r>
-              <a:t>Average price within 60 cents</a:t>
-            </a:r>
-          </a:p>
-          <a:p>
-            <a:pPr algn="ctr">
-              <a:defRPr sz="1600" i="1">
-                <a:solidFill>
-                  <a:srgbClr val="5A605C"/>
-                </a:solidFill>
-              </a:defRPr>
-            </a:pPr>
-            <a:r>
-              <a:t>of the real figure - the closest match this entire project has produced</a:t>
-            </a:r>
-          </a:p>
-        </p:txBody>
-      </p:sp>
-      <p:sp>
-        <p:nvSpPr>
-          <p:cNvPr id="5" name="TextBox 4"/>
-          <p:cNvSpPr txBox="1"/>
-          <p:nvPr/>
-        </p:nvSpPr>
-        <p:spPr>
-          <a:xfrm>
-            <a:off x="502920" y="3017520"/>
-            <a:ext cx="11155680" cy="3840480"/>
-          </a:xfrm>
-          <a:prstGeom prst="rect">
-            <a:avLst/>
-          </a:prstGeom>
-          <a:noFill/>
-        </p:spPr>
-        <p:txBody>
-          <a:bodyPr wrap="square">
-            <a:spAutoFit/>
-          </a:bodyPr>
-          <a:lstStyle/>
-          <a:p>
-            <a:pPr>
-              <a:spcAft>
-                <a:spcPts val="1000"/>
-              </a:spcAft>
-              <a:defRPr sz="1800" b="1">
-                <a:solidFill>
-                  <a:srgbClr val="1E2220"/>
-                </a:solidFill>
-              </a:defRPr>
-            </a:pPr>
-            <a:r>
-              <a:t>•  Gave the 'Rest of Europe' side its own real storage (battery-style + reservoir hydro), the same way Germany already has</a:t>
-            </a:r>
-          </a:p>
-          <a:p>
-            <a:pPr>
-              <a:spcAft>
-                <a:spcPts val="1000"/>
-              </a:spcAft>
-              <a:defRPr sz="1800" b="1">
-                <a:solidFill>
-                  <a:srgbClr val="1E2220"/>
-                </a:solidFill>
-              </a:defRPr>
-            </a:pPr>
-            <a:r>
-              <a:t>•  Gave it real subsidy treatment too, instead of a placeholder zero</a:t>
-            </a:r>
-          </a:p>
-          <a:p>
-            <a:pPr>
-              <a:spcAft>
-                <a:spcPts val="1000"/>
-              </a:spcAft>
-              <a:defRPr sz="1800" b="1">
-                <a:solidFill>
-                  <a:srgbClr val="1E2220"/>
-                </a:solidFill>
-              </a:defRPr>
-            </a:pPr>
-            <a:r>
-              <a:t>•  Checked directly that the new storage is actually doing real work, not just sitting there unused - confirmed it is</a:t>
-            </a:r>
-          </a:p>
-          <a:p>
-            <a:pPr>
-              <a:spcAft>
-                <a:spcPts val="1000"/>
-              </a:spcAft>
-              <a:defRPr sz="1800" b="1">
-                <a:solidFill>
-                  <a:srgbClr val="1E2220"/>
-                </a:solidFill>
-              </a:defRPr>
-            </a:pPr>
-            <a:r>
-              <a:t>•  Match quality also stayed strong - a genuine, all-round best result</a:t>
-            </a:r>
-          </a:p>
-        </p:txBody>
-      </p:sp>
-    </p:spTree>
-  </p:cSld>
-  <p:clrMapOvr>
-    <a:masterClrMapping/>
-  </p:clrMapOvr>
-</p:sld>
-</file>
-
-<file path=ppt/slides/slide42.xml><?xml version="1.0" encoding="utf-8"?>
-<p:sld xmlns:a="http://schemas.openxmlformats.org/drawingml/2006/main" xmlns:p="http://schemas.openxmlformats.org/presentationml/2006/main" xmlns:r="http://schemas.openxmlformats.org/officeDocument/2006/relationships">
-  <p:cSld>
-    <p:spTree>
-      <p:nvGrpSpPr>
-        <p:cNvPr id="1" name=""/>
-        <p:cNvGrpSpPr/>
-        <p:nvPr/>
-      </p:nvGrpSpPr>
-      <p:grpSpPr/>
-      <p:sp>
-        <p:nvSpPr>
-          <p:cNvPr id="2" name="Rectangle 1"/>
-          <p:cNvSpPr/>
-          <p:nvPr/>
-        </p:nvSpPr>
-        <p:spPr>
-          <a:xfrm>
-            <a:off x="0" y="0"/>
-            <a:ext cx="12192000" cy="960120"/>
-          </a:xfrm>
-          <a:prstGeom prst="rect">
-            <a:avLst/>
-          </a:prstGeom>
-          <a:solidFill>
-            <a:srgbClr val="1F3A4D"/>
-          </a:solidFill>
-          <a:ln>
-            <a:noFill/>
-          </a:ln>
-        </p:spPr>
-        <p:style>
-          <a:lnRef idx="1">
-            <a:schemeClr val="accent1"/>
-          </a:lnRef>
-          <a:fillRef idx="3">
-            <a:schemeClr val="accent1"/>
-          </a:fillRef>
-          <a:effectRef idx="2">
-            <a:schemeClr val="accent1"/>
-          </a:effectRef>
-          <a:fontRef idx="minor">
-            <a:schemeClr val="lt1"/>
-          </a:fontRef>
-        </p:style>
-        <p:txBody>
-          <a:bodyPr rtlCol="0" anchor="ctr" lIns="365760" tIns="73152" wrap="square"/>
-          <a:lstStyle/>
-          <a:p>
-            <a:pPr algn="ctr">
-              <a:defRPr sz="2600" b="1">
-                <a:solidFill>
-                  <a:srgbClr val="FFFFFF"/>
-                </a:solidFill>
-              </a:defRPr>
-            </a:pPr>
-            <a:r>
-              <a:t>Does It Hold Up in Other Years? Testing 2028 and 2029</a:t>
-            </a:r>
-          </a:p>
-          <a:p>
-            <a:pPr>
-              <a:defRPr sz="1400">
-                <a:solidFill>
-                  <a:srgbClr val="C8D2DA"/>
-                </a:solidFill>
-              </a:defRPr>
-            </a:pPr>
-            <a:r>
-              <a:t>The same build, tested on years we never tuned it for</a:t>
-            </a:r>
-          </a:p>
-        </p:txBody>
-      </p:sp>
-      <p:sp>
-        <p:nvSpPr>
-          <p:cNvPr id="3" name="TextBox 2"/>
-          <p:cNvSpPr txBox="1"/>
-          <p:nvPr/>
-        </p:nvSpPr>
-        <p:spPr>
-          <a:xfrm>
-            <a:off x="11551920" y="6446520"/>
-            <a:ext cx="457200" cy="320040"/>
-          </a:xfrm>
-          <a:prstGeom prst="rect">
-            <a:avLst/>
-          </a:prstGeom>
-          <a:noFill/>
-        </p:spPr>
-        <p:txBody>
-          <a:bodyPr wrap="none">
-            <a:spAutoFit/>
-          </a:bodyPr>
-          <a:lstStyle/>
-          <a:p>
-            <a:pPr>
-              <a:defRPr sz="1100">
-                <a:solidFill>
-                  <a:srgbClr val="5A605C"/>
-                </a:solidFill>
-              </a:defRPr>
-            </a:pPr>
-            <a:r>
-              <a:t>38</a:t>
+              <a:t>46</a:t>
             </a:r>
           </a:p>
         </p:txBody>
@@ -12169,7 +14711,7 @@
         </p:nvGraphicFramePr>
         <p:xfrm>
           <a:off x="640080" y="1371600"/>
-          <a:ext cx="11338560" cy="2011680"/>
+          <a:ext cx="14173200" cy="2011680"/>
         </p:xfrm>
         <a:graphic>
           <a:graphicData uri="http://schemas.openxmlformats.org/drawingml/2006/table">
@@ -12178,7 +14720,8 @@
                 <a:tableStyleId>{5C22544A-7EE6-4342-B048-85BDC9FD1C3A}</a:tableStyleId>
               </a:tblPr>
               <a:tblGrid>
-                <a:gridCol w="4937760"/>
+                <a:gridCol w="4572000"/>
+                <a:gridCol w="3200400"/>
                 <a:gridCol w="3200400"/>
                 <a:gridCol w="3200400"/>
               </a:tblGrid>
@@ -12216,7 +14759,7 @@
                         </a:defRPr>
                       </a:pPr>
                       <a:r>
-                        <a:t>2028</a:t>
+                        <a:t>Combined zone (best)</a:t>
                       </a:r>
                     </a:p>
                   </a:txBody>
@@ -12239,7 +14782,30 @@
                         </a:defRPr>
                       </a:pPr>
                       <a:r>
-                        <a:t>2029</a:t>
+                        <a:t>France alone</a:t>
+                      </a:r>
+                    </a:p>
+                  </a:txBody>
+                  <a:tcPr>
+                    <a:solidFill>
+                      <a:srgbClr val="1F3A4D"/>
+                    </a:solidFill>
+                  </a:tcPr>
+                </a:tc>
+                <a:tc>
+                  <a:txBody>
+                    <a:bodyPr/>
+                    <a:lstStyle/>
+                    <a:p>
+                      <a:pPr algn="ctr">
+                        <a:defRPr b="1" sz="1300">
+                          <a:solidFill>
+                            <a:srgbClr val="FFFFFF"/>
+                          </a:solidFill>
+                        </a:defRPr>
+                      </a:pPr>
+                      <a:r>
+                        <a:t>All 10 countries</a:t>
                       </a:r>
                     </a:p>
                   </a:txBody>
@@ -12264,7 +14830,7 @@
                         </a:defRPr>
                       </a:pPr>
                       <a:r>
-                        <a:t>Match quality: before</a:t>
+                        <a:t>'Ran out of power' hours</a:t>
                       </a:r>
                     </a:p>
                   </a:txBody>
@@ -12287,7 +14853,7 @@
                         </a:defRPr>
                       </a:pPr>
                       <a:r>
-                        <a:t>0.446</a:t>
+                        <a:t>7</a:t>
                       </a:r>
                     </a:p>
                   </a:txBody>
@@ -12310,7 +14876,30 @@
                         </a:defRPr>
                       </a:pPr>
                       <a:r>
-                        <a:t>0.446</a:t>
+                        <a:t>167</a:t>
+                      </a:r>
+                    </a:p>
+                  </a:txBody>
+                  <a:tcPr>
+                    <a:solidFill>
+                      <a:srgbClr val="FFFFFF"/>
+                    </a:solidFill>
+                  </a:tcPr>
+                </a:tc>
+                <a:tc>
+                  <a:txBody>
+                    <a:bodyPr/>
+                    <a:lstStyle/>
+                    <a:p>
+                      <a:pPr algn="ctr">
+                        <a:defRPr sz="1200" b="0">
+                          <a:solidFill>
+                            <a:srgbClr val="1E2220"/>
+                          </a:solidFill>
+                        </a:defRPr>
+                      </a:pPr>
+                      <a:r>
+                        <a:t>120</a:t>
                       </a:r>
                     </a:p>
                   </a:txBody>
@@ -12335,7 +14924,7 @@
                         </a:defRPr>
                       </a:pPr>
                       <a:r>
-                        <a:t>Match quality: with two-way trading</a:t>
+                        <a:t>Average price gap, ordinary days</a:t>
                       </a:r>
                     </a:p>
                   </a:txBody>
@@ -12358,7 +14947,7 @@
                         </a:defRPr>
                       </a:pPr>
                       <a:r>
-                        <a:t>0.718</a:t>
+                        <a:t>-2.90</a:t>
                       </a:r>
                     </a:p>
                   </a:txBody>
@@ -12381,7 +14970,30 @@
                         </a:defRPr>
                       </a:pPr>
                       <a:r>
-                        <a:t>0.752</a:t>
+                        <a:t>+9.65</a:t>
+                      </a:r>
+                    </a:p>
+                  </a:txBody>
+                  <a:tcPr>
+                    <a:solidFill>
+                      <a:srgbClr val="EEF0E9"/>
+                    </a:solidFill>
+                  </a:tcPr>
+                </a:tc>
+                <a:tc>
+                  <a:txBody>
+                    <a:bodyPr/>
+                    <a:lstStyle/>
+                    <a:p>
+                      <a:pPr algn="ctr">
+                        <a:defRPr sz="1200" b="0">
+                          <a:solidFill>
+                            <a:srgbClr val="1E2220"/>
+                          </a:solidFill>
+                        </a:defRPr>
+                      </a:pPr>
+                      <a:r>
+                        <a:t>+4.87</a:t>
                       </a:r>
                     </a:p>
                   </a:txBody>
@@ -12406,749 +15018,7 @@
                         </a:defRPr>
                       </a:pPr>
                       <a:r>
-                        <a:t>Average price gap: with two-way trading</a:t>
-                      </a:r>
-                    </a:p>
-                  </a:txBody>
-                  <a:tcPr>
-                    <a:solidFill>
-                      <a:srgbClr val="FFFFFF"/>
-                    </a:solidFill>
-                  </a:tcPr>
-                </a:tc>
-                <a:tc>
-                  <a:txBody>
-                    <a:bodyPr/>
-                    <a:lstStyle/>
-                    <a:p>
-                      <a:pPr algn="ctr">
-                        <a:defRPr sz="1200" b="0">
-                          <a:solidFill>
-                            <a:srgbClr val="1E2220"/>
-                          </a:solidFill>
-                        </a:defRPr>
-                      </a:pPr>
-                      <a:r>
-                        <a:t>+6.19</a:t>
-                      </a:r>
-                    </a:p>
-                  </a:txBody>
-                  <a:tcPr>
-                    <a:solidFill>
-                      <a:srgbClr val="FFFFFF"/>
-                    </a:solidFill>
-                  </a:tcPr>
-                </a:tc>
-                <a:tc>
-                  <a:txBody>
-                    <a:bodyPr/>
-                    <a:lstStyle/>
-                    <a:p>
-                      <a:pPr algn="ctr">
-                        <a:defRPr sz="1200" b="0">
-                          <a:solidFill>
-                            <a:srgbClr val="1E2220"/>
-                          </a:solidFill>
-                        </a:defRPr>
-                      </a:pPr>
-                      <a:r>
-                        <a:t>+26.85</a:t>
-                      </a:r>
-                    </a:p>
-                  </a:txBody>
-                  <a:tcPr>
-                    <a:solidFill>
-                      <a:srgbClr val="FFFFFF"/>
-                    </a:solidFill>
-                  </a:tcPr>
-                </a:tc>
-              </a:tr>
-            </a:tbl>
-          </a:graphicData>
-        </a:graphic>
-      </p:graphicFrame>
-      <p:sp>
-        <p:nvSpPr>
-          <p:cNvPr id="5" name="TextBox 4"/>
-          <p:cNvSpPr txBox="1"/>
-          <p:nvPr/>
-        </p:nvSpPr>
-        <p:spPr>
-          <a:xfrm>
-            <a:off x="640080" y="3566160"/>
-            <a:ext cx="10881360" cy="1097280"/>
-          </a:xfrm>
-          <a:prstGeom prst="rect">
-            <a:avLst/>
-          </a:prstGeom>
-          <a:noFill/>
-        </p:spPr>
-        <p:txBody>
-          <a:bodyPr wrap="none">
-            <a:spAutoFit/>
-          </a:bodyPr>
-          <a:lstStyle/>
-          <a:p>
-            <a:pPr>
-              <a:defRPr sz="1300" i="1">
-                <a:solidFill>
-                  <a:srgbClr val="5A605C"/>
-                </a:solidFill>
-              </a:defRPr>
-            </a:pPr>
-            <a:r>
-              <a:t>Match quality improved strongly in both years, confirming it isn't a one-year fluke. But the average price gap looked concerning for 2029 - investigated further on the next slide.</a:t>
-            </a:r>
-          </a:p>
-        </p:txBody>
-      </p:sp>
-    </p:spTree>
-  </p:cSld>
-  <p:clrMapOvr>
-    <a:masterClrMapping/>
-  </p:clrMapOvr>
-</p:sld>
-</file>
-
-<file path=ppt/slides/slide43.xml><?xml version="1.0" encoding="utf-8"?>
-<p:sld xmlns:a="http://schemas.openxmlformats.org/drawingml/2006/main" xmlns:p="http://schemas.openxmlformats.org/presentationml/2006/main" xmlns:r="http://schemas.openxmlformats.org/officeDocument/2006/relationships">
-  <p:cSld>
-    <p:spTree>
-      <p:nvGrpSpPr>
-        <p:cNvPr id="1" name=""/>
-        <p:cNvGrpSpPr/>
-        <p:nvPr/>
-      </p:nvGrpSpPr>
-      <p:grpSpPr/>
-      <p:sp>
-        <p:nvSpPr>
-          <p:cNvPr id="2" name="Rectangle 1"/>
-          <p:cNvSpPr/>
-          <p:nvPr/>
-        </p:nvSpPr>
-        <p:spPr>
-          <a:xfrm>
-            <a:off x="0" y="0"/>
-            <a:ext cx="12192000" cy="960120"/>
-          </a:xfrm>
-          <a:prstGeom prst="rect">
-            <a:avLst/>
-          </a:prstGeom>
-          <a:solidFill>
-            <a:srgbClr val="1F3A4D"/>
-          </a:solidFill>
-          <a:ln>
-            <a:noFill/>
-          </a:ln>
-        </p:spPr>
-        <p:style>
-          <a:lnRef idx="1">
-            <a:schemeClr val="accent1"/>
-          </a:lnRef>
-          <a:fillRef idx="3">
-            <a:schemeClr val="accent1"/>
-          </a:fillRef>
-          <a:effectRef idx="2">
-            <a:schemeClr val="accent1"/>
-          </a:effectRef>
-          <a:fontRef idx="minor">
-            <a:schemeClr val="lt1"/>
-          </a:fontRef>
-        </p:style>
-        <p:txBody>
-          <a:bodyPr rtlCol="0" anchor="ctr" lIns="365760" tIns="73152" wrap="square"/>
-          <a:lstStyle/>
-          <a:p>
-            <a:pPr algn="ctr">
-              <a:defRPr sz="2600" b="1">
-                <a:solidFill>
-                  <a:srgbClr val="FFFFFF"/>
-                </a:solidFill>
-              </a:defRPr>
-            </a:pPr>
-            <a:r>
-              <a:t>The Real Story: Excellent on Ordinary Days</a:t>
-            </a:r>
-          </a:p>
-          <a:p>
-            <a:pPr>
-              <a:defRPr sz="1400">
-                <a:solidFill>
-                  <a:srgbClr val="C8D2DA"/>
-                </a:solidFill>
-              </a:defRPr>
-            </a:pPr>
-            <a:r>
-              <a:t>A follow-up question corrected a misleading headline number</a:t>
-            </a:r>
-          </a:p>
-        </p:txBody>
-      </p:sp>
-      <p:sp>
-        <p:nvSpPr>
-          <p:cNvPr id="3" name="TextBox 2"/>
-          <p:cNvSpPr txBox="1"/>
-          <p:nvPr/>
-        </p:nvSpPr>
-        <p:spPr>
-          <a:xfrm>
-            <a:off x="11551920" y="6446520"/>
-            <a:ext cx="457200" cy="320040"/>
-          </a:xfrm>
-          <a:prstGeom prst="rect">
-            <a:avLst/>
-          </a:prstGeom>
-          <a:noFill/>
-        </p:spPr>
-        <p:txBody>
-          <a:bodyPr wrap="none">
-            <a:spAutoFit/>
-          </a:bodyPr>
-          <a:lstStyle/>
-          <a:p>
-            <a:pPr>
-              <a:defRPr sz="1100">
-                <a:solidFill>
-                  <a:srgbClr val="5A605C"/>
-                </a:solidFill>
-              </a:defRPr>
-            </a:pPr>
-            <a:r>
-              <a:t>39</a:t>
-            </a:r>
-          </a:p>
-        </p:txBody>
-      </p:sp>
-      <p:sp>
-        <p:nvSpPr>
-          <p:cNvPr id="4" name="TextBox 3"/>
-          <p:cNvSpPr txBox="1"/>
-          <p:nvPr/>
-        </p:nvSpPr>
-        <p:spPr>
-          <a:xfrm>
-            <a:off x="502920" y="1234440"/>
-            <a:ext cx="11155680" cy="5303520"/>
-          </a:xfrm>
-          <a:prstGeom prst="rect">
-            <a:avLst/>
-          </a:prstGeom>
-          <a:noFill/>
-        </p:spPr>
-        <p:txBody>
-          <a:bodyPr wrap="square">
-            <a:spAutoFit/>
-          </a:bodyPr>
-          <a:lstStyle/>
-          <a:p>
-            <a:pPr>
-              <a:spcAft>
-                <a:spcPts val="1000"/>
-              </a:spcAft>
-              <a:defRPr sz="1800" b="1">
-                <a:solidFill>
-                  <a:srgbClr val="1E2220"/>
-                </a:solidFill>
-              </a:defRPr>
-            </a:pPr>
-            <a:r>
-              <a:t>•  That '+26.85' number looked like a real step backwards - checked it properly rather than taking it at face value</a:t>
-            </a:r>
-          </a:p>
-          <a:p>
-            <a:pPr>
-              <a:spcAft>
-                <a:spcPts val="1000"/>
-              </a:spcAft>
-              <a:defRPr sz="1800" b="1">
-                <a:solidFill>
-                  <a:srgbClr val="1E2220"/>
-                </a:solidFill>
-              </a:defRPr>
-            </a:pPr>
-            <a:r>
-              <a:t>•  Found: 88% of that gap comes from just a handful of extreme 'ran out of power' hours</a:t>
-            </a:r>
-          </a:p>
-          <a:p>
-            <a:pPr>
-              <a:spcAft>
-                <a:spcPts val="1000"/>
-              </a:spcAft>
-              <a:defRPr sz="1800" b="1">
-                <a:solidFill>
-                  <a:srgbClr val="1E2220"/>
-                </a:solidFill>
-              </a:defRPr>
-            </a:pPr>
-            <a:r>
-              <a:t>•  On ordinary days (99%+ of the year), all three years - 2027, 2028, 2029 - are excellent and remarkably consistent</a:t>
-            </a:r>
-          </a:p>
-          <a:p>
-            <a:pPr>
-              <a:spcAft>
-                <a:spcPts val="1000"/>
-              </a:spcAft>
-              <a:defRPr sz="1800" b="1">
-                <a:solidFill>
-                  <a:srgbClr val="1E2220"/>
-                </a:solidFill>
-              </a:defRPr>
-            </a:pPr>
-            <a:r>
-              <a:t>•  The real, narrower issue: those extreme hours are becoming more frequent the further we get from our home year (2027)</a:t>
-            </a:r>
-          </a:p>
-        </p:txBody>
-      </p:sp>
-    </p:spTree>
-  </p:cSld>
-  <p:clrMapOvr>
-    <a:masterClrMapping/>
-  </p:clrMapOvr>
-</p:sld>
-</file>
-
-<file path=ppt/slides/slide44.xml><?xml version="1.0" encoding="utf-8"?>
-<p:sld xmlns:a="http://schemas.openxmlformats.org/drawingml/2006/main" xmlns:p="http://schemas.openxmlformats.org/presentationml/2006/main" xmlns:r="http://schemas.openxmlformats.org/officeDocument/2006/relationships">
-  <p:cSld>
-    <p:spTree>
-      <p:nvGrpSpPr>
-        <p:cNvPr id="1" name=""/>
-        <p:cNvGrpSpPr/>
-        <p:nvPr/>
-      </p:nvGrpSpPr>
-      <p:grpSpPr/>
-      <p:sp>
-        <p:nvSpPr>
-          <p:cNvPr id="2" name="Rectangle 1"/>
-          <p:cNvSpPr/>
-          <p:nvPr/>
-        </p:nvSpPr>
-        <p:spPr>
-          <a:xfrm>
-            <a:off x="0" y="0"/>
-            <a:ext cx="12192000" cy="960120"/>
-          </a:xfrm>
-          <a:prstGeom prst="rect">
-            <a:avLst/>
-          </a:prstGeom>
-          <a:solidFill>
-            <a:srgbClr val="1F3A4D"/>
-          </a:solidFill>
-          <a:ln>
-            <a:noFill/>
-          </a:ln>
-        </p:spPr>
-        <p:style>
-          <a:lnRef idx="1">
-            <a:schemeClr val="accent1"/>
-          </a:lnRef>
-          <a:fillRef idx="3">
-            <a:schemeClr val="accent1"/>
-          </a:fillRef>
-          <a:effectRef idx="2">
-            <a:schemeClr val="accent1"/>
-          </a:effectRef>
-          <a:fontRef idx="minor">
-            <a:schemeClr val="lt1"/>
-          </a:fontRef>
-        </p:style>
-        <p:txBody>
-          <a:bodyPr rtlCol="0" anchor="ctr" lIns="365760" tIns="73152" wrap="square"/>
-          <a:lstStyle/>
-          <a:p>
-            <a:pPr algn="ctr">
-              <a:defRPr sz="2600" b="1">
-                <a:solidFill>
-                  <a:srgbClr val="FFFFFF"/>
-                </a:solidFill>
-              </a:defRPr>
-            </a:pPr>
-            <a:r>
-              <a:t>Chasing That Gap: Two Honest Dead Ends</a:t>
-            </a:r>
-          </a:p>
-          <a:p>
-            <a:pPr>
-              <a:defRPr sz="1400">
-                <a:solidFill>
-                  <a:srgbClr val="C8D2DA"/>
-                </a:solidFill>
-              </a:defRPr>
-            </a:pPr>
-            <a:r>
-              <a:t>Two well-reasoned ideas, tested properly, both honestly ruled out</a:t>
-            </a:r>
-          </a:p>
-        </p:txBody>
-      </p:sp>
-      <p:sp>
-        <p:nvSpPr>
-          <p:cNvPr id="3" name="TextBox 2"/>
-          <p:cNvSpPr txBox="1"/>
-          <p:nvPr/>
-        </p:nvSpPr>
-        <p:spPr>
-          <a:xfrm>
-            <a:off x="11551920" y="6446520"/>
-            <a:ext cx="457200" cy="320040"/>
-          </a:xfrm>
-          <a:prstGeom prst="rect">
-            <a:avLst/>
-          </a:prstGeom>
-          <a:noFill/>
-        </p:spPr>
-        <p:txBody>
-          <a:bodyPr wrap="none">
-            <a:spAutoFit/>
-          </a:bodyPr>
-          <a:lstStyle/>
-          <a:p>
-            <a:pPr>
-              <a:defRPr sz="1100">
-                <a:solidFill>
-                  <a:srgbClr val="5A605C"/>
-                </a:solidFill>
-              </a:defRPr>
-            </a:pPr>
-            <a:r>
-              <a:t>40</a:t>
-            </a:r>
-          </a:p>
-        </p:txBody>
-      </p:sp>
-      <p:sp>
-        <p:nvSpPr>
-          <p:cNvPr id="4" name="TextBox 3"/>
-          <p:cNvSpPr txBox="1"/>
-          <p:nvPr/>
-        </p:nvSpPr>
-        <p:spPr>
-          <a:xfrm>
-            <a:off x="502920" y="1234440"/>
-            <a:ext cx="11155680" cy="5303520"/>
-          </a:xfrm>
-          <a:prstGeom prst="rect">
-            <a:avLst/>
-          </a:prstGeom>
-          <a:noFill/>
-        </p:spPr>
-        <p:txBody>
-          <a:bodyPr wrap="square">
-            <a:spAutoFit/>
-          </a:bodyPr>
-          <a:lstStyle/>
-          <a:p>
-            <a:pPr>
-              <a:spcAft>
-                <a:spcPts val="1000"/>
-              </a:spcAft>
-              <a:defRPr sz="1800" b="1">
-                <a:solidFill>
-                  <a:srgbClr val="1E2220"/>
-                </a:solidFill>
-              </a:defRPr>
-            </a:pPr>
-            <a:r>
-              <a:t>•  Idea 1: scale up the border capacity to keep pace with Germany's own growth - tested directly, did not fix it, made one year worse</a:t>
-            </a:r>
-          </a:p>
-          <a:p>
-            <a:pPr>
-              <a:spcAft>
-                <a:spcPts val="1000"/>
-              </a:spcAft>
-              <a:defRPr sz="1800" b="1">
-                <a:solidFill>
-                  <a:srgbClr val="1E2220"/>
-                </a:solidFill>
-              </a:defRPr>
-            </a:pPr>
-            <a:r>
-              <a:t>•  Idea 2: check a specific setting inside AMIRIS's own coupling engine - opened up the real program code and found that setting was already unlimited, not the cause</a:t>
-            </a:r>
-          </a:p>
-          <a:p>
-            <a:pPr>
-              <a:spcAft>
-                <a:spcPts val="1000"/>
-              </a:spcAft>
-              <a:defRPr sz="1800" b="1">
-                <a:solidFill>
-                  <a:srgbClr val="1E2220"/>
-                </a:solidFill>
-              </a:defRPr>
-            </a:pPr>
-            <a:r>
-              <a:t>•  Found one real, unexplained clue instead: Germany's import during these rare hours stays suspiciously flat no matter how much extra capacity is available</a:t>
-            </a:r>
-          </a:p>
-          <a:p>
-            <a:pPr>
-              <a:spcAft>
-                <a:spcPts val="1000"/>
-              </a:spcAft>
-              <a:defRPr sz="1800" b="1">
-                <a:solidFill>
-                  <a:srgbClr val="1E2220"/>
-                </a:solidFill>
-              </a:defRPr>
-            </a:pPr>
-            <a:r>
-              <a:t>•  Getting to the exact cause would need to edit and rebuild AMIRIS's own program - a bigger step, not yet taken</a:t>
-            </a:r>
-          </a:p>
-        </p:txBody>
-      </p:sp>
-    </p:spTree>
-  </p:cSld>
-  <p:clrMapOvr>
-    <a:masterClrMapping/>
-  </p:clrMapOvr>
-</p:sld>
-</file>
-
-<file path=ppt/slides/slide45.xml><?xml version="1.0" encoding="utf-8"?>
-<p:sld xmlns:a="http://schemas.openxmlformats.org/drawingml/2006/main" xmlns:p="http://schemas.openxmlformats.org/presentationml/2006/main" xmlns:r="http://schemas.openxmlformats.org/officeDocument/2006/relationships">
-  <p:cSld>
-    <p:spTree>
-      <p:nvGrpSpPr>
-        <p:cNvPr id="1" name=""/>
-        <p:cNvGrpSpPr/>
-        <p:nvPr/>
-      </p:nvGrpSpPr>
-      <p:grpSpPr/>
-      <p:sp>
-        <p:nvSpPr>
-          <p:cNvPr id="2" name="Rectangle 1"/>
-          <p:cNvSpPr/>
-          <p:nvPr/>
-        </p:nvSpPr>
-        <p:spPr>
-          <a:xfrm>
-            <a:off x="0" y="0"/>
-            <a:ext cx="12192000" cy="960120"/>
-          </a:xfrm>
-          <a:prstGeom prst="rect">
-            <a:avLst/>
-          </a:prstGeom>
-          <a:solidFill>
-            <a:srgbClr val="1F3A4D"/>
-          </a:solidFill>
-          <a:ln>
-            <a:noFill/>
-          </a:ln>
-        </p:spPr>
-        <p:style>
-          <a:lnRef idx="1">
-            <a:schemeClr val="accent1"/>
-          </a:lnRef>
-          <a:fillRef idx="3">
-            <a:schemeClr val="accent1"/>
-          </a:fillRef>
-          <a:effectRef idx="2">
-            <a:schemeClr val="accent1"/>
-          </a:effectRef>
-          <a:fontRef idx="minor">
-            <a:schemeClr val="lt1"/>
-          </a:fontRef>
-        </p:style>
-        <p:txBody>
-          <a:bodyPr rtlCol="0" anchor="ctr" lIns="365760" tIns="73152" wrap="square"/>
-          <a:lstStyle/>
-          <a:p>
-            <a:pPr algn="ctr">
-              <a:defRPr sz="2600" b="1">
-                <a:solidFill>
-                  <a:srgbClr val="FFFFFF"/>
-                </a:solidFill>
-              </a:defRPr>
-            </a:pPr>
-            <a:r>
-              <a:t>Where This Leaves Us</a:t>
-            </a:r>
-          </a:p>
-          <a:p>
-            <a:pPr>
-              <a:defRPr sz="1400">
-                <a:solidFill>
-                  <a:srgbClr val="C8D2DA"/>
-                </a:solidFill>
-              </a:defRPr>
-            </a:pPr>
-            <a:r>
-              <a:t>The real, current state of the two-way trading model across all three years</a:t>
-            </a:r>
-          </a:p>
-        </p:txBody>
-      </p:sp>
-      <p:sp>
-        <p:nvSpPr>
-          <p:cNvPr id="3" name="TextBox 2"/>
-          <p:cNvSpPr txBox="1"/>
-          <p:nvPr/>
-        </p:nvSpPr>
-        <p:spPr>
-          <a:xfrm>
-            <a:off x="11551920" y="6446520"/>
-            <a:ext cx="457200" cy="320040"/>
-          </a:xfrm>
-          <a:prstGeom prst="rect">
-            <a:avLst/>
-          </a:prstGeom>
-          <a:noFill/>
-        </p:spPr>
-        <p:txBody>
-          <a:bodyPr wrap="none">
-            <a:spAutoFit/>
-          </a:bodyPr>
-          <a:lstStyle/>
-          <a:p>
-            <a:pPr>
-              <a:defRPr sz="1100">
-                <a:solidFill>
-                  <a:srgbClr val="5A605C"/>
-                </a:solidFill>
-              </a:defRPr>
-            </a:pPr>
-            <a:r>
-              <a:t>41</a:t>
-            </a:r>
-          </a:p>
-        </p:txBody>
-      </p:sp>
-      <p:graphicFrame>
-        <p:nvGraphicFramePr>
-          <p:cNvPr id="4" name="Table 3"/>
-          <p:cNvGraphicFramePr>
-            <a:graphicFrameLocks noGrp="1"/>
-          </p:cNvGraphicFramePr>
-          <p:nvPr/>
-        </p:nvGraphicFramePr>
-        <p:xfrm>
-          <a:off x="640080" y="1371600"/>
-          <a:ext cx="13167360" cy="2011680"/>
-        </p:xfrm>
-        <a:graphic>
-          <a:graphicData uri="http://schemas.openxmlformats.org/drawingml/2006/table">
-            <a:tbl>
-              <a:tblPr firstRow="1" bandRow="1">
-                <a:tableStyleId>{5C22544A-7EE6-4342-B048-85BDC9FD1C3A}</a:tableStyleId>
-              </a:tblPr>
-              <a:tblGrid>
-                <a:gridCol w="4937760"/>
-                <a:gridCol w="2743200"/>
-                <a:gridCol w="2743200"/>
-                <a:gridCol w="2743200"/>
-              </a:tblGrid>
-              <a:tr h="502920">
-                <a:tc>
-                  <a:txBody>
-                    <a:bodyPr/>
-                    <a:lstStyle/>
-                    <a:p>
-                      <a:pPr algn="ctr">
-                        <a:defRPr b="1" sz="1300">
-                          <a:solidFill>
-                            <a:srgbClr val="FFFFFF"/>
-                          </a:solidFill>
-                        </a:defRPr>
-                      </a:pPr>
-                    </a:p>
-                  </a:txBody>
-                  <a:tcPr>
-                    <a:solidFill>
-                      <a:srgbClr val="1F3A4D"/>
-                    </a:solidFill>
-                  </a:tcPr>
-                </a:tc>
-                <a:tc>
-                  <a:txBody>
-                    <a:bodyPr/>
-                    <a:lstStyle/>
-                    <a:p>
-                      <a:pPr algn="ctr">
-                        <a:defRPr b="1" sz="1300">
-                          <a:solidFill>
-                            <a:srgbClr val="FFFFFF"/>
-                          </a:solidFill>
-                        </a:defRPr>
-                      </a:pPr>
-                      <a:r>
-                        <a:t>2027</a:t>
-                      </a:r>
-                    </a:p>
-                  </a:txBody>
-                  <a:tcPr>
-                    <a:solidFill>
-                      <a:srgbClr val="1F3A4D"/>
-                    </a:solidFill>
-                  </a:tcPr>
-                </a:tc>
-                <a:tc>
-                  <a:txBody>
-                    <a:bodyPr/>
-                    <a:lstStyle/>
-                    <a:p>
-                      <a:pPr algn="ctr">
-                        <a:defRPr b="1" sz="1300">
-                          <a:solidFill>
-                            <a:srgbClr val="FFFFFF"/>
-                          </a:solidFill>
-                        </a:defRPr>
-                      </a:pPr>
-                      <a:r>
-                        <a:t>2028</a:t>
-                      </a:r>
-                    </a:p>
-                  </a:txBody>
-                  <a:tcPr>
-                    <a:solidFill>
-                      <a:srgbClr val="1F3A4D"/>
-                    </a:solidFill>
-                  </a:tcPr>
-                </a:tc>
-                <a:tc>
-                  <a:txBody>
-                    <a:bodyPr/>
-                    <a:lstStyle/>
-                    <a:p>
-                      <a:pPr algn="ctr">
-                        <a:defRPr b="1" sz="1300">
-                          <a:solidFill>
-                            <a:srgbClr val="FFFFFF"/>
-                          </a:solidFill>
-                        </a:defRPr>
-                      </a:pPr>
-                      <a:r>
-                        <a:t>2029</a:t>
-                      </a:r>
-                    </a:p>
-                  </a:txBody>
-                  <a:tcPr>
-                    <a:solidFill>
-                      <a:srgbClr val="1F3A4D"/>
-                    </a:solidFill>
-                  </a:tcPr>
-                </a:tc>
-              </a:tr>
-              <a:tr h="502920">
-                <a:tc>
-                  <a:txBody>
-                    <a:bodyPr/>
-                    <a:lstStyle/>
-                    <a:p>
-                      <a:pPr algn="ctr">
-                        <a:defRPr sz="1200" b="1">
-                          <a:solidFill>
-                            <a:srgbClr val="1E2220"/>
-                          </a:solidFill>
-                        </a:defRPr>
-                      </a:pPr>
-                      <a:r>
-                        <a:t>Match quality (with two-way trading)</a:t>
+                        <a:t>Match quality (trustworthiness)</a:t>
                       </a:r>
                     </a:p>
                   </a:txBody>
@@ -13194,7 +15064,7 @@
                         </a:defRPr>
                       </a:pPr>
                       <a:r>
-                        <a:t>0.718</a:t>
+                        <a:t>0.716</a:t>
                       </a:r>
                     </a:p>
                   </a:txBody>
@@ -13217,195 +15087,7 @@
                         </a:defRPr>
                       </a:pPr>
                       <a:r>
-                        <a:t>0.752</a:t>
-                      </a:r>
-                    </a:p>
-                  </a:txBody>
-                  <a:tcPr>
-                    <a:solidFill>
-                      <a:srgbClr val="FFFFFF"/>
-                    </a:solidFill>
-                  </a:tcPr>
-                </a:tc>
-              </a:tr>
-              <a:tr h="502920">
-                <a:tc>
-                  <a:txBody>
-                    <a:bodyPr/>
-                    <a:lstStyle/>
-                    <a:p>
-                      <a:pPr algn="ctr">
-                        <a:defRPr sz="1200" b="1">
-                          <a:solidFill>
-                            <a:srgbClr val="1E2220"/>
-                          </a:solidFill>
-                        </a:defRPr>
-                      </a:pPr>
-                      <a:r>
-                        <a:t>Average price gap, ordinary days only</a:t>
-                      </a:r>
-                    </a:p>
-                  </a:txBody>
-                  <a:tcPr>
-                    <a:solidFill>
-                      <a:srgbClr val="EEF0E9"/>
-                    </a:solidFill>
-                  </a:tcPr>
-                </a:tc>
-                <a:tc>
-                  <a:txBody>
-                    <a:bodyPr/>
-                    <a:lstStyle/>
-                    <a:p>
-                      <a:pPr algn="ctr">
-                        <a:defRPr sz="1200" b="0">
-                          <a:solidFill>
-                            <a:srgbClr val="1E2220"/>
-                          </a:solidFill>
-                        </a:defRPr>
-                      </a:pPr>
-                      <a:r>
-                        <a:t>-0.59</a:t>
-                      </a:r>
-                    </a:p>
-                  </a:txBody>
-                  <a:tcPr>
-                    <a:solidFill>
-                      <a:srgbClr val="EEF0E9"/>
-                    </a:solidFill>
-                  </a:tcPr>
-                </a:tc>
-                <a:tc>
-                  <a:txBody>
-                    <a:bodyPr/>
-                    <a:lstStyle/>
-                    <a:p>
-                      <a:pPr algn="ctr">
-                        <a:defRPr sz="1200" b="0">
-                          <a:solidFill>
-                            <a:srgbClr val="1E2220"/>
-                          </a:solidFill>
-                        </a:defRPr>
-                      </a:pPr>
-                      <a:r>
-                        <a:t>+1.08</a:t>
-                      </a:r>
-                    </a:p>
-                  </a:txBody>
-                  <a:tcPr>
-                    <a:solidFill>
-                      <a:srgbClr val="EEF0E9"/>
-                    </a:solidFill>
-                  </a:tcPr>
-                </a:tc>
-                <a:tc>
-                  <a:txBody>
-                    <a:bodyPr/>
-                    <a:lstStyle/>
-                    <a:p>
-                      <a:pPr algn="ctr">
-                        <a:defRPr sz="1200" b="0">
-                          <a:solidFill>
-                            <a:srgbClr val="1E2220"/>
-                          </a:solidFill>
-                        </a:defRPr>
-                      </a:pPr>
-                      <a:r>
-                        <a:t>+3.21</a:t>
-                      </a:r>
-                    </a:p>
-                  </a:txBody>
-                  <a:tcPr>
-                    <a:solidFill>
-                      <a:srgbClr val="EEF0E9"/>
-                    </a:solidFill>
-                  </a:tcPr>
-                </a:tc>
-              </a:tr>
-              <a:tr h="502920">
-                <a:tc>
-                  <a:txBody>
-                    <a:bodyPr/>
-                    <a:lstStyle/>
-                    <a:p>
-                      <a:pPr algn="ctr">
-                        <a:defRPr sz="1200" b="1">
-                          <a:solidFill>
-                            <a:srgbClr val="1E2220"/>
-                          </a:solidFill>
-                        </a:defRPr>
-                      </a:pPr>
-                      <a:r>
-                        <a:t>Rare extreme hours (target: near zero)</a:t>
-                      </a:r>
-                    </a:p>
-                  </a:txBody>
-                  <a:tcPr>
-                    <a:solidFill>
-                      <a:srgbClr val="FFFFFF"/>
-                    </a:solidFill>
-                  </a:tcPr>
-                </a:tc>
-                <a:tc>
-                  <a:txBody>
-                    <a:bodyPr/>
-                    <a:lstStyle/>
-                    <a:p>
-                      <a:pPr algn="ctr">
-                        <a:defRPr sz="1200" b="0">
-                          <a:solidFill>
-                            <a:srgbClr val="1E2220"/>
-                          </a:solidFill>
-                        </a:defRPr>
-                      </a:pPr>
-                      <a:r>
-                        <a:t>7</a:t>
-                      </a:r>
-                    </a:p>
-                  </a:txBody>
-                  <a:tcPr>
-                    <a:solidFill>
-                      <a:srgbClr val="FFFFFF"/>
-                    </a:solidFill>
-                  </a:tcPr>
-                </a:tc>
-                <a:tc>
-                  <a:txBody>
-                    <a:bodyPr/>
-                    <a:lstStyle/>
-                    <a:p>
-                      <a:pPr algn="ctr">
-                        <a:defRPr sz="1200" b="0">
-                          <a:solidFill>
-                            <a:srgbClr val="1E2220"/>
-                          </a:solidFill>
-                        </a:defRPr>
-                      </a:pPr>
-                      <a:r>
-                        <a:t>17</a:t>
-                      </a:r>
-                    </a:p>
-                  </a:txBody>
-                  <a:tcPr>
-                    <a:solidFill>
-                      <a:srgbClr val="FFFFFF"/>
-                    </a:solidFill>
-                  </a:tcPr>
-                </a:tc>
-                <a:tc>
-                  <a:txBody>
-                    <a:bodyPr/>
-                    <a:lstStyle/>
-                    <a:p>
-                      <a:pPr algn="ctr">
-                        <a:defRPr sz="1200" b="0">
-                          <a:solidFill>
-                            <a:srgbClr val="1E2220"/>
-                          </a:solidFill>
-                        </a:defRPr>
-                      </a:pPr>
-                      <a:r>
-                        <a:t>76</a:t>
+                        <a:t>0.731 (best yet)</a:t>
                       </a:r>
                     </a:p>
                   </a:txBody>
@@ -13450,157 +15132,7 @@
               </a:defRPr>
             </a:pPr>
             <a:r>
-              <a:t>Strong, consistent match quality and excellent ordinary-day accuracy across all three years - the core result stands. The one real, still-open gap is the rising frequency of extreme hours the further a year is from 2027.</a:t>
-            </a:r>
-          </a:p>
-        </p:txBody>
-      </p:sp>
-    </p:spTree>
-  </p:cSld>
-  <p:clrMapOvr>
-    <a:masterClrMapping/>
-  </p:clrMapOvr>
-</p:sld>
-</file>
-
-<file path=ppt/slides/slide5.xml><?xml version="1.0" encoding="utf-8"?>
-<p:sld xmlns:a="http://schemas.openxmlformats.org/drawingml/2006/main" xmlns:r="http://schemas.openxmlformats.org/officeDocument/2006/relationships" xmlns:p="http://schemas.openxmlformats.org/presentationml/2006/main">
-  <p:cSld>
-    <p:spTree>
-      <p:nvGrpSpPr>
-        <p:cNvPr id="1" name=""/>
-        <p:cNvGrpSpPr/>
-        <p:nvPr/>
-      </p:nvGrpSpPr>
-      <p:grpSpPr>
-        <a:xfrm>
-          <a:off x="0" y="0"/>
-          <a:ext cx="0" cy="0"/>
-          <a:chOff x="0" y="0"/>
-          <a:chExt cx="0" cy="0"/>
-        </a:xfrm>
-      </p:grpSpPr>
-      <p:sp>
-        <p:nvSpPr>
-          <p:cNvPr id="2" name="Rectangle 1"/>
-          <p:cNvSpPr/>
-          <p:nvPr/>
-        </p:nvSpPr>
-        <p:spPr>
-          <a:xfrm>
-            <a:off x="0" y="0"/>
-            <a:ext cx="12191695" cy="960120"/>
-          </a:xfrm>
-          <a:prstGeom prst="rect">
-            <a:avLst/>
-          </a:prstGeom>
-          <a:solidFill>
-            <a:srgbClr val="1F3A4D"/>
-          </a:solidFill>
-          <a:ln>
-            <a:noFill/>
-          </a:ln>
-        </p:spPr>
-        <p:style>
-          <a:lnRef idx="1">
-            <a:schemeClr val="accent1"/>
-          </a:lnRef>
-          <a:fillRef idx="3">
-            <a:schemeClr val="accent1"/>
-          </a:fillRef>
-          <a:effectRef idx="2">
-            <a:schemeClr val="accent1"/>
-          </a:effectRef>
-          <a:fontRef idx="minor">
-            <a:schemeClr val="lt1"/>
-          </a:fontRef>
-        </p:style>
-        <p:txBody>
-          <a:bodyPr wrap="square" lIns="365760" tIns="73152" rtlCol="0" anchor="ctr"/>
-          <a:lstStyle/>
-          <a:p>
-            <a:pPr algn="ctr">
-              <a:defRPr sz="2800" b="1">
-                <a:solidFill>
-                  <a:srgbClr val="FFFFFF"/>
-                </a:solidFill>
-              </a:defRPr>
-            </a:pPr>
-            <a:r>
-              <a:t>Task 1: Thesis Form</a:t>
-            </a:r>
-          </a:p>
-        </p:txBody>
-      </p:sp>
-      <p:sp>
-        <p:nvSpPr>
-          <p:cNvPr id="3" name="TextBox 2"/>
-          <p:cNvSpPr txBox="1"/>
-          <p:nvPr/>
-        </p:nvSpPr>
-        <p:spPr>
-          <a:xfrm>
-            <a:off x="11551615" y="6446520"/>
-            <a:ext cx="457200" cy="320040"/>
-          </a:xfrm>
-          <a:prstGeom prst="rect">
-            <a:avLst/>
-          </a:prstGeom>
-          <a:noFill/>
-        </p:spPr>
-        <p:txBody>
-          <a:bodyPr wrap="none">
-            <a:spAutoFit/>
-          </a:bodyPr>
-          <a:lstStyle/>
-          <a:p>
-            <a:pPr>
-              <a:defRPr sz="1100">
-                <a:solidFill>
-                  <a:srgbClr val="5A605C"/>
-                </a:solidFill>
-              </a:defRPr>
-            </a:pPr>
-            <a:r>
-              <a:t>5</a:t>
-            </a:r>
-          </a:p>
-        </p:txBody>
-      </p:sp>
-      <p:sp>
-        <p:nvSpPr>
-          <p:cNvPr id="4" name="TextBox 3"/>
-          <p:cNvSpPr txBox="1"/>
-          <p:nvPr/>
-        </p:nvSpPr>
-        <p:spPr>
-          <a:xfrm>
-            <a:off x="502920" y="1234440"/>
-            <a:ext cx="11155680" cy="5303520"/>
-          </a:xfrm>
-          <a:prstGeom prst="rect">
-            <a:avLst/>
-          </a:prstGeom>
-          <a:noFill/>
-        </p:spPr>
-        <p:txBody>
-          <a:bodyPr wrap="square">
-            <a:spAutoFit/>
-          </a:bodyPr>
-          <a:lstStyle/>
-          <a:p>
-            <a:pPr>
-              <a:spcAft>
-                <a:spcPts val="1000"/>
-              </a:spcAft>
-              <a:defRPr sz="1800" b="1">
-                <a:solidFill>
-                  <a:srgbClr val="1E2220"/>
-                </a:solidFill>
-              </a:defRPr>
-            </a:pPr>
-            <a:r>
-              <a:t>•  Administrative item - status to confirm at this meeting</a:t>
+              <a:t>Genuinely surprising: going all the way to 10 real countries actually did BETTER than splitting out just one - likely because Germany can now draw on many countries' cheap power at once, instead of being stuck behind one narrow link. But it still doesn't beat the original combined-zone approach on the two measures that matter most. Decision: keep the combined zone as our best, standing result.</a:t>
             </a:r>
           </a:p>
         </p:txBody>

--- a/Presentation/Progress_Report_AMIRIS_2026-08-27_UPDATED.pptx
+++ b/Presentation/Progress_Report_AMIRIS_2026-08-27_UPDATED.pptx
@@ -4023,7 +4023,7 @@
           <a:noFill/>
         </p:spPr>
         <p:txBody>
-          <a:bodyPr wrap="none">
+          <a:bodyPr wrap="square">
             <a:spAutoFit/>
           </a:bodyPr>
           <a:lstStyle/>
@@ -4603,7 +4603,7 @@
           <a:noFill/>
         </p:spPr>
         <p:txBody>
-          <a:bodyPr wrap="none">
+          <a:bodyPr wrap="square">
             <a:spAutoFit/>
           </a:bodyPr>
           <a:lstStyle/>
@@ -4774,7 +4774,7 @@
           <a:noFill/>
         </p:spPr>
         <p:txBody>
-          <a:bodyPr wrap="none">
+          <a:bodyPr wrap="square">
             <a:spAutoFit/>
           </a:bodyPr>
           <a:lstStyle/>
@@ -5600,7 +5600,7 @@
           <a:noFill/>
         </p:spPr>
         <p:txBody>
-          <a:bodyPr wrap="none">
+          <a:bodyPr wrap="square">
             <a:spAutoFit/>
           </a:bodyPr>
           <a:lstStyle/>
@@ -6952,7 +6952,7 @@
           <a:noFill/>
         </p:spPr>
         <p:txBody>
-          <a:bodyPr wrap="none">
+          <a:bodyPr wrap="square">
             <a:spAutoFit/>
           </a:bodyPr>
           <a:lstStyle/>
@@ -7097,7 +7097,7 @@
         </p:nvGraphicFramePr>
         <p:xfrm>
           <a:off x="640080" y="1371600"/>
-          <a:ext cx="12984480" cy="2514600"/>
+          <a:ext cx="10881357" cy="2514600"/>
         </p:xfrm>
         <a:graphic>
           <a:graphicData uri="http://schemas.openxmlformats.org/drawingml/2006/table">
@@ -7106,10 +7106,10 @@
                 <a:tableStyleId>{5C22544A-7EE6-4342-B048-85BDC9FD1C3A}</a:tableStyleId>
               </a:tblPr>
               <a:tblGrid>
-                <a:gridCol w="4754880"/>
-                <a:gridCol w="2743200"/>
-                <a:gridCol w="2743200"/>
-                <a:gridCol w="2743200"/>
+                <a:gridCol w="3984723"/>
+                <a:gridCol w="2298878"/>
+                <a:gridCol w="2298878"/>
+                <a:gridCol w="2298878"/>
               </a:tblGrid>
               <a:tr h="502920">
                 <a:tc>
@@ -7599,7 +7599,7 @@
           <a:noFill/>
         </p:spPr>
         <p:txBody>
-          <a:bodyPr wrap="none">
+          <a:bodyPr wrap="square">
             <a:spAutoFit/>
           </a:bodyPr>
           <a:lstStyle/>
@@ -9236,7 +9236,7 @@
           <a:noFill/>
         </p:spPr>
         <p:txBody>
-          <a:bodyPr wrap="none">
+          <a:bodyPr wrap="square">
             <a:spAutoFit/>
           </a:bodyPr>
           <a:lstStyle/>
@@ -9984,7 +9984,7 @@
         </p:nvGraphicFramePr>
         <p:xfrm>
           <a:off x="640080" y="1371600"/>
-          <a:ext cx="11338560" cy="1508760"/>
+          <a:ext cx="10881359" cy="1508760"/>
         </p:xfrm>
         <a:graphic>
           <a:graphicData uri="http://schemas.openxmlformats.org/drawingml/2006/table">
@@ -9993,9 +9993,9 @@
                 <a:tableStyleId>{5C22544A-7EE6-4342-B048-85BDC9FD1C3A}</a:tableStyleId>
               </a:tblPr>
               <a:tblGrid>
-                <a:gridCol w="4572000"/>
-                <a:gridCol w="3383280"/>
-                <a:gridCol w="3383280"/>
+                <a:gridCol w="4387645"/>
+                <a:gridCol w="3246857"/>
+                <a:gridCol w="3246857"/>
               </a:tblGrid>
               <a:tr h="502920">
                 <a:tc>
@@ -10228,7 +10228,7 @@
           <a:noFill/>
         </p:spPr>
         <p:txBody>
-          <a:bodyPr wrap="none">
+          <a:bodyPr wrap="square">
             <a:spAutoFit/>
           </a:bodyPr>
           <a:lstStyle/>
@@ -10580,7 +10580,7 @@
           <a:noFill/>
         </p:spPr>
         <p:txBody>
-          <a:bodyPr wrap="none">
+          <a:bodyPr wrap="square">
             <a:spAutoFit/>
           </a:bodyPr>
           <a:lstStyle/>
@@ -10820,7 +10820,7 @@
         </p:nvGraphicFramePr>
         <p:xfrm>
           <a:off x="640080" y="1371600"/>
-          <a:ext cx="11338560" cy="2011680"/>
+          <a:ext cx="10881358" cy="2011680"/>
         </p:xfrm>
         <a:graphic>
           <a:graphicData uri="http://schemas.openxmlformats.org/drawingml/2006/table">
@@ -10829,9 +10829,9 @@
                 <a:tableStyleId>{5C22544A-7EE6-4342-B048-85BDC9FD1C3A}</a:tableStyleId>
               </a:tblPr>
               <a:tblGrid>
-                <a:gridCol w="4937760"/>
-                <a:gridCol w="3200400"/>
-                <a:gridCol w="3200400"/>
+                <a:gridCol w="4738656"/>
+                <a:gridCol w="3071351"/>
+                <a:gridCol w="3071351"/>
               </a:tblGrid>
               <a:tr h="502920">
                 <a:tc>
@@ -11135,7 +11135,7 @@
           <a:noFill/>
         </p:spPr>
         <p:txBody>
-          <a:bodyPr wrap="none">
+          <a:bodyPr wrap="square">
             <a:spAutoFit/>
           </a:bodyPr>
           <a:lstStyle/>
@@ -11871,7 +11871,7 @@
         </p:nvGraphicFramePr>
         <p:xfrm>
           <a:off x="640080" y="1371600"/>
-          <a:ext cx="13167360" cy="2011680"/>
+          <a:ext cx="10881359" cy="2011680"/>
         </p:xfrm>
         <a:graphic>
           <a:graphicData uri="http://schemas.openxmlformats.org/drawingml/2006/table">
@@ -11880,10 +11880,10 @@
                 <a:tableStyleId>{5C22544A-7EE6-4342-B048-85BDC9FD1C3A}</a:tableStyleId>
               </a:tblPr>
               <a:tblGrid>
-                <a:gridCol w="4937760"/>
-                <a:gridCol w="2743200"/>
-                <a:gridCol w="2743200"/>
-                <a:gridCol w="2743200"/>
+                <a:gridCol w="4080509"/>
+                <a:gridCol w="2266950"/>
+                <a:gridCol w="2266950"/>
+                <a:gridCol w="2266950"/>
               </a:tblGrid>
               <a:tr h="502920">
                 <a:tc>
@@ -12279,7 +12279,7 @@
           <a:noFill/>
         </p:spPr>
         <p:txBody>
-          <a:bodyPr wrap="none">
+          <a:bodyPr wrap="square">
             <a:spAutoFit/>
           </a:bodyPr>
           <a:lstStyle/>
@@ -12306,6 +12306,1533 @@
 </file>
 
 <file path=ppt/slides/slide42.xml><?xml version="1.0" encoding="utf-8"?>
+<p:sld xmlns:a="http://schemas.openxmlformats.org/drawingml/2006/main" xmlns:p="http://schemas.openxmlformats.org/presentationml/2006/main" xmlns:r="http://schemas.openxmlformats.org/officeDocument/2006/relationships">
+  <p:cSld>
+    <p:spTree>
+      <p:nvGrpSpPr>
+        <p:cNvPr id="1" name=""/>
+        <p:cNvGrpSpPr/>
+        <p:nvPr/>
+      </p:nvGrpSpPr>
+      <p:grpSpPr/>
+      <p:sp>
+        <p:nvSpPr>
+          <p:cNvPr id="2" name="Rectangle 1"/>
+          <p:cNvSpPr/>
+          <p:nvPr/>
+        </p:nvSpPr>
+        <p:spPr>
+          <a:xfrm>
+            <a:off x="0" y="0"/>
+            <a:ext cx="12192000" cy="960120"/>
+          </a:xfrm>
+          <a:prstGeom prst="rect">
+            <a:avLst/>
+          </a:prstGeom>
+          <a:solidFill>
+            <a:srgbClr val="1F3A4D"/>
+          </a:solidFill>
+          <a:ln>
+            <a:noFill/>
+          </a:ln>
+        </p:spPr>
+        <p:style>
+          <a:lnRef idx="1">
+            <a:schemeClr val="accent1"/>
+          </a:lnRef>
+          <a:fillRef idx="3">
+            <a:schemeClr val="accent1"/>
+          </a:fillRef>
+          <a:effectRef idx="2">
+            <a:schemeClr val="accent1"/>
+          </a:effectRef>
+          <a:fontRef idx="minor">
+            <a:schemeClr val="lt1"/>
+          </a:fontRef>
+        </p:style>
+        <p:txBody>
+          <a:bodyPr rtlCol="0" anchor="ctr" lIns="365760" tIns="73152" wrap="square"/>
+          <a:lstStyle/>
+          <a:p>
+            <a:pPr algn="ctr">
+              <a:defRPr sz="2600" b="1">
+                <a:solidFill>
+                  <a:srgbClr val="FFFFFF"/>
+                </a:solidFill>
+              </a:defRPr>
+            </a:pPr>
+            <a:r>
+              <a:t>One More Lead: Could the Other Side's Own Storage Explain the Gap?</a:t>
+            </a:r>
+          </a:p>
+          <a:p>
+            <a:pPr>
+              <a:defRPr sz="1400">
+                <a:solidFill>
+                  <a:srgbClr val="C8D2DA"/>
+                </a:solidFill>
+              </a:defRPr>
+            </a:pPr>
+            <a:r>
+              <a:t>A real, testable idea - checked and ruled out</a:t>
+            </a:r>
+          </a:p>
+        </p:txBody>
+      </p:sp>
+      <p:sp>
+        <p:nvSpPr>
+          <p:cNvPr id="3" name="TextBox 2"/>
+          <p:cNvSpPr txBox="1"/>
+          <p:nvPr/>
+        </p:nvSpPr>
+        <p:spPr>
+          <a:xfrm>
+            <a:off x="11551920" y="6446520"/>
+            <a:ext cx="457200" cy="320040"/>
+          </a:xfrm>
+          <a:prstGeom prst="rect">
+            <a:avLst/>
+          </a:prstGeom>
+          <a:noFill/>
+        </p:spPr>
+        <p:txBody>
+          <a:bodyPr wrap="none">
+            <a:spAutoFit/>
+          </a:bodyPr>
+          <a:lstStyle/>
+          <a:p>
+            <a:pPr>
+              <a:defRPr sz="1100">
+                <a:solidFill>
+                  <a:srgbClr val="5A605C"/>
+                </a:solidFill>
+              </a:defRPr>
+            </a:pPr>
+            <a:r>
+              <a:t>42</a:t>
+            </a:r>
+          </a:p>
+        </p:txBody>
+      </p:sp>
+      <p:sp>
+        <p:nvSpPr>
+          <p:cNvPr id="4" name="TextBox 3"/>
+          <p:cNvSpPr txBox="1"/>
+          <p:nvPr/>
+        </p:nvSpPr>
+        <p:spPr>
+          <a:xfrm>
+            <a:off x="502920" y="1234440"/>
+            <a:ext cx="11155680" cy="5303520"/>
+          </a:xfrm>
+          <a:prstGeom prst="rect">
+            <a:avLst/>
+          </a:prstGeom>
+          <a:noFill/>
+        </p:spPr>
+        <p:txBody>
+          <a:bodyPr wrap="square">
+            <a:spAutoFit/>
+          </a:bodyPr>
+          <a:lstStyle/>
+          <a:p>
+            <a:pPr>
+              <a:spcAft>
+                <a:spcPts val="1000"/>
+              </a:spcAft>
+              <a:defRPr sz="1800" b="1">
+                <a:solidFill>
+                  <a:srgbClr val="1E2220"/>
+                </a:solidFill>
+              </a:defRPr>
+            </a:pPr>
+            <a:r>
+              <a:t>•  The one open thread from before: a small number of extreme hours where Germany imports less than it could, even with spare capacity available</a:t>
+            </a:r>
+          </a:p>
+          <a:p>
+            <a:pPr>
+              <a:spcAft>
+                <a:spcPts val="1000"/>
+              </a:spcAft>
+              <a:defRPr sz="1800" b="1">
+                <a:solidFill>
+                  <a:srgbClr val="1E2220"/>
+                </a:solidFill>
+              </a:defRPr>
+            </a:pPr>
+            <a:r>
+              <a:t>•  Tested directly using data already on hand: is the rest of Europe's own storage running physically empty during those hours?</a:t>
+            </a:r>
+          </a:p>
+          <a:p>
+            <a:pPr>
+              <a:spcAft>
+                <a:spcPts val="1000"/>
+              </a:spcAft>
+              <a:defRPr sz="1800" b="1">
+                <a:solidFill>
+                  <a:srgbClr val="1E2220"/>
+                </a:solidFill>
+              </a:defRPr>
+            </a:pPr>
+            <a:r>
+              <a:t>•  Checked both battery-style storage and reservoir hydro on the other side of the border - neither ever comes close to its own physical limit, in either year tested</a:t>
+            </a:r>
+          </a:p>
+          <a:p>
+            <a:pPr>
+              <a:spcAft>
+                <a:spcPts val="1000"/>
+              </a:spcAft>
+              <a:defRPr sz="1800" b="1">
+                <a:solidFill>
+                  <a:srgbClr val="1E2220"/>
+                </a:solidFill>
+              </a:defRPr>
+            </a:pPr>
+            <a:r>
+              <a:t>•  Rules out 'the other side simply has nothing left to give' - strengthens the case that the real limiter is inside the model's own internal trading logic, not a real-world capacity constraint anywhere</a:t>
+            </a:r>
+          </a:p>
+        </p:txBody>
+      </p:sp>
+    </p:spTree>
+  </p:cSld>
+  <p:clrMapOvr>
+    <a:masterClrMapping/>
+  </p:clrMapOvr>
+</p:sld>
+</file>
+
+<file path=ppt/slides/slide43.xml><?xml version="1.0" encoding="utf-8"?>
+<p:sld xmlns:a="http://schemas.openxmlformats.org/drawingml/2006/main" xmlns:p="http://schemas.openxmlformats.org/presentationml/2006/main" xmlns:r="http://schemas.openxmlformats.org/officeDocument/2006/relationships">
+  <p:cSld>
+    <p:spTree>
+      <p:nvGrpSpPr>
+        <p:cNvPr id="1" name=""/>
+        <p:cNvGrpSpPr/>
+        <p:nvPr/>
+      </p:nvGrpSpPr>
+      <p:grpSpPr/>
+      <p:sp>
+        <p:nvSpPr>
+          <p:cNvPr id="2" name="Rectangle 1"/>
+          <p:cNvSpPr/>
+          <p:nvPr/>
+        </p:nvSpPr>
+        <p:spPr>
+          <a:xfrm>
+            <a:off x="0" y="0"/>
+            <a:ext cx="12192000" cy="960120"/>
+          </a:xfrm>
+          <a:prstGeom prst="rect">
+            <a:avLst/>
+          </a:prstGeom>
+          <a:solidFill>
+            <a:srgbClr val="1F3A4D"/>
+          </a:solidFill>
+          <a:ln>
+            <a:noFill/>
+          </a:ln>
+        </p:spPr>
+        <p:style>
+          <a:lnRef idx="1">
+            <a:schemeClr val="accent1"/>
+          </a:lnRef>
+          <a:fillRef idx="3">
+            <a:schemeClr val="accent1"/>
+          </a:fillRef>
+          <a:effectRef idx="2">
+            <a:schemeClr val="accent1"/>
+          </a:effectRef>
+          <a:fontRef idx="minor">
+            <a:schemeClr val="lt1"/>
+          </a:fontRef>
+        </p:style>
+        <p:txBody>
+          <a:bodyPr rtlCol="0" anchor="ctr" lIns="365760" tIns="73152" wrap="square"/>
+          <a:lstStyle/>
+          <a:p>
+            <a:pPr algn="ctr">
+              <a:defRPr sz="2600" b="1">
+                <a:solidFill>
+                  <a:srgbClr val="FFFFFF"/>
+                </a:solidFill>
+              </a:defRPr>
+            </a:pPr>
+            <a:r>
+              <a:t>Pushing Further: Replacing the Combined Zone With a Real Named Country</a:t>
+            </a:r>
+          </a:p>
+          <a:p>
+            <a:pPr>
+              <a:defRPr sz="1400">
+                <a:solidFill>
+                  <a:srgbClr val="C8D2DA"/>
+                </a:solidFill>
+              </a:defRPr>
+            </a:pPr>
+            <a:r>
+              <a:t>Testing whether more realism helps, or whether the combined approach was already the right call</a:t>
+            </a:r>
+          </a:p>
+        </p:txBody>
+      </p:sp>
+      <p:sp>
+        <p:nvSpPr>
+          <p:cNvPr id="3" name="TextBox 2"/>
+          <p:cNvSpPr txBox="1"/>
+          <p:nvPr/>
+        </p:nvSpPr>
+        <p:spPr>
+          <a:xfrm>
+            <a:off x="11551920" y="6446520"/>
+            <a:ext cx="457200" cy="320040"/>
+          </a:xfrm>
+          <a:prstGeom prst="rect">
+            <a:avLst/>
+          </a:prstGeom>
+          <a:noFill/>
+        </p:spPr>
+        <p:txBody>
+          <a:bodyPr wrap="none">
+            <a:spAutoFit/>
+          </a:bodyPr>
+          <a:lstStyle/>
+          <a:p>
+            <a:pPr>
+              <a:defRPr sz="1100">
+                <a:solidFill>
+                  <a:srgbClr val="5A605C"/>
+                </a:solidFill>
+              </a:defRPr>
+            </a:pPr>
+            <a:r>
+              <a:t>43</a:t>
+            </a:r>
+          </a:p>
+        </p:txBody>
+      </p:sp>
+      <p:sp>
+        <p:nvSpPr>
+          <p:cNvPr id="4" name="TextBox 3"/>
+          <p:cNvSpPr txBox="1"/>
+          <p:nvPr/>
+        </p:nvSpPr>
+        <p:spPr>
+          <a:xfrm>
+            <a:off x="502920" y="1234440"/>
+            <a:ext cx="11155680" cy="5303520"/>
+          </a:xfrm>
+          <a:prstGeom prst="rect">
+            <a:avLst/>
+          </a:prstGeom>
+          <a:noFill/>
+        </p:spPr>
+        <p:txBody>
+          <a:bodyPr wrap="square">
+            <a:spAutoFit/>
+          </a:bodyPr>
+          <a:lstStyle/>
+          <a:p>
+            <a:pPr>
+              <a:spcAft>
+                <a:spcPts val="1000"/>
+              </a:spcAft>
+              <a:defRPr sz="1800" b="1">
+                <a:solidFill>
+                  <a:srgbClr val="1E2220"/>
+                </a:solidFill>
+              </a:defRPr>
+            </a:pPr>
+            <a:r>
+              <a:t>•  Everything so far treated 'the rest of Europe' as one combined stand-in - the next real question: does splitting out a real neighbour by name do any better?</a:t>
+            </a:r>
+          </a:p>
+          <a:p>
+            <a:pPr>
+              <a:spcAft>
+                <a:spcPts val="1000"/>
+              </a:spcAft>
+              <a:defRPr sz="1800" b="1">
+                <a:solidFill>
+                  <a:srgbClr val="1E2220"/>
+                </a:solidFill>
+              </a:defRPr>
+            </a:pPr>
+            <a:r>
+              <a:t>•  Chose France as the test case: the largest single economy involved, and the one country with enough real, already-sourced data to build immediately</a:t>
+            </a:r>
+          </a:p>
+          <a:p>
+            <a:pPr>
+              <a:spcAft>
+                <a:spcPts val="1000"/>
+              </a:spcAft>
+              <a:defRPr sz="1800" b="1">
+                <a:solidFill>
+                  <a:srgbClr val="1E2220"/>
+                </a:solidFill>
+              </a:defRPr>
+            </a:pPr>
+            <a:r>
+              <a:t>•  Built it properly: France's own real power plants, real demand, real weather-driven renewables, and a real border link to Germany - not a shortcut</a:t>
+            </a:r>
+          </a:p>
+        </p:txBody>
+      </p:sp>
+    </p:spTree>
+  </p:cSld>
+  <p:clrMapOvr>
+    <a:masterClrMapping/>
+  </p:clrMapOvr>
+</p:sld>
+</file>
+
+<file path=ppt/slides/slide44.xml><?xml version="1.0" encoding="utf-8"?>
+<p:sld xmlns:a="http://schemas.openxmlformats.org/drawingml/2006/main" xmlns:p="http://schemas.openxmlformats.org/presentationml/2006/main" xmlns:r="http://schemas.openxmlformats.org/officeDocument/2006/relationships">
+  <p:cSld>
+    <p:spTree>
+      <p:nvGrpSpPr>
+        <p:cNvPr id="1" name=""/>
+        <p:cNvGrpSpPr/>
+        <p:nvPr/>
+      </p:nvGrpSpPr>
+      <p:grpSpPr/>
+      <p:sp>
+        <p:nvSpPr>
+          <p:cNvPr id="2" name="Rectangle 1"/>
+          <p:cNvSpPr/>
+          <p:nvPr/>
+        </p:nvSpPr>
+        <p:spPr>
+          <a:xfrm>
+            <a:off x="0" y="0"/>
+            <a:ext cx="12192000" cy="960120"/>
+          </a:xfrm>
+          <a:prstGeom prst="rect">
+            <a:avLst/>
+          </a:prstGeom>
+          <a:solidFill>
+            <a:srgbClr val="1F3A4D"/>
+          </a:solidFill>
+          <a:ln>
+            <a:noFill/>
+          </a:ln>
+        </p:spPr>
+        <p:style>
+          <a:lnRef idx="1">
+            <a:schemeClr val="accent1"/>
+          </a:lnRef>
+          <a:fillRef idx="3">
+            <a:schemeClr val="accent1"/>
+          </a:fillRef>
+          <a:effectRef idx="2">
+            <a:schemeClr val="accent1"/>
+          </a:effectRef>
+          <a:fontRef idx="minor">
+            <a:schemeClr val="lt1"/>
+          </a:fontRef>
+        </p:style>
+        <p:txBody>
+          <a:bodyPr rtlCol="0" anchor="ctr" lIns="365760" tIns="73152" wrap="square"/>
+          <a:lstStyle/>
+          <a:p>
+            <a:pPr algn="ctr">
+              <a:defRPr sz="2600" b="1">
+                <a:solidFill>
+                  <a:srgbClr val="FFFFFF"/>
+                </a:solidFill>
+              </a:defRPr>
+            </a:pPr>
+            <a:r>
+              <a:t>Result: A Real Step Backward - With a Clear, Understood Reason</a:t>
+            </a:r>
+          </a:p>
+          <a:p>
+            <a:pPr>
+              <a:defRPr sz="1400">
+                <a:solidFill>
+                  <a:srgbClr val="C8D2DA"/>
+                </a:solidFill>
+              </a:defRPr>
+            </a:pPr>
+            <a:r>
+              <a:t>Splitting France out on its own made things worse, not better</a:t>
+            </a:r>
+          </a:p>
+        </p:txBody>
+      </p:sp>
+      <p:sp>
+        <p:nvSpPr>
+          <p:cNvPr id="3" name="TextBox 2"/>
+          <p:cNvSpPr txBox="1"/>
+          <p:nvPr/>
+        </p:nvSpPr>
+        <p:spPr>
+          <a:xfrm>
+            <a:off x="11551920" y="6446520"/>
+            <a:ext cx="457200" cy="320040"/>
+          </a:xfrm>
+          <a:prstGeom prst="rect">
+            <a:avLst/>
+          </a:prstGeom>
+          <a:noFill/>
+        </p:spPr>
+        <p:txBody>
+          <a:bodyPr wrap="none">
+            <a:spAutoFit/>
+          </a:bodyPr>
+          <a:lstStyle/>
+          <a:p>
+            <a:pPr>
+              <a:defRPr sz="1100">
+                <a:solidFill>
+                  <a:srgbClr val="5A605C"/>
+                </a:solidFill>
+              </a:defRPr>
+            </a:pPr>
+            <a:r>
+              <a:t>44</a:t>
+            </a:r>
+          </a:p>
+        </p:txBody>
+      </p:sp>
+      <p:graphicFrame>
+        <p:nvGraphicFramePr>
+          <p:cNvPr id="4" name="Table 3"/>
+          <p:cNvGraphicFramePr>
+            <a:graphicFrameLocks noGrp="1"/>
+          </p:cNvGraphicFramePr>
+          <p:nvPr/>
+        </p:nvGraphicFramePr>
+        <p:xfrm>
+          <a:off x="640080" y="1371600"/>
+          <a:ext cx="10881359" cy="1508760"/>
+        </p:xfrm>
+        <a:graphic>
+          <a:graphicData uri="http://schemas.openxmlformats.org/drawingml/2006/table">
+            <a:tbl>
+              <a:tblPr firstRow="1" bandRow="1">
+                <a:tableStyleId>{5C22544A-7EE6-4342-B048-85BDC9FD1C3A}</a:tableStyleId>
+              </a:tblPr>
+              <a:tblGrid>
+                <a:gridCol w="4385025"/>
+                <a:gridCol w="3248167"/>
+                <a:gridCol w="3248167"/>
+              </a:tblGrid>
+              <a:tr h="502920">
+                <a:tc>
+                  <a:txBody>
+                    <a:bodyPr/>
+                    <a:lstStyle/>
+                    <a:p>
+                      <a:pPr algn="ctr">
+                        <a:defRPr b="1" sz="1300">
+                          <a:solidFill>
+                            <a:srgbClr val="FFFFFF"/>
+                          </a:solidFill>
+                        </a:defRPr>
+                      </a:pPr>
+                    </a:p>
+                  </a:txBody>
+                  <a:tcPr>
+                    <a:solidFill>
+                      <a:srgbClr val="1F3A4D"/>
+                    </a:solidFill>
+                  </a:tcPr>
+                </a:tc>
+                <a:tc>
+                  <a:txBody>
+                    <a:bodyPr/>
+                    <a:lstStyle/>
+                    <a:p>
+                      <a:pPr algn="ctr">
+                        <a:defRPr b="1" sz="1300">
+                          <a:solidFill>
+                            <a:srgbClr val="FFFFFF"/>
+                          </a:solidFill>
+                        </a:defRPr>
+                      </a:pPr>
+                      <a:r>
+                        <a:t>Combined zone (best result)</a:t>
+                      </a:r>
+                    </a:p>
+                  </a:txBody>
+                  <a:tcPr>
+                    <a:solidFill>
+                      <a:srgbClr val="1F3A4D"/>
+                    </a:solidFill>
+                  </a:tcPr>
+                </a:tc>
+                <a:tc>
+                  <a:txBody>
+                    <a:bodyPr/>
+                    <a:lstStyle/>
+                    <a:p>
+                      <a:pPr algn="ctr">
+                        <a:defRPr b="1" sz="1300">
+                          <a:solidFill>
+                            <a:srgbClr val="FFFFFF"/>
+                          </a:solidFill>
+                        </a:defRPr>
+                      </a:pPr>
+                      <a:r>
+                        <a:t>France split out separately</a:t>
+                      </a:r>
+                    </a:p>
+                  </a:txBody>
+                  <a:tcPr>
+                    <a:solidFill>
+                      <a:srgbClr val="1F3A4D"/>
+                    </a:solidFill>
+                  </a:tcPr>
+                </a:tc>
+              </a:tr>
+              <a:tr h="502920">
+                <a:tc>
+                  <a:txBody>
+                    <a:bodyPr/>
+                    <a:lstStyle/>
+                    <a:p>
+                      <a:pPr algn="ctr">
+                        <a:defRPr sz="1200" b="1">
+                          <a:solidFill>
+                            <a:srgbClr val="1E2220"/>
+                          </a:solidFill>
+                        </a:defRPr>
+                      </a:pPr>
+                      <a:r>
+                        <a:t>'Ran out of power' hours</a:t>
+                      </a:r>
+                    </a:p>
+                  </a:txBody>
+                  <a:tcPr>
+                    <a:solidFill>
+                      <a:srgbClr val="FFFFFF"/>
+                    </a:solidFill>
+                  </a:tcPr>
+                </a:tc>
+                <a:tc>
+                  <a:txBody>
+                    <a:bodyPr/>
+                    <a:lstStyle/>
+                    <a:p>
+                      <a:pPr algn="ctr">
+                        <a:defRPr sz="1200" b="0">
+                          <a:solidFill>
+                            <a:srgbClr val="1E2220"/>
+                          </a:solidFill>
+                        </a:defRPr>
+                      </a:pPr>
+                      <a:r>
+                        <a:t>7</a:t>
+                      </a:r>
+                    </a:p>
+                  </a:txBody>
+                  <a:tcPr>
+                    <a:solidFill>
+                      <a:srgbClr val="FFFFFF"/>
+                    </a:solidFill>
+                  </a:tcPr>
+                </a:tc>
+                <a:tc>
+                  <a:txBody>
+                    <a:bodyPr/>
+                    <a:lstStyle/>
+                    <a:p>
+                      <a:pPr algn="ctr">
+                        <a:defRPr sz="1200" b="0">
+                          <a:solidFill>
+                            <a:srgbClr val="1E2220"/>
+                          </a:solidFill>
+                        </a:defRPr>
+                      </a:pPr>
+                      <a:r>
+                        <a:t>167</a:t>
+                      </a:r>
+                    </a:p>
+                  </a:txBody>
+                  <a:tcPr>
+                    <a:solidFill>
+                      <a:srgbClr val="FFFFFF"/>
+                    </a:solidFill>
+                  </a:tcPr>
+                </a:tc>
+              </a:tr>
+              <a:tr h="502920">
+                <a:tc>
+                  <a:txBody>
+                    <a:bodyPr/>
+                    <a:lstStyle/>
+                    <a:p>
+                      <a:pPr algn="ctr">
+                        <a:defRPr sz="1200" b="1">
+                          <a:solidFill>
+                            <a:srgbClr val="1E2220"/>
+                          </a:solidFill>
+                        </a:defRPr>
+                      </a:pPr>
+                      <a:r>
+                        <a:t>Average price gap on ordinary days</a:t>
+                      </a:r>
+                    </a:p>
+                  </a:txBody>
+                  <a:tcPr>
+                    <a:solidFill>
+                      <a:srgbClr val="EEF0E9"/>
+                    </a:solidFill>
+                  </a:tcPr>
+                </a:tc>
+                <a:tc>
+                  <a:txBody>
+                    <a:bodyPr/>
+                    <a:lstStyle/>
+                    <a:p>
+                      <a:pPr algn="ctr">
+                        <a:defRPr sz="1200" b="0">
+                          <a:solidFill>
+                            <a:srgbClr val="1E2220"/>
+                          </a:solidFill>
+                        </a:defRPr>
+                      </a:pPr>
+                      <a:r>
+                        <a:t>-2.90</a:t>
+                      </a:r>
+                    </a:p>
+                  </a:txBody>
+                  <a:tcPr>
+                    <a:solidFill>
+                      <a:srgbClr val="EEF0E9"/>
+                    </a:solidFill>
+                  </a:tcPr>
+                </a:tc>
+                <a:tc>
+                  <a:txBody>
+                    <a:bodyPr/>
+                    <a:lstStyle/>
+                    <a:p>
+                      <a:pPr algn="ctr">
+                        <a:defRPr sz="1200" b="0">
+                          <a:solidFill>
+                            <a:srgbClr val="1E2220"/>
+                          </a:solidFill>
+                        </a:defRPr>
+                      </a:pPr>
+                      <a:r>
+                        <a:t>+9.65</a:t>
+                      </a:r>
+                    </a:p>
+                  </a:txBody>
+                  <a:tcPr>
+                    <a:solidFill>
+                      <a:srgbClr val="EEF0E9"/>
+                    </a:solidFill>
+                  </a:tcPr>
+                </a:tc>
+              </a:tr>
+            </a:tbl>
+          </a:graphicData>
+        </a:graphic>
+      </p:graphicFrame>
+      <p:sp>
+        <p:nvSpPr>
+          <p:cNvPr id="5" name="TextBox 4"/>
+          <p:cNvSpPr txBox="1"/>
+          <p:nvPr/>
+        </p:nvSpPr>
+        <p:spPr>
+          <a:xfrm>
+            <a:off x="640080" y="3063240"/>
+            <a:ext cx="10881360" cy="1097280"/>
+          </a:xfrm>
+          <a:prstGeom prst="rect">
+            <a:avLst/>
+          </a:prstGeom>
+          <a:noFill/>
+        </p:spPr>
+        <p:txBody>
+          <a:bodyPr wrap="square">
+            <a:spAutoFit/>
+          </a:bodyPr>
+          <a:lstStyle/>
+          <a:p>
+            <a:pPr>
+              <a:defRPr sz="1300" i="1">
+                <a:solidFill>
+                  <a:srgbClr val="5A605C"/>
+                </a:solidFill>
+              </a:defRPr>
+            </a:pPr>
+            <a:r>
+              <a:t>Real, checked reason: France's own huge nuclear fleet used to help keep the WHOLE combined pool well-supplied. Pulled out on its own, the remaining combined zone lost that cushion and became genuinely short more often - while France's own surplus, now only linked directly to Germany by a narrow border, couldn't reach the rest of Europe to help there either.</a:t>
+            </a:r>
+          </a:p>
+        </p:txBody>
+      </p:sp>
+    </p:spTree>
+  </p:cSld>
+  <p:clrMapOvr>
+    <a:masterClrMapping/>
+  </p:clrMapOvr>
+</p:sld>
+</file>
+
+<file path=ppt/slides/slide45.xml><?xml version="1.0" encoding="utf-8"?>
+<p:sld xmlns:a="http://schemas.openxmlformats.org/drawingml/2006/main" xmlns:p="http://schemas.openxmlformats.org/presentationml/2006/main" xmlns:r="http://schemas.openxmlformats.org/officeDocument/2006/relationships">
+  <p:cSld>
+    <p:spTree>
+      <p:nvGrpSpPr>
+        <p:cNvPr id="1" name=""/>
+        <p:cNvGrpSpPr/>
+        <p:nvPr/>
+      </p:nvGrpSpPr>
+      <p:grpSpPr/>
+      <p:sp>
+        <p:nvSpPr>
+          <p:cNvPr id="2" name="Rectangle 1"/>
+          <p:cNvSpPr/>
+          <p:nvPr/>
+        </p:nvSpPr>
+        <p:spPr>
+          <a:xfrm>
+            <a:off x="0" y="0"/>
+            <a:ext cx="12192000" cy="960120"/>
+          </a:xfrm>
+          <a:prstGeom prst="rect">
+            <a:avLst/>
+          </a:prstGeom>
+          <a:solidFill>
+            <a:srgbClr val="1F3A4D"/>
+          </a:solidFill>
+          <a:ln>
+            <a:noFill/>
+          </a:ln>
+        </p:spPr>
+        <p:style>
+          <a:lnRef idx="1">
+            <a:schemeClr val="accent1"/>
+          </a:lnRef>
+          <a:fillRef idx="3">
+            <a:schemeClr val="accent1"/>
+          </a:fillRef>
+          <a:effectRef idx="2">
+            <a:schemeClr val="accent1"/>
+          </a:effectRef>
+          <a:fontRef idx="minor">
+            <a:schemeClr val="lt1"/>
+          </a:fontRef>
+        </p:style>
+        <p:txBody>
+          <a:bodyPr rtlCol="0" anchor="ctr" lIns="365760" tIns="73152" wrap="square"/>
+          <a:lstStyle/>
+          <a:p>
+            <a:pPr algn="ctr">
+              <a:defRPr sz="2600" b="1">
+                <a:solidFill>
+                  <a:srgbClr val="FFFFFF"/>
+                </a:solidFill>
+              </a:defRPr>
+            </a:pPr>
+            <a:r>
+              <a:t>Going All the Way: All 10 Real Neighbouring Countries at Once</a:t>
+            </a:r>
+          </a:p>
+          <a:p>
+            <a:pPr>
+              <a:defRPr sz="1400">
+                <a:solidFill>
+                  <a:srgbClr val="C8D2DA"/>
+                </a:solidFill>
+              </a:defRPr>
+            </a:pPr>
+            <a:r>
+              <a:t>A genuine engineering problem, found, diagnosed, and fixed along the way</a:t>
+            </a:r>
+          </a:p>
+        </p:txBody>
+      </p:sp>
+      <p:sp>
+        <p:nvSpPr>
+          <p:cNvPr id="3" name="TextBox 2"/>
+          <p:cNvSpPr txBox="1"/>
+          <p:nvPr/>
+        </p:nvSpPr>
+        <p:spPr>
+          <a:xfrm>
+            <a:off x="11551920" y="6446520"/>
+            <a:ext cx="457200" cy="320040"/>
+          </a:xfrm>
+          <a:prstGeom prst="rect">
+            <a:avLst/>
+          </a:prstGeom>
+          <a:noFill/>
+        </p:spPr>
+        <p:txBody>
+          <a:bodyPr wrap="none">
+            <a:spAutoFit/>
+          </a:bodyPr>
+          <a:lstStyle/>
+          <a:p>
+            <a:pPr>
+              <a:defRPr sz="1100">
+                <a:solidFill>
+                  <a:srgbClr val="5A605C"/>
+                </a:solidFill>
+              </a:defRPr>
+            </a:pPr>
+            <a:r>
+              <a:t>45</a:t>
+            </a:r>
+          </a:p>
+        </p:txBody>
+      </p:sp>
+      <p:sp>
+        <p:nvSpPr>
+          <p:cNvPr id="4" name="TextBox 3"/>
+          <p:cNvSpPr txBox="1"/>
+          <p:nvPr/>
+        </p:nvSpPr>
+        <p:spPr>
+          <a:xfrm>
+            <a:off x="502920" y="1234440"/>
+            <a:ext cx="11155680" cy="5303520"/>
+          </a:xfrm>
+          <a:prstGeom prst="rect">
+            <a:avLst/>
+          </a:prstGeom>
+          <a:noFill/>
+        </p:spPr>
+        <p:txBody>
+          <a:bodyPr wrap="square">
+            <a:spAutoFit/>
+          </a:bodyPr>
+          <a:lstStyle/>
+          <a:p>
+            <a:pPr>
+              <a:spcAft>
+                <a:spcPts val="1000"/>
+              </a:spcAft>
+              <a:defRPr sz="1800" b="1">
+                <a:solidFill>
+                  <a:srgbClr val="1E2220"/>
+                </a:solidFill>
+              </a:defRPr>
+            </a:pPr>
+            <a:r>
+              <a:t>•  Since one real country made things worse for a clear, understood reason, the natural next test: does the SAME problem get worse - or does something different happen - once every real neighbour is split out?</a:t>
+            </a:r>
+          </a:p>
+          <a:p>
+            <a:pPr>
+              <a:spcAft>
+                <a:spcPts val="1000"/>
+              </a:spcAft>
+              <a:defRPr sz="1800" b="1">
+                <a:solidFill>
+                  <a:srgbClr val="1E2220"/>
+                </a:solidFill>
+              </a:defRPr>
+            </a:pPr>
+            <a:r>
+              <a:t>•  Built all 10 real countries as their own separate zones - the largest build of the whole project</a:t>
+            </a:r>
+          </a:p>
+          <a:p>
+            <a:pPr>
+              <a:spcAft>
+                <a:spcPts val="1000"/>
+              </a:spcAft>
+              <a:defRPr sz="1800" b="1">
+                <a:solidFill>
+                  <a:srgbClr val="1E2220"/>
+                </a:solidFill>
+              </a:defRPr>
+            </a:pPr>
+            <a:r>
+              <a:t>•  Hit a genuine, hard technical bug along the way: the model's own dispatch engine broke down for one specific country (Denmark) - traced directly to Denmark's real hydro power being far too small in absolute terms for the model to handle reliably</a:t>
+            </a:r>
+          </a:p>
+          <a:p>
+            <a:pPr>
+              <a:spcAft>
+                <a:spcPts val="1000"/>
+              </a:spcAft>
+              <a:defRPr sz="1800" b="1">
+                <a:solidFill>
+                  <a:srgbClr val="1E2220"/>
+                </a:solidFill>
+              </a:defRPr>
+            </a:pPr>
+            <a:r>
+              <a:t>•  Fixed with a clearly labelled, honestly-flagged technical workaround (not real data) - confirmed the fix worked, then completed the full 10-country run</a:t>
+            </a:r>
+          </a:p>
+        </p:txBody>
+      </p:sp>
+    </p:spTree>
+  </p:cSld>
+  <p:clrMapOvr>
+    <a:masterClrMapping/>
+  </p:clrMapOvr>
+</p:sld>
+</file>
+
+<file path=ppt/slides/slide46.xml><?xml version="1.0" encoding="utf-8"?>
+<p:sld xmlns:a="http://schemas.openxmlformats.org/drawingml/2006/main" xmlns:p="http://schemas.openxmlformats.org/presentationml/2006/main" xmlns:r="http://schemas.openxmlformats.org/officeDocument/2006/relationships">
+  <p:cSld>
+    <p:spTree>
+      <p:nvGrpSpPr>
+        <p:cNvPr id="1" name=""/>
+        <p:cNvGrpSpPr/>
+        <p:nvPr/>
+      </p:nvGrpSpPr>
+      <p:grpSpPr/>
+      <p:sp>
+        <p:nvSpPr>
+          <p:cNvPr id="2" name="Rectangle 1"/>
+          <p:cNvSpPr/>
+          <p:nvPr/>
+        </p:nvSpPr>
+        <p:spPr>
+          <a:xfrm>
+            <a:off x="0" y="0"/>
+            <a:ext cx="12192000" cy="960120"/>
+          </a:xfrm>
+          <a:prstGeom prst="rect">
+            <a:avLst/>
+          </a:prstGeom>
+          <a:solidFill>
+            <a:srgbClr val="1F3A4D"/>
+          </a:solidFill>
+          <a:ln>
+            <a:noFill/>
+          </a:ln>
+        </p:spPr>
+        <p:style>
+          <a:lnRef idx="1">
+            <a:schemeClr val="accent1"/>
+          </a:lnRef>
+          <a:fillRef idx="3">
+            <a:schemeClr val="accent1"/>
+          </a:fillRef>
+          <a:effectRef idx="2">
+            <a:schemeClr val="accent1"/>
+          </a:effectRef>
+          <a:fontRef idx="minor">
+            <a:schemeClr val="lt1"/>
+          </a:fontRef>
+        </p:style>
+        <p:txBody>
+          <a:bodyPr rtlCol="0" anchor="ctr" lIns="365760" tIns="73152" wrap="square"/>
+          <a:lstStyle/>
+          <a:p>
+            <a:pPr algn="ctr">
+              <a:defRPr sz="2600" b="1">
+                <a:solidFill>
+                  <a:srgbClr val="FFFFFF"/>
+                </a:solidFill>
+              </a:defRPr>
+            </a:pPr>
+            <a:r>
+              <a:t>Result: Better Than Expected - But Still Not the Winning Approach</a:t>
+            </a:r>
+          </a:p>
+          <a:p>
+            <a:pPr>
+              <a:defRPr sz="1400">
+                <a:solidFill>
+                  <a:srgbClr val="C8D2DA"/>
+                </a:solidFill>
+              </a:defRPr>
+            </a:pPr>
+            <a:r>
+              <a:t>Splitting into all 10 real countries beat the single-country attempt on every measure but one</a:t>
+            </a:r>
+          </a:p>
+        </p:txBody>
+      </p:sp>
+      <p:sp>
+        <p:nvSpPr>
+          <p:cNvPr id="3" name="TextBox 2"/>
+          <p:cNvSpPr txBox="1"/>
+          <p:nvPr/>
+        </p:nvSpPr>
+        <p:spPr>
+          <a:xfrm>
+            <a:off x="11551920" y="6446520"/>
+            <a:ext cx="457200" cy="320040"/>
+          </a:xfrm>
+          <a:prstGeom prst="rect">
+            <a:avLst/>
+          </a:prstGeom>
+          <a:noFill/>
+        </p:spPr>
+        <p:txBody>
+          <a:bodyPr wrap="none">
+            <a:spAutoFit/>
+          </a:bodyPr>
+          <a:lstStyle/>
+          <a:p>
+            <a:pPr>
+              <a:defRPr sz="1100">
+                <a:solidFill>
+                  <a:srgbClr val="5A605C"/>
+                </a:solidFill>
+              </a:defRPr>
+            </a:pPr>
+            <a:r>
+              <a:t>46</a:t>
+            </a:r>
+          </a:p>
+        </p:txBody>
+      </p:sp>
+      <p:graphicFrame>
+        <p:nvGraphicFramePr>
+          <p:cNvPr id="4" name="Table 3"/>
+          <p:cNvGraphicFramePr>
+            <a:graphicFrameLocks noGrp="1"/>
+          </p:cNvGraphicFramePr>
+          <p:nvPr/>
+        </p:nvGraphicFramePr>
+        <p:xfrm>
+          <a:off x="640080" y="1371600"/>
+          <a:ext cx="10881359" cy="2011680"/>
+        </p:xfrm>
+        <a:graphic>
+          <a:graphicData uri="http://schemas.openxmlformats.org/drawingml/2006/table">
+            <a:tbl>
+              <a:tblPr firstRow="1" bandRow="1">
+                <a:tableStyleId>{5C22544A-7EE6-4342-B048-85BDC9FD1C3A}</a:tableStyleId>
+              </a:tblPr>
+              <a:tblGrid>
+                <a:gridCol w="3510116"/>
+                <a:gridCol w="2457081"/>
+                <a:gridCol w="2457081"/>
+                <a:gridCol w="2457081"/>
+              </a:tblGrid>
+              <a:tr h="502920">
+                <a:tc>
+                  <a:txBody>
+                    <a:bodyPr/>
+                    <a:lstStyle/>
+                    <a:p>
+                      <a:pPr algn="ctr">
+                        <a:defRPr b="1" sz="1300">
+                          <a:solidFill>
+                            <a:srgbClr val="FFFFFF"/>
+                          </a:solidFill>
+                        </a:defRPr>
+                      </a:pPr>
+                    </a:p>
+                  </a:txBody>
+                  <a:tcPr>
+                    <a:solidFill>
+                      <a:srgbClr val="1F3A4D"/>
+                    </a:solidFill>
+                  </a:tcPr>
+                </a:tc>
+                <a:tc>
+                  <a:txBody>
+                    <a:bodyPr/>
+                    <a:lstStyle/>
+                    <a:p>
+                      <a:pPr algn="ctr">
+                        <a:defRPr b="1" sz="1300">
+                          <a:solidFill>
+                            <a:srgbClr val="FFFFFF"/>
+                          </a:solidFill>
+                        </a:defRPr>
+                      </a:pPr>
+                      <a:r>
+                        <a:t>Combined zone (best)</a:t>
+                      </a:r>
+                    </a:p>
+                  </a:txBody>
+                  <a:tcPr>
+                    <a:solidFill>
+                      <a:srgbClr val="1F3A4D"/>
+                    </a:solidFill>
+                  </a:tcPr>
+                </a:tc>
+                <a:tc>
+                  <a:txBody>
+                    <a:bodyPr/>
+                    <a:lstStyle/>
+                    <a:p>
+                      <a:pPr algn="ctr">
+                        <a:defRPr b="1" sz="1300">
+                          <a:solidFill>
+                            <a:srgbClr val="FFFFFF"/>
+                          </a:solidFill>
+                        </a:defRPr>
+                      </a:pPr>
+                      <a:r>
+                        <a:t>France alone</a:t>
+                      </a:r>
+                    </a:p>
+                  </a:txBody>
+                  <a:tcPr>
+                    <a:solidFill>
+                      <a:srgbClr val="1F3A4D"/>
+                    </a:solidFill>
+                  </a:tcPr>
+                </a:tc>
+                <a:tc>
+                  <a:txBody>
+                    <a:bodyPr/>
+                    <a:lstStyle/>
+                    <a:p>
+                      <a:pPr algn="ctr">
+                        <a:defRPr b="1" sz="1300">
+                          <a:solidFill>
+                            <a:srgbClr val="FFFFFF"/>
+                          </a:solidFill>
+                        </a:defRPr>
+                      </a:pPr>
+                      <a:r>
+                        <a:t>All 10 countries</a:t>
+                      </a:r>
+                    </a:p>
+                  </a:txBody>
+                  <a:tcPr>
+                    <a:solidFill>
+                      <a:srgbClr val="1F3A4D"/>
+                    </a:solidFill>
+                  </a:tcPr>
+                </a:tc>
+              </a:tr>
+              <a:tr h="502920">
+                <a:tc>
+                  <a:txBody>
+                    <a:bodyPr/>
+                    <a:lstStyle/>
+                    <a:p>
+                      <a:pPr algn="ctr">
+                        <a:defRPr sz="1200" b="1">
+                          <a:solidFill>
+                            <a:srgbClr val="1E2220"/>
+                          </a:solidFill>
+                        </a:defRPr>
+                      </a:pPr>
+                      <a:r>
+                        <a:t>'Ran out of power' hours</a:t>
+                      </a:r>
+                    </a:p>
+                  </a:txBody>
+                  <a:tcPr>
+                    <a:solidFill>
+                      <a:srgbClr val="FFFFFF"/>
+                    </a:solidFill>
+                  </a:tcPr>
+                </a:tc>
+                <a:tc>
+                  <a:txBody>
+                    <a:bodyPr/>
+                    <a:lstStyle/>
+                    <a:p>
+                      <a:pPr algn="ctr">
+                        <a:defRPr sz="1200" b="0">
+                          <a:solidFill>
+                            <a:srgbClr val="1E2220"/>
+                          </a:solidFill>
+                        </a:defRPr>
+                      </a:pPr>
+                      <a:r>
+                        <a:t>7</a:t>
+                      </a:r>
+                    </a:p>
+                  </a:txBody>
+                  <a:tcPr>
+                    <a:solidFill>
+                      <a:srgbClr val="FFFFFF"/>
+                    </a:solidFill>
+                  </a:tcPr>
+                </a:tc>
+                <a:tc>
+                  <a:txBody>
+                    <a:bodyPr/>
+                    <a:lstStyle/>
+                    <a:p>
+                      <a:pPr algn="ctr">
+                        <a:defRPr sz="1200" b="0">
+                          <a:solidFill>
+                            <a:srgbClr val="1E2220"/>
+                          </a:solidFill>
+                        </a:defRPr>
+                      </a:pPr>
+                      <a:r>
+                        <a:t>167</a:t>
+                      </a:r>
+                    </a:p>
+                  </a:txBody>
+                  <a:tcPr>
+                    <a:solidFill>
+                      <a:srgbClr val="FFFFFF"/>
+                    </a:solidFill>
+                  </a:tcPr>
+                </a:tc>
+                <a:tc>
+                  <a:txBody>
+                    <a:bodyPr/>
+                    <a:lstStyle/>
+                    <a:p>
+                      <a:pPr algn="ctr">
+                        <a:defRPr sz="1200" b="0">
+                          <a:solidFill>
+                            <a:srgbClr val="1E2220"/>
+                          </a:solidFill>
+                        </a:defRPr>
+                      </a:pPr>
+                      <a:r>
+                        <a:t>120</a:t>
+                      </a:r>
+                    </a:p>
+                  </a:txBody>
+                  <a:tcPr>
+                    <a:solidFill>
+                      <a:srgbClr val="FFFFFF"/>
+                    </a:solidFill>
+                  </a:tcPr>
+                </a:tc>
+              </a:tr>
+              <a:tr h="502920">
+                <a:tc>
+                  <a:txBody>
+                    <a:bodyPr/>
+                    <a:lstStyle/>
+                    <a:p>
+                      <a:pPr algn="ctr">
+                        <a:defRPr sz="1200" b="1">
+                          <a:solidFill>
+                            <a:srgbClr val="1E2220"/>
+                          </a:solidFill>
+                        </a:defRPr>
+                      </a:pPr>
+                      <a:r>
+                        <a:t>Average price gap, ordinary days</a:t>
+                      </a:r>
+                    </a:p>
+                  </a:txBody>
+                  <a:tcPr>
+                    <a:solidFill>
+                      <a:srgbClr val="EEF0E9"/>
+                    </a:solidFill>
+                  </a:tcPr>
+                </a:tc>
+                <a:tc>
+                  <a:txBody>
+                    <a:bodyPr/>
+                    <a:lstStyle/>
+                    <a:p>
+                      <a:pPr algn="ctr">
+                        <a:defRPr sz="1200" b="0">
+                          <a:solidFill>
+                            <a:srgbClr val="1E2220"/>
+                          </a:solidFill>
+                        </a:defRPr>
+                      </a:pPr>
+                      <a:r>
+                        <a:t>-2.90</a:t>
+                      </a:r>
+                    </a:p>
+                  </a:txBody>
+                  <a:tcPr>
+                    <a:solidFill>
+                      <a:srgbClr val="EEF0E9"/>
+                    </a:solidFill>
+                  </a:tcPr>
+                </a:tc>
+                <a:tc>
+                  <a:txBody>
+                    <a:bodyPr/>
+                    <a:lstStyle/>
+                    <a:p>
+                      <a:pPr algn="ctr">
+                        <a:defRPr sz="1200" b="0">
+                          <a:solidFill>
+                            <a:srgbClr val="1E2220"/>
+                          </a:solidFill>
+                        </a:defRPr>
+                      </a:pPr>
+                      <a:r>
+                        <a:t>+9.65</a:t>
+                      </a:r>
+                    </a:p>
+                  </a:txBody>
+                  <a:tcPr>
+                    <a:solidFill>
+                      <a:srgbClr val="EEF0E9"/>
+                    </a:solidFill>
+                  </a:tcPr>
+                </a:tc>
+                <a:tc>
+                  <a:txBody>
+                    <a:bodyPr/>
+                    <a:lstStyle/>
+                    <a:p>
+                      <a:pPr algn="ctr">
+                        <a:defRPr sz="1200" b="0">
+                          <a:solidFill>
+                            <a:srgbClr val="1E2220"/>
+                          </a:solidFill>
+                        </a:defRPr>
+                      </a:pPr>
+                      <a:r>
+                        <a:t>+4.87</a:t>
+                      </a:r>
+                    </a:p>
+                  </a:txBody>
+                  <a:tcPr>
+                    <a:solidFill>
+                      <a:srgbClr val="EEF0E9"/>
+                    </a:solidFill>
+                  </a:tcPr>
+                </a:tc>
+              </a:tr>
+              <a:tr h="502920">
+                <a:tc>
+                  <a:txBody>
+                    <a:bodyPr/>
+                    <a:lstStyle/>
+                    <a:p>
+                      <a:pPr algn="ctr">
+                        <a:defRPr sz="1200" b="1">
+                          <a:solidFill>
+                            <a:srgbClr val="1E2220"/>
+                          </a:solidFill>
+                        </a:defRPr>
+                      </a:pPr>
+                      <a:r>
+                        <a:t>Match quality (trustworthiness)</a:t>
+                      </a:r>
+                    </a:p>
+                  </a:txBody>
+                  <a:tcPr>
+                    <a:solidFill>
+                      <a:srgbClr val="FFFFFF"/>
+                    </a:solidFill>
+                  </a:tcPr>
+                </a:tc>
+                <a:tc>
+                  <a:txBody>
+                    <a:bodyPr/>
+                    <a:lstStyle/>
+                    <a:p>
+                      <a:pPr algn="ctr">
+                        <a:defRPr sz="1200" b="0">
+                          <a:solidFill>
+                            <a:srgbClr val="1E2220"/>
+                          </a:solidFill>
+                        </a:defRPr>
+                      </a:pPr>
+                      <a:r>
+                        <a:t>0.717</a:t>
+                      </a:r>
+                    </a:p>
+                  </a:txBody>
+                  <a:tcPr>
+                    <a:solidFill>
+                      <a:srgbClr val="FFFFFF"/>
+                    </a:solidFill>
+                  </a:tcPr>
+                </a:tc>
+                <a:tc>
+                  <a:txBody>
+                    <a:bodyPr/>
+                    <a:lstStyle/>
+                    <a:p>
+                      <a:pPr algn="ctr">
+                        <a:defRPr sz="1200" b="0">
+                          <a:solidFill>
+                            <a:srgbClr val="1E2220"/>
+                          </a:solidFill>
+                        </a:defRPr>
+                      </a:pPr>
+                      <a:r>
+                        <a:t>0.716</a:t>
+                      </a:r>
+                    </a:p>
+                  </a:txBody>
+                  <a:tcPr>
+                    <a:solidFill>
+                      <a:srgbClr val="FFFFFF"/>
+                    </a:solidFill>
+                  </a:tcPr>
+                </a:tc>
+                <a:tc>
+                  <a:txBody>
+                    <a:bodyPr/>
+                    <a:lstStyle/>
+                    <a:p>
+                      <a:pPr algn="ctr">
+                        <a:defRPr sz="1200" b="0">
+                          <a:solidFill>
+                            <a:srgbClr val="1E2220"/>
+                          </a:solidFill>
+                        </a:defRPr>
+                      </a:pPr>
+                      <a:r>
+                        <a:t>0.731 (best yet)</a:t>
+                      </a:r>
+                    </a:p>
+                  </a:txBody>
+                  <a:tcPr>
+                    <a:solidFill>
+                      <a:srgbClr val="FFFFFF"/>
+                    </a:solidFill>
+                  </a:tcPr>
+                </a:tc>
+              </a:tr>
+            </a:tbl>
+          </a:graphicData>
+        </a:graphic>
+      </p:graphicFrame>
+      <p:sp>
+        <p:nvSpPr>
+          <p:cNvPr id="5" name="TextBox 4"/>
+          <p:cNvSpPr txBox="1"/>
+          <p:nvPr/>
+        </p:nvSpPr>
+        <p:spPr>
+          <a:xfrm>
+            <a:off x="640080" y="3566160"/>
+            <a:ext cx="10881360" cy="1097280"/>
+          </a:xfrm>
+          <a:prstGeom prst="rect">
+            <a:avLst/>
+          </a:prstGeom>
+          <a:noFill/>
+        </p:spPr>
+        <p:txBody>
+          <a:bodyPr wrap="square">
+            <a:spAutoFit/>
+          </a:bodyPr>
+          <a:lstStyle/>
+          <a:p>
+            <a:pPr>
+              <a:defRPr sz="1300" i="1">
+                <a:solidFill>
+                  <a:srgbClr val="5A605C"/>
+                </a:solidFill>
+              </a:defRPr>
+            </a:pPr>
+            <a:r>
+              <a:t>Genuinely surprising: going all the way to 10 real countries actually did BETTER than splitting out just one - likely because Germany can now draw on many countries' cheap power at once, instead of being stuck behind one narrow link. But it still doesn't beat the original combined-zone approach on the two measures that matter most. Decision: keep the combined zone as our best, standing result.</a:t>
+            </a:r>
+          </a:p>
+        </p:txBody>
+      </p:sp>
+    </p:spTree>
+  </p:cSld>
+  <p:clrMapOvr>
+    <a:masterClrMapping/>
+  </p:clrMapOvr>
+</p:sld>
+</file>
+
+<file path=ppt/slides/slide47.xml><?xml version="1.0" encoding="utf-8"?>
 <p:sld xmlns:a="http://schemas.openxmlformats.org/drawingml/2006/main" xmlns:r="http://schemas.openxmlformats.org/officeDocument/2006/relationships" xmlns:p="http://schemas.openxmlformats.org/presentationml/2006/main">
   <p:cSld>
     <p:spTree>
@@ -12419,7 +13946,7 @@
         </p:nvGraphicFramePr>
         <p:xfrm>
           <a:off x="457200" y="1280160"/>
-          <a:ext cx="11338560" cy="2514600"/>
+          <a:ext cx="10881359" cy="2514600"/>
         </p:xfrm>
         <a:graphic>
           <a:graphicData uri="http://schemas.openxmlformats.org/drawingml/2006/table">
@@ -12428,28 +13955,28 @@
                 <a:tableStyleId>{5C22544A-7EE6-4342-B048-85BDC9FD1C3A}</a:tableStyleId>
               </a:tblPr>
               <a:tblGrid>
-                <a:gridCol w="3657600">
+                <a:gridCol w="3510116">
                   <a:extLst>
                     <a:ext uri="{9D8B030D-6E8A-4147-A177-3AD203B41FA5}">
                       <a16:colId xmlns:a16="http://schemas.microsoft.com/office/drawing/2014/main" val="20000"/>
                     </a:ext>
                   </a:extLst>
                 </a:gridCol>
-                <a:gridCol w="2468880">
+                <a:gridCol w="2369328">
                   <a:extLst>
                     <a:ext uri="{9D8B030D-6E8A-4147-A177-3AD203B41FA5}">
                       <a16:colId xmlns:a16="http://schemas.microsoft.com/office/drawing/2014/main" val="20001"/>
                     </a:ext>
                   </a:extLst>
                 </a:gridCol>
-                <a:gridCol w="2468880">
+                <a:gridCol w="2369328">
                   <a:extLst>
                     <a:ext uri="{9D8B030D-6E8A-4147-A177-3AD203B41FA5}">
                       <a16:colId xmlns:a16="http://schemas.microsoft.com/office/drawing/2014/main" val="20002"/>
                     </a:ext>
                   </a:extLst>
                 </a:gridCol>
-                <a:gridCol w="2743200">
+                <a:gridCol w="2632587">
                   <a:extLst>
                     <a:ext uri="{9D8B030D-6E8A-4147-A177-3AD203B41FA5}">
                       <a16:colId xmlns:a16="http://schemas.microsoft.com/office/drawing/2014/main" val="20003"/>
@@ -12964,7 +14491,7 @@
 </p:sld>
 </file>
 
-<file path=ppt/slides/slide43.xml><?xml version="1.0" encoding="utf-8"?>
+<file path=ppt/slides/slide48.xml><?xml version="1.0" encoding="utf-8"?>
 <p:sld xmlns:a="http://schemas.openxmlformats.org/drawingml/2006/main" xmlns:r="http://schemas.openxmlformats.org/officeDocument/2006/relationships" xmlns:p="http://schemas.openxmlformats.org/presentationml/2006/main">
   <p:cSld>
     <p:spTree>
@@ -13109,7 +14636,7 @@
           <a:noFill/>
         </p:spPr>
         <p:txBody>
-          <a:bodyPr wrap="none">
+          <a:bodyPr wrap="square">
             <a:spAutoFit/>
           </a:bodyPr>
           <a:lstStyle/>
@@ -13135,7 +14662,7 @@
 </p:sld>
 </file>
 
-<file path=ppt/slides/slide44.xml><?xml version="1.0" encoding="utf-8"?>
+<file path=ppt/slides/slide49.xml><?xml version="1.0" encoding="utf-8"?>
 <p:sld xmlns:a="http://schemas.openxmlformats.org/drawingml/2006/main" xmlns:r="http://schemas.openxmlformats.org/officeDocument/2006/relationships" xmlns:p="http://schemas.openxmlformats.org/presentationml/2006/main">
   <p:cSld>
     <p:spTree>
@@ -13318,1118 +14845,6 @@
             </a:pPr>
             <a:r>
               <a:t>•  Continue folding all findings into the formal thesis documentation</a:t>
-            </a:r>
-          </a:p>
-        </p:txBody>
-      </p:sp>
-    </p:spTree>
-  </p:cSld>
-  <p:clrMapOvr>
-    <a:masterClrMapping/>
-  </p:clrMapOvr>
-</p:sld>
-</file>
-
-<file path=ppt/slides/slide45.xml><?xml version="1.0" encoding="utf-8"?>
-<p:sld xmlns:a="http://schemas.openxmlformats.org/drawingml/2006/main" xmlns:r="http://schemas.openxmlformats.org/officeDocument/2006/relationships" xmlns:p="http://schemas.openxmlformats.org/presentationml/2006/main">
-  <p:cSld>
-    <p:spTree>
-      <p:nvGrpSpPr>
-        <p:cNvPr id="1" name=""/>
-        <p:cNvGrpSpPr/>
-        <p:nvPr/>
-      </p:nvGrpSpPr>
-      <p:grpSpPr>
-        <a:xfrm>
-          <a:off x="0" y="0"/>
-          <a:ext cx="0" cy="0"/>
-          <a:chOff x="0" y="0"/>
-          <a:chExt cx="0" cy="0"/>
-        </a:xfrm>
-      </p:grpSpPr>
-      <p:sp>
-        <p:nvSpPr>
-          <p:cNvPr id="2" name="Rectangle 1"/>
-          <p:cNvSpPr/>
-          <p:nvPr/>
-        </p:nvSpPr>
-        <p:spPr>
-          <a:xfrm>
-            <a:off x="0" y="0"/>
-            <a:ext cx="12191695" cy="960120"/>
-          </a:xfrm>
-          <a:prstGeom prst="rect">
-            <a:avLst/>
-          </a:prstGeom>
-          <a:solidFill>
-            <a:srgbClr val="1F3A4D"/>
-          </a:solidFill>
-          <a:ln>
-            <a:noFill/>
-          </a:ln>
-        </p:spPr>
-        <p:style>
-          <a:lnRef idx="1">
-            <a:schemeClr val="accent1"/>
-          </a:lnRef>
-          <a:fillRef idx="3">
-            <a:schemeClr val="accent1"/>
-          </a:fillRef>
-          <a:effectRef idx="2">
-            <a:schemeClr val="accent1"/>
-          </a:effectRef>
-          <a:fontRef idx="minor">
-            <a:schemeClr val="lt1"/>
-          </a:fontRef>
-        </p:style>
-        <p:txBody>
-          <a:bodyPr wrap="square" lIns="365760" tIns="73152" rtlCol="0" anchor="ctr"/>
-          <a:lstStyle/>
-          <a:p>
-            <a:pPr algn="ctr">
-              <a:defRPr sz="2800" b="1">
-                <a:solidFill>
-                  <a:srgbClr val="FFFFFF"/>
-                </a:solidFill>
-              </a:defRPr>
-            </a:pPr>
-            <a:r>
-              <a:t>Questions &amp; Discussion</a:t>
-            </a:r>
-          </a:p>
-        </p:txBody>
-      </p:sp>
-      <p:sp>
-        <p:nvSpPr>
-          <p:cNvPr id="3" name="TextBox 2"/>
-          <p:cNvSpPr txBox="1"/>
-          <p:nvPr/>
-        </p:nvSpPr>
-        <p:spPr>
-          <a:xfrm>
-            <a:off x="11551615" y="6446520"/>
-            <a:ext cx="457200" cy="320040"/>
-          </a:xfrm>
-          <a:prstGeom prst="rect">
-            <a:avLst/>
-          </a:prstGeom>
-          <a:noFill/>
-        </p:spPr>
-        <p:txBody>
-          <a:bodyPr wrap="none">
-            <a:spAutoFit/>
-          </a:bodyPr>
-          <a:lstStyle/>
-          <a:p>
-            <a:pPr>
-              <a:defRPr sz="1100">
-                <a:solidFill>
-                  <a:srgbClr val="5A605C"/>
-                </a:solidFill>
-              </a:defRPr>
-            </a:pPr>
-            <a:r>
-              <a:t>50</a:t>
-            </a:r>
-          </a:p>
-        </p:txBody>
-      </p:sp>
-      <p:sp>
-        <p:nvSpPr>
-          <p:cNvPr id="4" name="TextBox 3"/>
-          <p:cNvSpPr txBox="1"/>
-          <p:nvPr/>
-        </p:nvSpPr>
-        <p:spPr>
-          <a:xfrm>
-            <a:off x="502920" y="1234440"/>
-            <a:ext cx="11155680" cy="5303520"/>
-          </a:xfrm>
-          <a:prstGeom prst="rect">
-            <a:avLst/>
-          </a:prstGeom>
-          <a:noFill/>
-        </p:spPr>
-        <p:txBody>
-          <a:bodyPr wrap="square">
-            <a:spAutoFit/>
-          </a:bodyPr>
-          <a:lstStyle/>
-          <a:p>
-            <a:endParaRPr/>
-          </a:p>
-        </p:txBody>
-      </p:sp>
-    </p:spTree>
-  </p:cSld>
-  <p:clrMapOvr>
-    <a:masterClrMapping/>
-  </p:clrMapOvr>
-</p:sld>
-</file>
-
-<file path=ppt/slides/slide46.xml><?xml version="1.0" encoding="utf-8"?>
-<p:sld xmlns:a="http://schemas.openxmlformats.org/drawingml/2006/main" xmlns:p="http://schemas.openxmlformats.org/presentationml/2006/main" xmlns:r="http://schemas.openxmlformats.org/officeDocument/2006/relationships">
-  <p:cSld>
-    <p:spTree>
-      <p:nvGrpSpPr>
-        <p:cNvPr id="1" name=""/>
-        <p:cNvGrpSpPr/>
-        <p:nvPr/>
-      </p:nvGrpSpPr>
-      <p:grpSpPr/>
-      <p:sp>
-        <p:nvSpPr>
-          <p:cNvPr id="2" name="Rectangle 1"/>
-          <p:cNvSpPr/>
-          <p:nvPr/>
-        </p:nvSpPr>
-        <p:spPr>
-          <a:xfrm>
-            <a:off x="0" y="0"/>
-            <a:ext cx="12192000" cy="960120"/>
-          </a:xfrm>
-          <a:prstGeom prst="rect">
-            <a:avLst/>
-          </a:prstGeom>
-          <a:solidFill>
-            <a:srgbClr val="1F3A4D"/>
-          </a:solidFill>
-          <a:ln>
-            <a:noFill/>
-          </a:ln>
-        </p:spPr>
-        <p:style>
-          <a:lnRef idx="1">
-            <a:schemeClr val="accent1"/>
-          </a:lnRef>
-          <a:fillRef idx="3">
-            <a:schemeClr val="accent1"/>
-          </a:fillRef>
-          <a:effectRef idx="2">
-            <a:schemeClr val="accent1"/>
-          </a:effectRef>
-          <a:fontRef idx="minor">
-            <a:schemeClr val="lt1"/>
-          </a:fontRef>
-        </p:style>
-        <p:txBody>
-          <a:bodyPr rtlCol="0" anchor="ctr" lIns="365760" tIns="73152" wrap="square"/>
-          <a:lstStyle/>
-          <a:p>
-            <a:pPr algn="ctr">
-              <a:defRPr sz="2600" b="1">
-                <a:solidFill>
-                  <a:srgbClr val="FFFFFF"/>
-                </a:solidFill>
-              </a:defRPr>
-            </a:pPr>
-            <a:r>
-              <a:t>One More Lead: Could the Other Side's Own Storage Explain the Gap?</a:t>
-            </a:r>
-          </a:p>
-          <a:p>
-            <a:pPr>
-              <a:defRPr sz="1400">
-                <a:solidFill>
-                  <a:srgbClr val="C8D2DA"/>
-                </a:solidFill>
-              </a:defRPr>
-            </a:pPr>
-            <a:r>
-              <a:t>A real, testable idea - checked and ruled out</a:t>
-            </a:r>
-          </a:p>
-        </p:txBody>
-      </p:sp>
-      <p:sp>
-        <p:nvSpPr>
-          <p:cNvPr id="3" name="TextBox 2"/>
-          <p:cNvSpPr txBox="1"/>
-          <p:nvPr/>
-        </p:nvSpPr>
-        <p:spPr>
-          <a:xfrm>
-            <a:off x="11551920" y="6446520"/>
-            <a:ext cx="457200" cy="320040"/>
-          </a:xfrm>
-          <a:prstGeom prst="rect">
-            <a:avLst/>
-          </a:prstGeom>
-          <a:noFill/>
-        </p:spPr>
-        <p:txBody>
-          <a:bodyPr wrap="none">
-            <a:spAutoFit/>
-          </a:bodyPr>
-          <a:lstStyle/>
-          <a:p>
-            <a:pPr>
-              <a:defRPr sz="1100">
-                <a:solidFill>
-                  <a:srgbClr val="5A605C"/>
-                </a:solidFill>
-              </a:defRPr>
-            </a:pPr>
-            <a:r>
-              <a:t>42</a:t>
-            </a:r>
-          </a:p>
-        </p:txBody>
-      </p:sp>
-      <p:sp>
-        <p:nvSpPr>
-          <p:cNvPr id="4" name="TextBox 3"/>
-          <p:cNvSpPr txBox="1"/>
-          <p:nvPr/>
-        </p:nvSpPr>
-        <p:spPr>
-          <a:xfrm>
-            <a:off x="502920" y="1234440"/>
-            <a:ext cx="11155680" cy="5303520"/>
-          </a:xfrm>
-          <a:prstGeom prst="rect">
-            <a:avLst/>
-          </a:prstGeom>
-          <a:noFill/>
-        </p:spPr>
-        <p:txBody>
-          <a:bodyPr wrap="square">
-            <a:spAutoFit/>
-          </a:bodyPr>
-          <a:lstStyle/>
-          <a:p>
-            <a:pPr>
-              <a:spcAft>
-                <a:spcPts val="1000"/>
-              </a:spcAft>
-              <a:defRPr sz="1800" b="1">
-                <a:solidFill>
-                  <a:srgbClr val="1E2220"/>
-                </a:solidFill>
-              </a:defRPr>
-            </a:pPr>
-            <a:r>
-              <a:t>•  The one open thread from before: a small number of extreme hours where Germany imports less than it could, even with spare capacity available</a:t>
-            </a:r>
-          </a:p>
-          <a:p>
-            <a:pPr>
-              <a:spcAft>
-                <a:spcPts val="1000"/>
-              </a:spcAft>
-              <a:defRPr sz="1800" b="1">
-                <a:solidFill>
-                  <a:srgbClr val="1E2220"/>
-                </a:solidFill>
-              </a:defRPr>
-            </a:pPr>
-            <a:r>
-              <a:t>•  Tested directly using data already on hand: is the rest of Europe's own storage running physically empty during those hours?</a:t>
-            </a:r>
-          </a:p>
-          <a:p>
-            <a:pPr>
-              <a:spcAft>
-                <a:spcPts val="1000"/>
-              </a:spcAft>
-              <a:defRPr sz="1800" b="1">
-                <a:solidFill>
-                  <a:srgbClr val="1E2220"/>
-                </a:solidFill>
-              </a:defRPr>
-            </a:pPr>
-            <a:r>
-              <a:t>•  Checked both battery-style storage and reservoir hydro on the other side of the border - neither ever comes close to its own physical limit, in either year tested</a:t>
-            </a:r>
-          </a:p>
-          <a:p>
-            <a:pPr>
-              <a:spcAft>
-                <a:spcPts val="1000"/>
-              </a:spcAft>
-              <a:defRPr sz="1800" b="1">
-                <a:solidFill>
-                  <a:srgbClr val="1E2220"/>
-                </a:solidFill>
-              </a:defRPr>
-            </a:pPr>
-            <a:r>
-              <a:t>•  Rules out 'the other side simply has nothing left to give' - strengthens the case that the real limiter is inside the model's own internal trading logic, not a real-world capacity constraint anywhere</a:t>
-            </a:r>
-          </a:p>
-        </p:txBody>
-      </p:sp>
-    </p:spTree>
-  </p:cSld>
-  <p:clrMapOvr>
-    <a:masterClrMapping/>
-  </p:clrMapOvr>
-</p:sld>
-</file>
-
-<file path=ppt/slides/slide47.xml><?xml version="1.0" encoding="utf-8"?>
-<p:sld xmlns:a="http://schemas.openxmlformats.org/drawingml/2006/main" xmlns:p="http://schemas.openxmlformats.org/presentationml/2006/main" xmlns:r="http://schemas.openxmlformats.org/officeDocument/2006/relationships">
-  <p:cSld>
-    <p:spTree>
-      <p:nvGrpSpPr>
-        <p:cNvPr id="1" name=""/>
-        <p:cNvGrpSpPr/>
-        <p:nvPr/>
-      </p:nvGrpSpPr>
-      <p:grpSpPr/>
-      <p:sp>
-        <p:nvSpPr>
-          <p:cNvPr id="2" name="Rectangle 1"/>
-          <p:cNvSpPr/>
-          <p:nvPr/>
-        </p:nvSpPr>
-        <p:spPr>
-          <a:xfrm>
-            <a:off x="0" y="0"/>
-            <a:ext cx="12192000" cy="960120"/>
-          </a:xfrm>
-          <a:prstGeom prst="rect">
-            <a:avLst/>
-          </a:prstGeom>
-          <a:solidFill>
-            <a:srgbClr val="1F3A4D"/>
-          </a:solidFill>
-          <a:ln>
-            <a:noFill/>
-          </a:ln>
-        </p:spPr>
-        <p:style>
-          <a:lnRef idx="1">
-            <a:schemeClr val="accent1"/>
-          </a:lnRef>
-          <a:fillRef idx="3">
-            <a:schemeClr val="accent1"/>
-          </a:fillRef>
-          <a:effectRef idx="2">
-            <a:schemeClr val="accent1"/>
-          </a:effectRef>
-          <a:fontRef idx="minor">
-            <a:schemeClr val="lt1"/>
-          </a:fontRef>
-        </p:style>
-        <p:txBody>
-          <a:bodyPr rtlCol="0" anchor="ctr" lIns="365760" tIns="73152" wrap="square"/>
-          <a:lstStyle/>
-          <a:p>
-            <a:pPr algn="ctr">
-              <a:defRPr sz="2600" b="1">
-                <a:solidFill>
-                  <a:srgbClr val="FFFFFF"/>
-                </a:solidFill>
-              </a:defRPr>
-            </a:pPr>
-            <a:r>
-              <a:t>Pushing Further: Replacing the Combined Zone With a Real Named Country</a:t>
-            </a:r>
-          </a:p>
-          <a:p>
-            <a:pPr>
-              <a:defRPr sz="1400">
-                <a:solidFill>
-                  <a:srgbClr val="C8D2DA"/>
-                </a:solidFill>
-              </a:defRPr>
-            </a:pPr>
-            <a:r>
-              <a:t>Testing whether more realism helps, or whether the combined approach was already the right call</a:t>
-            </a:r>
-          </a:p>
-        </p:txBody>
-      </p:sp>
-      <p:sp>
-        <p:nvSpPr>
-          <p:cNvPr id="3" name="TextBox 2"/>
-          <p:cNvSpPr txBox="1"/>
-          <p:nvPr/>
-        </p:nvSpPr>
-        <p:spPr>
-          <a:xfrm>
-            <a:off x="11551920" y="6446520"/>
-            <a:ext cx="457200" cy="320040"/>
-          </a:xfrm>
-          <a:prstGeom prst="rect">
-            <a:avLst/>
-          </a:prstGeom>
-          <a:noFill/>
-        </p:spPr>
-        <p:txBody>
-          <a:bodyPr wrap="none">
-            <a:spAutoFit/>
-          </a:bodyPr>
-          <a:lstStyle/>
-          <a:p>
-            <a:pPr>
-              <a:defRPr sz="1100">
-                <a:solidFill>
-                  <a:srgbClr val="5A605C"/>
-                </a:solidFill>
-              </a:defRPr>
-            </a:pPr>
-            <a:r>
-              <a:t>43</a:t>
-            </a:r>
-          </a:p>
-        </p:txBody>
-      </p:sp>
-      <p:sp>
-        <p:nvSpPr>
-          <p:cNvPr id="4" name="TextBox 3"/>
-          <p:cNvSpPr txBox="1"/>
-          <p:nvPr/>
-        </p:nvSpPr>
-        <p:spPr>
-          <a:xfrm>
-            <a:off x="502920" y="1234440"/>
-            <a:ext cx="11155680" cy="5303520"/>
-          </a:xfrm>
-          <a:prstGeom prst="rect">
-            <a:avLst/>
-          </a:prstGeom>
-          <a:noFill/>
-        </p:spPr>
-        <p:txBody>
-          <a:bodyPr wrap="square">
-            <a:spAutoFit/>
-          </a:bodyPr>
-          <a:lstStyle/>
-          <a:p>
-            <a:pPr>
-              <a:spcAft>
-                <a:spcPts val="1000"/>
-              </a:spcAft>
-              <a:defRPr sz="1800" b="1">
-                <a:solidFill>
-                  <a:srgbClr val="1E2220"/>
-                </a:solidFill>
-              </a:defRPr>
-            </a:pPr>
-            <a:r>
-              <a:t>•  Everything so far treated 'the rest of Europe' as one combined stand-in - the next real question: does splitting out a real neighbour by name do any better?</a:t>
-            </a:r>
-          </a:p>
-          <a:p>
-            <a:pPr>
-              <a:spcAft>
-                <a:spcPts val="1000"/>
-              </a:spcAft>
-              <a:defRPr sz="1800" b="1">
-                <a:solidFill>
-                  <a:srgbClr val="1E2220"/>
-                </a:solidFill>
-              </a:defRPr>
-            </a:pPr>
-            <a:r>
-              <a:t>•  Chose France as the test case: the largest single economy involved, and the one country with enough real, already-sourced data to build immediately</a:t>
-            </a:r>
-          </a:p>
-          <a:p>
-            <a:pPr>
-              <a:spcAft>
-                <a:spcPts val="1000"/>
-              </a:spcAft>
-              <a:defRPr sz="1800" b="1">
-                <a:solidFill>
-                  <a:srgbClr val="1E2220"/>
-                </a:solidFill>
-              </a:defRPr>
-            </a:pPr>
-            <a:r>
-              <a:t>•  Built it properly: France's own real power plants, real demand, real weather-driven renewables, and a real border link to Germany - not a shortcut</a:t>
-            </a:r>
-          </a:p>
-        </p:txBody>
-      </p:sp>
-    </p:spTree>
-  </p:cSld>
-  <p:clrMapOvr>
-    <a:masterClrMapping/>
-  </p:clrMapOvr>
-</p:sld>
-</file>
-
-<file path=ppt/slides/slide48.xml><?xml version="1.0" encoding="utf-8"?>
-<p:sld xmlns:a="http://schemas.openxmlformats.org/drawingml/2006/main" xmlns:p="http://schemas.openxmlformats.org/presentationml/2006/main" xmlns:r="http://schemas.openxmlformats.org/officeDocument/2006/relationships">
-  <p:cSld>
-    <p:spTree>
-      <p:nvGrpSpPr>
-        <p:cNvPr id="1" name=""/>
-        <p:cNvGrpSpPr/>
-        <p:nvPr/>
-      </p:nvGrpSpPr>
-      <p:grpSpPr/>
-      <p:sp>
-        <p:nvSpPr>
-          <p:cNvPr id="2" name="Rectangle 1"/>
-          <p:cNvSpPr/>
-          <p:nvPr/>
-        </p:nvSpPr>
-        <p:spPr>
-          <a:xfrm>
-            <a:off x="0" y="0"/>
-            <a:ext cx="12192000" cy="960120"/>
-          </a:xfrm>
-          <a:prstGeom prst="rect">
-            <a:avLst/>
-          </a:prstGeom>
-          <a:solidFill>
-            <a:srgbClr val="1F3A4D"/>
-          </a:solidFill>
-          <a:ln>
-            <a:noFill/>
-          </a:ln>
-        </p:spPr>
-        <p:style>
-          <a:lnRef idx="1">
-            <a:schemeClr val="accent1"/>
-          </a:lnRef>
-          <a:fillRef idx="3">
-            <a:schemeClr val="accent1"/>
-          </a:fillRef>
-          <a:effectRef idx="2">
-            <a:schemeClr val="accent1"/>
-          </a:effectRef>
-          <a:fontRef idx="minor">
-            <a:schemeClr val="lt1"/>
-          </a:fontRef>
-        </p:style>
-        <p:txBody>
-          <a:bodyPr rtlCol="0" anchor="ctr" lIns="365760" tIns="73152" wrap="square"/>
-          <a:lstStyle/>
-          <a:p>
-            <a:pPr algn="ctr">
-              <a:defRPr sz="2600" b="1">
-                <a:solidFill>
-                  <a:srgbClr val="FFFFFF"/>
-                </a:solidFill>
-              </a:defRPr>
-            </a:pPr>
-            <a:r>
-              <a:t>Result: A Real Step Backward - With a Clear, Understood Reason</a:t>
-            </a:r>
-          </a:p>
-          <a:p>
-            <a:pPr>
-              <a:defRPr sz="1400">
-                <a:solidFill>
-                  <a:srgbClr val="C8D2DA"/>
-                </a:solidFill>
-              </a:defRPr>
-            </a:pPr>
-            <a:r>
-              <a:t>Splitting France out on its own made things worse, not better</a:t>
-            </a:r>
-          </a:p>
-        </p:txBody>
-      </p:sp>
-      <p:sp>
-        <p:nvSpPr>
-          <p:cNvPr id="3" name="TextBox 2"/>
-          <p:cNvSpPr txBox="1"/>
-          <p:nvPr/>
-        </p:nvSpPr>
-        <p:spPr>
-          <a:xfrm>
-            <a:off x="11551920" y="6446520"/>
-            <a:ext cx="457200" cy="320040"/>
-          </a:xfrm>
-          <a:prstGeom prst="rect">
-            <a:avLst/>
-          </a:prstGeom>
-          <a:noFill/>
-        </p:spPr>
-        <p:txBody>
-          <a:bodyPr wrap="none">
-            <a:spAutoFit/>
-          </a:bodyPr>
-          <a:lstStyle/>
-          <a:p>
-            <a:pPr>
-              <a:defRPr sz="1100">
-                <a:solidFill>
-                  <a:srgbClr val="5A605C"/>
-                </a:solidFill>
-              </a:defRPr>
-            </a:pPr>
-            <a:r>
-              <a:t>44</a:t>
-            </a:r>
-          </a:p>
-        </p:txBody>
-      </p:sp>
-      <p:graphicFrame>
-        <p:nvGraphicFramePr>
-          <p:cNvPr id="4" name="Table 3"/>
-          <p:cNvGraphicFramePr>
-            <a:graphicFrameLocks noGrp="1"/>
-          </p:cNvGraphicFramePr>
-          <p:nvPr/>
-        </p:nvGraphicFramePr>
-        <p:xfrm>
-          <a:off x="640080" y="1371600"/>
-          <a:ext cx="12252960" cy="1508760"/>
-        </p:xfrm>
-        <a:graphic>
-          <a:graphicData uri="http://schemas.openxmlformats.org/drawingml/2006/table">
-            <a:tbl>
-              <a:tblPr firstRow="1" bandRow="1">
-                <a:tableStyleId>{5C22544A-7EE6-4342-B048-85BDC9FD1C3A}</a:tableStyleId>
-              </a:tblPr>
-              <a:tblGrid>
-                <a:gridCol w="4937760"/>
-                <a:gridCol w="3657600"/>
-                <a:gridCol w="3657600"/>
-              </a:tblGrid>
-              <a:tr h="502920">
-                <a:tc>
-                  <a:txBody>
-                    <a:bodyPr/>
-                    <a:lstStyle/>
-                    <a:p>
-                      <a:pPr algn="ctr">
-                        <a:defRPr b="1" sz="1300">
-                          <a:solidFill>
-                            <a:srgbClr val="FFFFFF"/>
-                          </a:solidFill>
-                        </a:defRPr>
-                      </a:pPr>
-                    </a:p>
-                  </a:txBody>
-                  <a:tcPr>
-                    <a:solidFill>
-                      <a:srgbClr val="1F3A4D"/>
-                    </a:solidFill>
-                  </a:tcPr>
-                </a:tc>
-                <a:tc>
-                  <a:txBody>
-                    <a:bodyPr/>
-                    <a:lstStyle/>
-                    <a:p>
-                      <a:pPr algn="ctr">
-                        <a:defRPr b="1" sz="1300">
-                          <a:solidFill>
-                            <a:srgbClr val="FFFFFF"/>
-                          </a:solidFill>
-                        </a:defRPr>
-                      </a:pPr>
-                      <a:r>
-                        <a:t>Combined zone (best result)</a:t>
-                      </a:r>
-                    </a:p>
-                  </a:txBody>
-                  <a:tcPr>
-                    <a:solidFill>
-                      <a:srgbClr val="1F3A4D"/>
-                    </a:solidFill>
-                  </a:tcPr>
-                </a:tc>
-                <a:tc>
-                  <a:txBody>
-                    <a:bodyPr/>
-                    <a:lstStyle/>
-                    <a:p>
-                      <a:pPr algn="ctr">
-                        <a:defRPr b="1" sz="1300">
-                          <a:solidFill>
-                            <a:srgbClr val="FFFFFF"/>
-                          </a:solidFill>
-                        </a:defRPr>
-                      </a:pPr>
-                      <a:r>
-                        <a:t>France split out separately</a:t>
-                      </a:r>
-                    </a:p>
-                  </a:txBody>
-                  <a:tcPr>
-                    <a:solidFill>
-                      <a:srgbClr val="1F3A4D"/>
-                    </a:solidFill>
-                  </a:tcPr>
-                </a:tc>
-              </a:tr>
-              <a:tr h="502920">
-                <a:tc>
-                  <a:txBody>
-                    <a:bodyPr/>
-                    <a:lstStyle/>
-                    <a:p>
-                      <a:pPr algn="ctr">
-                        <a:defRPr sz="1200" b="1">
-                          <a:solidFill>
-                            <a:srgbClr val="1E2220"/>
-                          </a:solidFill>
-                        </a:defRPr>
-                      </a:pPr>
-                      <a:r>
-                        <a:t>'Ran out of power' hours</a:t>
-                      </a:r>
-                    </a:p>
-                  </a:txBody>
-                  <a:tcPr>
-                    <a:solidFill>
-                      <a:srgbClr val="FFFFFF"/>
-                    </a:solidFill>
-                  </a:tcPr>
-                </a:tc>
-                <a:tc>
-                  <a:txBody>
-                    <a:bodyPr/>
-                    <a:lstStyle/>
-                    <a:p>
-                      <a:pPr algn="ctr">
-                        <a:defRPr sz="1200" b="0">
-                          <a:solidFill>
-                            <a:srgbClr val="1E2220"/>
-                          </a:solidFill>
-                        </a:defRPr>
-                      </a:pPr>
-                      <a:r>
-                        <a:t>7</a:t>
-                      </a:r>
-                    </a:p>
-                  </a:txBody>
-                  <a:tcPr>
-                    <a:solidFill>
-                      <a:srgbClr val="FFFFFF"/>
-                    </a:solidFill>
-                  </a:tcPr>
-                </a:tc>
-                <a:tc>
-                  <a:txBody>
-                    <a:bodyPr/>
-                    <a:lstStyle/>
-                    <a:p>
-                      <a:pPr algn="ctr">
-                        <a:defRPr sz="1200" b="0">
-                          <a:solidFill>
-                            <a:srgbClr val="1E2220"/>
-                          </a:solidFill>
-                        </a:defRPr>
-                      </a:pPr>
-                      <a:r>
-                        <a:t>167</a:t>
-                      </a:r>
-                    </a:p>
-                  </a:txBody>
-                  <a:tcPr>
-                    <a:solidFill>
-                      <a:srgbClr val="FFFFFF"/>
-                    </a:solidFill>
-                  </a:tcPr>
-                </a:tc>
-              </a:tr>
-              <a:tr h="502920">
-                <a:tc>
-                  <a:txBody>
-                    <a:bodyPr/>
-                    <a:lstStyle/>
-                    <a:p>
-                      <a:pPr algn="ctr">
-                        <a:defRPr sz="1200" b="1">
-                          <a:solidFill>
-                            <a:srgbClr val="1E2220"/>
-                          </a:solidFill>
-                        </a:defRPr>
-                      </a:pPr>
-                      <a:r>
-                        <a:t>Average price gap on ordinary days</a:t>
-                      </a:r>
-                    </a:p>
-                  </a:txBody>
-                  <a:tcPr>
-                    <a:solidFill>
-                      <a:srgbClr val="EEF0E9"/>
-                    </a:solidFill>
-                  </a:tcPr>
-                </a:tc>
-                <a:tc>
-                  <a:txBody>
-                    <a:bodyPr/>
-                    <a:lstStyle/>
-                    <a:p>
-                      <a:pPr algn="ctr">
-                        <a:defRPr sz="1200" b="0">
-                          <a:solidFill>
-                            <a:srgbClr val="1E2220"/>
-                          </a:solidFill>
-                        </a:defRPr>
-                      </a:pPr>
-                      <a:r>
-                        <a:t>-2.90</a:t>
-                      </a:r>
-                    </a:p>
-                  </a:txBody>
-                  <a:tcPr>
-                    <a:solidFill>
-                      <a:srgbClr val="EEF0E9"/>
-                    </a:solidFill>
-                  </a:tcPr>
-                </a:tc>
-                <a:tc>
-                  <a:txBody>
-                    <a:bodyPr/>
-                    <a:lstStyle/>
-                    <a:p>
-                      <a:pPr algn="ctr">
-                        <a:defRPr sz="1200" b="0">
-                          <a:solidFill>
-                            <a:srgbClr val="1E2220"/>
-                          </a:solidFill>
-                        </a:defRPr>
-                      </a:pPr>
-                      <a:r>
-                        <a:t>+9.65</a:t>
-                      </a:r>
-                    </a:p>
-                  </a:txBody>
-                  <a:tcPr>
-                    <a:solidFill>
-                      <a:srgbClr val="EEF0E9"/>
-                    </a:solidFill>
-                  </a:tcPr>
-                </a:tc>
-              </a:tr>
-            </a:tbl>
-          </a:graphicData>
-        </a:graphic>
-      </p:graphicFrame>
-      <p:sp>
-        <p:nvSpPr>
-          <p:cNvPr id="5" name="TextBox 4"/>
-          <p:cNvSpPr txBox="1"/>
-          <p:nvPr/>
-        </p:nvSpPr>
-        <p:spPr>
-          <a:xfrm>
-            <a:off x="640080" y="3063240"/>
-            <a:ext cx="10881360" cy="1097280"/>
-          </a:xfrm>
-          <a:prstGeom prst="rect">
-            <a:avLst/>
-          </a:prstGeom>
-          <a:noFill/>
-        </p:spPr>
-        <p:txBody>
-          <a:bodyPr wrap="none">
-            <a:spAutoFit/>
-          </a:bodyPr>
-          <a:lstStyle/>
-          <a:p>
-            <a:pPr>
-              <a:defRPr sz="1300" i="1">
-                <a:solidFill>
-                  <a:srgbClr val="5A605C"/>
-                </a:solidFill>
-              </a:defRPr>
-            </a:pPr>
-            <a:r>
-              <a:t>Real, checked reason: France's own huge nuclear fleet used to help keep the WHOLE combined pool well-supplied. Pulled out on its own, the remaining combined zone lost that cushion and became genuinely short more often - while France's own surplus, now only linked directly to Germany by a narrow border, couldn't reach the rest of Europe to help there either.</a:t>
-            </a:r>
-          </a:p>
-        </p:txBody>
-      </p:sp>
-    </p:spTree>
-  </p:cSld>
-  <p:clrMapOvr>
-    <a:masterClrMapping/>
-  </p:clrMapOvr>
-</p:sld>
-</file>
-
-<file path=ppt/slides/slide49.xml><?xml version="1.0" encoding="utf-8"?>
-<p:sld xmlns:a="http://schemas.openxmlformats.org/drawingml/2006/main" xmlns:p="http://schemas.openxmlformats.org/presentationml/2006/main" xmlns:r="http://schemas.openxmlformats.org/officeDocument/2006/relationships">
-  <p:cSld>
-    <p:spTree>
-      <p:nvGrpSpPr>
-        <p:cNvPr id="1" name=""/>
-        <p:cNvGrpSpPr/>
-        <p:nvPr/>
-      </p:nvGrpSpPr>
-      <p:grpSpPr/>
-      <p:sp>
-        <p:nvSpPr>
-          <p:cNvPr id="2" name="Rectangle 1"/>
-          <p:cNvSpPr/>
-          <p:nvPr/>
-        </p:nvSpPr>
-        <p:spPr>
-          <a:xfrm>
-            <a:off x="0" y="0"/>
-            <a:ext cx="12192000" cy="960120"/>
-          </a:xfrm>
-          <a:prstGeom prst="rect">
-            <a:avLst/>
-          </a:prstGeom>
-          <a:solidFill>
-            <a:srgbClr val="1F3A4D"/>
-          </a:solidFill>
-          <a:ln>
-            <a:noFill/>
-          </a:ln>
-        </p:spPr>
-        <p:style>
-          <a:lnRef idx="1">
-            <a:schemeClr val="accent1"/>
-          </a:lnRef>
-          <a:fillRef idx="3">
-            <a:schemeClr val="accent1"/>
-          </a:fillRef>
-          <a:effectRef idx="2">
-            <a:schemeClr val="accent1"/>
-          </a:effectRef>
-          <a:fontRef idx="minor">
-            <a:schemeClr val="lt1"/>
-          </a:fontRef>
-        </p:style>
-        <p:txBody>
-          <a:bodyPr rtlCol="0" anchor="ctr" lIns="365760" tIns="73152" wrap="square"/>
-          <a:lstStyle/>
-          <a:p>
-            <a:pPr algn="ctr">
-              <a:defRPr sz="2600" b="1">
-                <a:solidFill>
-                  <a:srgbClr val="FFFFFF"/>
-                </a:solidFill>
-              </a:defRPr>
-            </a:pPr>
-            <a:r>
-              <a:t>Going All the Way: All 10 Real Neighbouring Countries at Once</a:t>
-            </a:r>
-          </a:p>
-          <a:p>
-            <a:pPr>
-              <a:defRPr sz="1400">
-                <a:solidFill>
-                  <a:srgbClr val="C8D2DA"/>
-                </a:solidFill>
-              </a:defRPr>
-            </a:pPr>
-            <a:r>
-              <a:t>A genuine engineering problem, found, diagnosed, and fixed along the way</a:t>
-            </a:r>
-          </a:p>
-        </p:txBody>
-      </p:sp>
-      <p:sp>
-        <p:nvSpPr>
-          <p:cNvPr id="3" name="TextBox 2"/>
-          <p:cNvSpPr txBox="1"/>
-          <p:nvPr/>
-        </p:nvSpPr>
-        <p:spPr>
-          <a:xfrm>
-            <a:off x="11551920" y="6446520"/>
-            <a:ext cx="457200" cy="320040"/>
-          </a:xfrm>
-          <a:prstGeom prst="rect">
-            <a:avLst/>
-          </a:prstGeom>
-          <a:noFill/>
-        </p:spPr>
-        <p:txBody>
-          <a:bodyPr wrap="none">
-            <a:spAutoFit/>
-          </a:bodyPr>
-          <a:lstStyle/>
-          <a:p>
-            <a:pPr>
-              <a:defRPr sz="1100">
-                <a:solidFill>
-                  <a:srgbClr val="5A605C"/>
-                </a:solidFill>
-              </a:defRPr>
-            </a:pPr>
-            <a:r>
-              <a:t>45</a:t>
-            </a:r>
-          </a:p>
-        </p:txBody>
-      </p:sp>
-      <p:sp>
-        <p:nvSpPr>
-          <p:cNvPr id="4" name="TextBox 3"/>
-          <p:cNvSpPr txBox="1"/>
-          <p:nvPr/>
-        </p:nvSpPr>
-        <p:spPr>
-          <a:xfrm>
-            <a:off x="502920" y="1234440"/>
-            <a:ext cx="11155680" cy="5303520"/>
-          </a:xfrm>
-          <a:prstGeom prst="rect">
-            <a:avLst/>
-          </a:prstGeom>
-          <a:noFill/>
-        </p:spPr>
-        <p:txBody>
-          <a:bodyPr wrap="square">
-            <a:spAutoFit/>
-          </a:bodyPr>
-          <a:lstStyle/>
-          <a:p>
-            <a:pPr>
-              <a:spcAft>
-                <a:spcPts val="1000"/>
-              </a:spcAft>
-              <a:defRPr sz="1800" b="1">
-                <a:solidFill>
-                  <a:srgbClr val="1E2220"/>
-                </a:solidFill>
-              </a:defRPr>
-            </a:pPr>
-            <a:r>
-              <a:t>•  Since one real country made things worse for a clear, understood reason, the natural next test: does the SAME problem get worse - or does something different happen - once every real neighbour is split out?</a:t>
-            </a:r>
-          </a:p>
-          <a:p>
-            <a:pPr>
-              <a:spcAft>
-                <a:spcPts val="1000"/>
-              </a:spcAft>
-              <a:defRPr sz="1800" b="1">
-                <a:solidFill>
-                  <a:srgbClr val="1E2220"/>
-                </a:solidFill>
-              </a:defRPr>
-            </a:pPr>
-            <a:r>
-              <a:t>•  Built all 10 real countries as their own separate zones - the largest build of the whole project</a:t>
-            </a:r>
-          </a:p>
-          <a:p>
-            <a:pPr>
-              <a:spcAft>
-                <a:spcPts val="1000"/>
-              </a:spcAft>
-              <a:defRPr sz="1800" b="1">
-                <a:solidFill>
-                  <a:srgbClr val="1E2220"/>
-                </a:solidFill>
-              </a:defRPr>
-            </a:pPr>
-            <a:r>
-              <a:t>•  Hit a genuine, hard technical bug along the way: the model's own dispatch engine broke down for one specific country (Denmark) - traced directly to Denmark's real hydro power being far too small in absolute terms for the model to handle reliably</a:t>
-            </a:r>
-          </a:p>
-          <a:p>
-            <a:pPr>
-              <a:spcAft>
-                <a:spcPts val="1000"/>
-              </a:spcAft>
-              <a:defRPr sz="1800" b="1">
-                <a:solidFill>
-                  <a:srgbClr val="1E2220"/>
-                </a:solidFill>
-              </a:defRPr>
-            </a:pPr>
-            <a:r>
-              <a:t>•  Fixed with a clearly labelled, honestly-flagged technical workaround (not real data) - confirmed the fix worked, then completed the full 10-country run</a:t>
             </a:r>
           </a:p>
         </p:txBody>
@@ -14593,7 +15008,7 @@
 </file>
 
 <file path=ppt/slides/slide50.xml><?xml version="1.0" encoding="utf-8"?>
-<p:sld xmlns:a="http://schemas.openxmlformats.org/drawingml/2006/main" xmlns:p="http://schemas.openxmlformats.org/presentationml/2006/main" xmlns:r="http://schemas.openxmlformats.org/officeDocument/2006/relationships">
+<p:sld xmlns:a="http://schemas.openxmlformats.org/drawingml/2006/main" xmlns:r="http://schemas.openxmlformats.org/officeDocument/2006/relationships" xmlns:p="http://schemas.openxmlformats.org/presentationml/2006/main">
   <p:cSld>
     <p:spTree>
       <p:nvGrpSpPr>
@@ -14601,7 +15016,14 @@
         <p:cNvGrpSpPr/>
         <p:nvPr/>
       </p:nvGrpSpPr>
-      <p:grpSpPr/>
+      <p:grpSpPr>
+        <a:xfrm>
+          <a:off x="0" y="0"/>
+          <a:ext cx="0" cy="0"/>
+          <a:chOff x="0" y="0"/>
+          <a:chExt cx="0" cy="0"/>
+        </a:xfrm>
+      </p:grpSpPr>
       <p:sp>
         <p:nvSpPr>
           <p:cNvPr id="2" name="Rectangle 1"/>
@@ -14611,7 +15033,7 @@
         <p:spPr>
           <a:xfrm>
             <a:off x="0" y="0"/>
-            <a:ext cx="12192000" cy="960120"/>
+            <a:ext cx="12191695" cy="960120"/>
           </a:xfrm>
           <a:prstGeom prst="rect">
             <a:avLst/>
@@ -14638,30 +15060,18 @@
           </a:fontRef>
         </p:style>
         <p:txBody>
-          <a:bodyPr rtlCol="0" anchor="ctr" lIns="365760" tIns="73152" wrap="square"/>
+          <a:bodyPr wrap="square" lIns="365760" tIns="73152" rtlCol="0" anchor="ctr"/>
           <a:lstStyle/>
           <a:p>
             <a:pPr algn="ctr">
-              <a:defRPr sz="2600" b="1">
+              <a:defRPr sz="2800" b="1">
                 <a:solidFill>
                   <a:srgbClr val="FFFFFF"/>
                 </a:solidFill>
               </a:defRPr>
             </a:pPr>
             <a:r>
-              <a:t>Result: Better Than Expected - But Still Not the Winning Approach</a:t>
-            </a:r>
-          </a:p>
-          <a:p>
-            <a:pPr>
-              <a:defRPr sz="1400">
-                <a:solidFill>
-                  <a:srgbClr val="C8D2DA"/>
-                </a:solidFill>
-              </a:defRPr>
-            </a:pPr>
-            <a:r>
-              <a:t>Splitting into all 10 real countries beat the single-country attempt on every measure but one</a:t>
+              <a:t>Questions &amp; Discussion</a:t>
             </a:r>
           </a:p>
         </p:txBody>
@@ -14674,7 +15084,7 @@
         </p:nvSpPr>
         <p:spPr>
           <a:xfrm>
-            <a:off x="11551920" y="6446520"/>
+            <a:off x="11551615" y="6446520"/>
             <a:ext cx="457200" cy="320040"/>
           </a:xfrm>
           <a:prstGeom prst="rect">
@@ -14696,422 +15106,21 @@
               </a:defRPr>
             </a:pPr>
             <a:r>
-              <a:t>46</a:t>
-            </a:r>
-          </a:p>
-        </p:txBody>
-      </p:sp>
-      <p:graphicFrame>
-        <p:nvGraphicFramePr>
-          <p:cNvPr id="4" name="Table 3"/>
-          <p:cNvGraphicFramePr>
-            <a:graphicFrameLocks noGrp="1"/>
-          </p:cNvGraphicFramePr>
-          <p:nvPr/>
-        </p:nvGraphicFramePr>
-        <p:xfrm>
-          <a:off x="640080" y="1371600"/>
-          <a:ext cx="14173200" cy="2011680"/>
-        </p:xfrm>
-        <a:graphic>
-          <a:graphicData uri="http://schemas.openxmlformats.org/drawingml/2006/table">
-            <a:tbl>
-              <a:tblPr firstRow="1" bandRow="1">
-                <a:tableStyleId>{5C22544A-7EE6-4342-B048-85BDC9FD1C3A}</a:tableStyleId>
-              </a:tblPr>
-              <a:tblGrid>
-                <a:gridCol w="4572000"/>
-                <a:gridCol w="3200400"/>
-                <a:gridCol w="3200400"/>
-                <a:gridCol w="3200400"/>
-              </a:tblGrid>
-              <a:tr h="502920">
-                <a:tc>
-                  <a:txBody>
-                    <a:bodyPr/>
-                    <a:lstStyle/>
-                    <a:p>
-                      <a:pPr algn="ctr">
-                        <a:defRPr b="1" sz="1300">
-                          <a:solidFill>
-                            <a:srgbClr val="FFFFFF"/>
-                          </a:solidFill>
-                        </a:defRPr>
-                      </a:pPr>
-                    </a:p>
-                  </a:txBody>
-                  <a:tcPr>
-                    <a:solidFill>
-                      <a:srgbClr val="1F3A4D"/>
-                    </a:solidFill>
-                  </a:tcPr>
-                </a:tc>
-                <a:tc>
-                  <a:txBody>
-                    <a:bodyPr/>
-                    <a:lstStyle/>
-                    <a:p>
-                      <a:pPr algn="ctr">
-                        <a:defRPr b="1" sz="1300">
-                          <a:solidFill>
-                            <a:srgbClr val="FFFFFF"/>
-                          </a:solidFill>
-                        </a:defRPr>
-                      </a:pPr>
-                      <a:r>
-                        <a:t>Combined zone (best)</a:t>
-                      </a:r>
-                    </a:p>
-                  </a:txBody>
-                  <a:tcPr>
-                    <a:solidFill>
-                      <a:srgbClr val="1F3A4D"/>
-                    </a:solidFill>
-                  </a:tcPr>
-                </a:tc>
-                <a:tc>
-                  <a:txBody>
-                    <a:bodyPr/>
-                    <a:lstStyle/>
-                    <a:p>
-                      <a:pPr algn="ctr">
-                        <a:defRPr b="1" sz="1300">
-                          <a:solidFill>
-                            <a:srgbClr val="FFFFFF"/>
-                          </a:solidFill>
-                        </a:defRPr>
-                      </a:pPr>
-                      <a:r>
-                        <a:t>France alone</a:t>
-                      </a:r>
-                    </a:p>
-                  </a:txBody>
-                  <a:tcPr>
-                    <a:solidFill>
-                      <a:srgbClr val="1F3A4D"/>
-                    </a:solidFill>
-                  </a:tcPr>
-                </a:tc>
-                <a:tc>
-                  <a:txBody>
-                    <a:bodyPr/>
-                    <a:lstStyle/>
-                    <a:p>
-                      <a:pPr algn="ctr">
-                        <a:defRPr b="1" sz="1300">
-                          <a:solidFill>
-                            <a:srgbClr val="FFFFFF"/>
-                          </a:solidFill>
-                        </a:defRPr>
-                      </a:pPr>
-                      <a:r>
-                        <a:t>All 10 countries</a:t>
-                      </a:r>
-                    </a:p>
-                  </a:txBody>
-                  <a:tcPr>
-                    <a:solidFill>
-                      <a:srgbClr val="1F3A4D"/>
-                    </a:solidFill>
-                  </a:tcPr>
-                </a:tc>
-              </a:tr>
-              <a:tr h="502920">
-                <a:tc>
-                  <a:txBody>
-                    <a:bodyPr/>
-                    <a:lstStyle/>
-                    <a:p>
-                      <a:pPr algn="ctr">
-                        <a:defRPr sz="1200" b="1">
-                          <a:solidFill>
-                            <a:srgbClr val="1E2220"/>
-                          </a:solidFill>
-                        </a:defRPr>
-                      </a:pPr>
-                      <a:r>
-                        <a:t>'Ran out of power' hours</a:t>
-                      </a:r>
-                    </a:p>
-                  </a:txBody>
-                  <a:tcPr>
-                    <a:solidFill>
-                      <a:srgbClr val="FFFFFF"/>
-                    </a:solidFill>
-                  </a:tcPr>
-                </a:tc>
-                <a:tc>
-                  <a:txBody>
-                    <a:bodyPr/>
-                    <a:lstStyle/>
-                    <a:p>
-                      <a:pPr algn="ctr">
-                        <a:defRPr sz="1200" b="0">
-                          <a:solidFill>
-                            <a:srgbClr val="1E2220"/>
-                          </a:solidFill>
-                        </a:defRPr>
-                      </a:pPr>
-                      <a:r>
-                        <a:t>7</a:t>
-                      </a:r>
-                    </a:p>
-                  </a:txBody>
-                  <a:tcPr>
-                    <a:solidFill>
-                      <a:srgbClr val="FFFFFF"/>
-                    </a:solidFill>
-                  </a:tcPr>
-                </a:tc>
-                <a:tc>
-                  <a:txBody>
-                    <a:bodyPr/>
-                    <a:lstStyle/>
-                    <a:p>
-                      <a:pPr algn="ctr">
-                        <a:defRPr sz="1200" b="0">
-                          <a:solidFill>
-                            <a:srgbClr val="1E2220"/>
-                          </a:solidFill>
-                        </a:defRPr>
-                      </a:pPr>
-                      <a:r>
-                        <a:t>167</a:t>
-                      </a:r>
-                    </a:p>
-                  </a:txBody>
-                  <a:tcPr>
-                    <a:solidFill>
-                      <a:srgbClr val="FFFFFF"/>
-                    </a:solidFill>
-                  </a:tcPr>
-                </a:tc>
-                <a:tc>
-                  <a:txBody>
-                    <a:bodyPr/>
-                    <a:lstStyle/>
-                    <a:p>
-                      <a:pPr algn="ctr">
-                        <a:defRPr sz="1200" b="0">
-                          <a:solidFill>
-                            <a:srgbClr val="1E2220"/>
-                          </a:solidFill>
-                        </a:defRPr>
-                      </a:pPr>
-                      <a:r>
-                        <a:t>120</a:t>
-                      </a:r>
-                    </a:p>
-                  </a:txBody>
-                  <a:tcPr>
-                    <a:solidFill>
-                      <a:srgbClr val="FFFFFF"/>
-                    </a:solidFill>
-                  </a:tcPr>
-                </a:tc>
-              </a:tr>
-              <a:tr h="502920">
-                <a:tc>
-                  <a:txBody>
-                    <a:bodyPr/>
-                    <a:lstStyle/>
-                    <a:p>
-                      <a:pPr algn="ctr">
-                        <a:defRPr sz="1200" b="1">
-                          <a:solidFill>
-                            <a:srgbClr val="1E2220"/>
-                          </a:solidFill>
-                        </a:defRPr>
-                      </a:pPr>
-                      <a:r>
-                        <a:t>Average price gap, ordinary days</a:t>
-                      </a:r>
-                    </a:p>
-                  </a:txBody>
-                  <a:tcPr>
-                    <a:solidFill>
-                      <a:srgbClr val="EEF0E9"/>
-                    </a:solidFill>
-                  </a:tcPr>
-                </a:tc>
-                <a:tc>
-                  <a:txBody>
-                    <a:bodyPr/>
-                    <a:lstStyle/>
-                    <a:p>
-                      <a:pPr algn="ctr">
-                        <a:defRPr sz="1200" b="0">
-                          <a:solidFill>
-                            <a:srgbClr val="1E2220"/>
-                          </a:solidFill>
-                        </a:defRPr>
-                      </a:pPr>
-                      <a:r>
-                        <a:t>-2.90</a:t>
-                      </a:r>
-                    </a:p>
-                  </a:txBody>
-                  <a:tcPr>
-                    <a:solidFill>
-                      <a:srgbClr val="EEF0E9"/>
-                    </a:solidFill>
-                  </a:tcPr>
-                </a:tc>
-                <a:tc>
-                  <a:txBody>
-                    <a:bodyPr/>
-                    <a:lstStyle/>
-                    <a:p>
-                      <a:pPr algn="ctr">
-                        <a:defRPr sz="1200" b="0">
-                          <a:solidFill>
-                            <a:srgbClr val="1E2220"/>
-                          </a:solidFill>
-                        </a:defRPr>
-                      </a:pPr>
-                      <a:r>
-                        <a:t>+9.65</a:t>
-                      </a:r>
-                    </a:p>
-                  </a:txBody>
-                  <a:tcPr>
-                    <a:solidFill>
-                      <a:srgbClr val="EEF0E9"/>
-                    </a:solidFill>
-                  </a:tcPr>
-                </a:tc>
-                <a:tc>
-                  <a:txBody>
-                    <a:bodyPr/>
-                    <a:lstStyle/>
-                    <a:p>
-                      <a:pPr algn="ctr">
-                        <a:defRPr sz="1200" b="0">
-                          <a:solidFill>
-                            <a:srgbClr val="1E2220"/>
-                          </a:solidFill>
-                        </a:defRPr>
-                      </a:pPr>
-                      <a:r>
-                        <a:t>+4.87</a:t>
-                      </a:r>
-                    </a:p>
-                  </a:txBody>
-                  <a:tcPr>
-                    <a:solidFill>
-                      <a:srgbClr val="EEF0E9"/>
-                    </a:solidFill>
-                  </a:tcPr>
-                </a:tc>
-              </a:tr>
-              <a:tr h="502920">
-                <a:tc>
-                  <a:txBody>
-                    <a:bodyPr/>
-                    <a:lstStyle/>
-                    <a:p>
-                      <a:pPr algn="ctr">
-                        <a:defRPr sz="1200" b="1">
-                          <a:solidFill>
-                            <a:srgbClr val="1E2220"/>
-                          </a:solidFill>
-                        </a:defRPr>
-                      </a:pPr>
-                      <a:r>
-                        <a:t>Match quality (trustworthiness)</a:t>
-                      </a:r>
-                    </a:p>
-                  </a:txBody>
-                  <a:tcPr>
-                    <a:solidFill>
-                      <a:srgbClr val="FFFFFF"/>
-                    </a:solidFill>
-                  </a:tcPr>
-                </a:tc>
-                <a:tc>
-                  <a:txBody>
-                    <a:bodyPr/>
-                    <a:lstStyle/>
-                    <a:p>
-                      <a:pPr algn="ctr">
-                        <a:defRPr sz="1200" b="0">
-                          <a:solidFill>
-                            <a:srgbClr val="1E2220"/>
-                          </a:solidFill>
-                        </a:defRPr>
-                      </a:pPr>
-                      <a:r>
-                        <a:t>0.717</a:t>
-                      </a:r>
-                    </a:p>
-                  </a:txBody>
-                  <a:tcPr>
-                    <a:solidFill>
-                      <a:srgbClr val="FFFFFF"/>
-                    </a:solidFill>
-                  </a:tcPr>
-                </a:tc>
-                <a:tc>
-                  <a:txBody>
-                    <a:bodyPr/>
-                    <a:lstStyle/>
-                    <a:p>
-                      <a:pPr algn="ctr">
-                        <a:defRPr sz="1200" b="0">
-                          <a:solidFill>
-                            <a:srgbClr val="1E2220"/>
-                          </a:solidFill>
-                        </a:defRPr>
-                      </a:pPr>
-                      <a:r>
-                        <a:t>0.716</a:t>
-                      </a:r>
-                    </a:p>
-                  </a:txBody>
-                  <a:tcPr>
-                    <a:solidFill>
-                      <a:srgbClr val="FFFFFF"/>
-                    </a:solidFill>
-                  </a:tcPr>
-                </a:tc>
-                <a:tc>
-                  <a:txBody>
-                    <a:bodyPr/>
-                    <a:lstStyle/>
-                    <a:p>
-                      <a:pPr algn="ctr">
-                        <a:defRPr sz="1200" b="0">
-                          <a:solidFill>
-                            <a:srgbClr val="1E2220"/>
-                          </a:solidFill>
-                        </a:defRPr>
-                      </a:pPr>
-                      <a:r>
-                        <a:t>0.731 (best yet)</a:t>
-                      </a:r>
-                    </a:p>
-                  </a:txBody>
-                  <a:tcPr>
-                    <a:solidFill>
-                      <a:srgbClr val="FFFFFF"/>
-                    </a:solidFill>
-                  </a:tcPr>
-                </a:tc>
-              </a:tr>
-            </a:tbl>
-          </a:graphicData>
-        </a:graphic>
-      </p:graphicFrame>
-      <p:sp>
-        <p:nvSpPr>
-          <p:cNvPr id="5" name="TextBox 4"/>
+              <a:t>50</a:t>
+            </a:r>
+          </a:p>
+        </p:txBody>
+      </p:sp>
+      <p:sp>
+        <p:nvSpPr>
+          <p:cNvPr id="4" name="TextBox 3"/>
           <p:cNvSpPr txBox="1"/>
           <p:nvPr/>
         </p:nvSpPr>
         <p:spPr>
           <a:xfrm>
-            <a:off x="640080" y="3566160"/>
-            <a:ext cx="10881360" cy="1097280"/>
+            <a:off x="502920" y="1234440"/>
+            <a:ext cx="11155680" cy="5303520"/>
           </a:xfrm>
           <a:prstGeom prst="rect">
             <a:avLst/>
@@ -15119,21 +15128,12 @@
           <a:noFill/>
         </p:spPr>
         <p:txBody>
-          <a:bodyPr wrap="none">
+          <a:bodyPr wrap="square">
             <a:spAutoFit/>
           </a:bodyPr>
           <a:lstStyle/>
           <a:p>
-            <a:pPr>
-              <a:defRPr sz="1300" i="1">
-                <a:solidFill>
-                  <a:srgbClr val="5A605C"/>
-                </a:solidFill>
-              </a:defRPr>
-            </a:pPr>
-            <a:r>
-              <a:t>Genuinely surprising: going all the way to 10 real countries actually did BETTER than splitting out just one - likely because Germany can now draw on many countries' cheap power at once, instead of being stuck behind one narrow link. But it still doesn't beat the original combined-zone approach on the two measures that matter most. Decision: keep the combined zone as our best, standing result.</a:t>
-            </a:r>
+            <a:endParaRPr/>
           </a:p>
         </p:txBody>
       </p:sp>
@@ -15290,7 +15290,7 @@
           <a:noFill/>
         </p:spPr>
         <p:txBody>
-          <a:bodyPr wrap="none">
+          <a:bodyPr wrap="square">
             <a:spAutoFit/>
           </a:bodyPr>
           <a:lstStyle/>
@@ -15680,7 +15680,7 @@
           <a:noFill/>
         </p:spPr>
         <p:txBody>
-          <a:bodyPr wrap="none">
+          <a:bodyPr wrap="square">
             <a:spAutoFit/>
           </a:bodyPr>
           <a:lstStyle/>
